--- a/deck_assets/StudyStrike_Redesigned.pptx
+++ b/deck_assets/StudyStrike_Redesigned.pptx
@@ -7,18 +7,20 @@
   <p:sldIdLst>
     <p:sldId id="256" r:id="rId7"/>
     <p:sldId id="257" r:id="rId8"/>
-    <p:sldId id="258" r:id="rId9"/>
+    <p:sldId id="273" r:id="rId24"/>
     <p:sldId id="259" r:id="rId10"/>
-    <p:sldId id="260" r:id="rId11"/>
+    <p:sldId id="274" r:id="rId25"/>
+    <p:sldId id="262" r:id="rId13"/>
     <p:sldId id="261" r:id="rId12"/>
-    <p:sldId id="262" r:id="rId13"/>
     <p:sldId id="263" r:id="rId14"/>
     <p:sldId id="264" r:id="rId15"/>
+    <p:sldId id="266" r:id="rId17"/>
     <p:sldId id="265" r:id="rId16"/>
-    <p:sldId id="266" r:id="rId17"/>
     <p:sldId id="267" r:id="rId18"/>
+    <p:sldId id="269" r:id="rId20"/>
     <p:sldId id="268" r:id="rId19"/>
-    <p:sldId id="269" r:id="rId20"/>
+    <p:sldId id="275" r:id="rId26"/>
+    <p:sldId id="276" r:id="rId27"/>
     <p:sldId id="270" r:id="rId21"/>
     <p:sldId id="271" r:id="rId22"/>
     <p:sldId id="272" r:id="rId23"/>
@@ -12841,7 +12843,7 @@
         </p:nvSpPr>
         <p:spPr>
           <a:xfrm>
-            <a:off x="914400" y="2468880"/>
+            <a:off x="914400" y="2286000"/>
             <a:ext cx="10332720" cy="1097280"/>
           </a:xfrm>
           <a:prstGeom prst="rect">
@@ -12903,6 +12905,51 @@
       <p:sp>
         <p:nvSpPr>
           <p:cNvPr id="8" name="TextBox 7"/>
+          <p:cNvSpPr txBox="1"/>
+          <p:nvPr/>
+        </p:nvSpPr>
+        <p:spPr>
+          <a:xfrm>
+            <a:off x="914400" y="3611880"/>
+            <a:ext cx="10332720" cy="457200"/>
+          </a:xfrm>
+          <a:prstGeom prst="rect">
+            <a:avLst/>
+          </a:prstGeom>
+          <a:noFill/>
+        </p:spPr>
+        <p:txBody>
+          <a:bodyPr wrap="square" anchor="t" lIns="45720" rIns="45720" tIns="18288" bIns="18288">
+            <a:spAutoFit/>
+          </a:bodyPr>
+          <a:lstStyle/>
+          <a:p>
+            <a:pPr algn="ctr">
+              <a:lnSpc>
+                <a:spcPct val="100000"/>
+              </a:lnSpc>
+              <a:spcBef>
+                <a:spcPts val="0"/>
+              </a:spcBef>
+              <a:spcAft>
+                <a:spcPts val="400"/>
+              </a:spcAft>
+            </a:pPr>
+            <a:r>
+              <a:rPr sz="1700" b="1">
+                <a:solidFill>
+                  <a:srgbClr val="C5DAF0"/>
+                </a:solidFill>
+                <a:latin typeface="Segoe UI"/>
+              </a:rPr>
+              <a:t>Thank you  ·  Questions &amp; Answers welcome</a:t>
+            </a:r>
+          </a:p>
+        </p:txBody>
+      </p:sp>
+      <p:sp>
+        <p:nvSpPr>
+          <p:cNvPr id="9" name="TextBox 8"/>
           <p:cNvSpPr txBox="1"/>
           <p:nvPr/>
         </p:nvSpPr>
@@ -12947,7 +12994,7 @@
       </p:sp>
       <p:sp>
         <p:nvSpPr>
-          <p:cNvPr id="9" name="TextBox 8"/>
+          <p:cNvPr id="10" name="TextBox 9"/>
           <p:cNvSpPr txBox="1"/>
           <p:nvPr/>
         </p:nvSpPr>
@@ -12992,7 +13039,7 @@
       </p:sp>
       <p:sp>
         <p:nvSpPr>
-          <p:cNvPr id="10" name="TextBox 9"/>
+          <p:cNvPr id="11" name="TextBox 10"/>
           <p:cNvSpPr txBox="1"/>
           <p:nvPr/>
         </p:nvSpPr>
@@ -13037,7 +13084,7 @@
       </p:sp>
       <p:sp>
         <p:nvSpPr>
-          <p:cNvPr id="11" name="TextBox 10"/>
+          <p:cNvPr id="12" name="TextBox 11"/>
           <p:cNvSpPr txBox="1"/>
           <p:nvPr/>
         </p:nvSpPr>
@@ -13082,7 +13129,7 @@
       </p:sp>
       <p:sp>
         <p:nvSpPr>
-          <p:cNvPr id="12" name="TextBox 11"/>
+          <p:cNvPr id="13" name="TextBox 12"/>
           <p:cNvSpPr txBox="1"/>
           <p:nvPr/>
         </p:nvSpPr>
@@ -13127,7 +13174,7 @@
       </p:sp>
       <p:sp>
         <p:nvSpPr>
-          <p:cNvPr id="13" name="TextBox 12"/>
+          <p:cNvPr id="14" name="TextBox 13"/>
           <p:cNvSpPr txBox="1"/>
           <p:nvPr/>
         </p:nvSpPr>
@@ -13172,7 +13219,7 @@
       </p:sp>
       <p:sp>
         <p:nvSpPr>
-          <p:cNvPr id="14" name="TextBox 13"/>
+          <p:cNvPr id="15" name="TextBox 14"/>
           <p:cNvSpPr txBox="1"/>
           <p:nvPr/>
         </p:nvSpPr>
@@ -13217,7 +13264,7 @@
       </p:sp>
       <p:sp>
         <p:nvSpPr>
-          <p:cNvPr id="15" name="TextBox 14"/>
+          <p:cNvPr id="16" name="TextBox 15"/>
           <p:cNvSpPr txBox="1"/>
           <p:nvPr/>
         </p:nvSpPr>
@@ -13262,7 +13309,7 @@
       </p:sp>
       <p:sp>
         <p:nvSpPr>
-          <p:cNvPr id="16" name="TextBox 15"/>
+          <p:cNvPr id="17" name="TextBox 16"/>
           <p:cNvSpPr txBox="1"/>
           <p:nvPr/>
         </p:nvSpPr>
@@ -13301,6 +13348,3082 @@
                 <a:latin typeface="Segoe UI"/>
               </a:rPr>
               <a:t>StudyStrike — Compete. Excel. Succeed.   |   FWS310, Spring 2025–2026   |   Instructor: Abdelrahman El Adly</a:t>
+            </a:r>
+          </a:p>
+        </p:txBody>
+      </p:sp>
+    </p:spTree>
+  </p:cSld>
+  <p:clrMapOvr>
+    <a:masterClrMapping/>
+  </p:clrMapOvr>
+</p:sld>
+</file>
+
+<file path=ppt/slides/slide18.xml><?xml version="1.0" encoding="utf-8"?>
+<p:sld xmlns:a="http://schemas.openxmlformats.org/drawingml/2006/main" xmlns:p="http://schemas.openxmlformats.org/presentationml/2006/main" xmlns:r="http://schemas.openxmlformats.org/officeDocument/2006/relationships">
+  <p:cSld>
+    <p:spTree>
+      <p:nvGrpSpPr>
+        <p:cNvPr id="1" name=""/>
+        <p:cNvGrpSpPr/>
+        <p:nvPr/>
+      </p:nvGrpSpPr>
+      <p:grpSpPr/>
+      <p:sp>
+        <p:nvSpPr>
+          <p:cNvPr id="2" name="Rectangle 1"/>
+          <p:cNvSpPr/>
+          <p:nvPr/>
+        </p:nvSpPr>
+        <p:spPr>
+          <a:xfrm>
+            <a:off x="0" y="0"/>
+            <a:ext cx="12191695" cy="6858000"/>
+          </a:xfrm>
+          <a:prstGeom prst="rect">
+            <a:avLst/>
+          </a:prstGeom>
+          <a:solidFill>
+            <a:srgbClr val="F8FAFD"/>
+          </a:solidFill>
+          <a:ln>
+            <a:noFill/>
+          </a:ln>
+          <a:effectLst/>
+        </p:spPr>
+        <p:style>
+          <a:lnRef idx="1">
+            <a:schemeClr val="accent1"/>
+          </a:lnRef>
+          <a:fillRef idx="3">
+            <a:schemeClr val="accent1"/>
+          </a:fillRef>
+          <a:effectRef idx="2">
+            <a:schemeClr val="accent1"/>
+          </a:effectRef>
+          <a:fontRef idx="minor">
+            <a:schemeClr val="lt1"/>
+          </a:fontRef>
+        </p:style>
+        <p:txBody>
+          <a:bodyPr rtlCol="0" anchor="ctr"/>
+          <a:lstStyle/>
+          <a:p>
+            <a:pPr algn="ctr"/>
+          </a:p>
+        </p:txBody>
+      </p:sp>
+      <p:sp>
+        <p:nvSpPr>
+          <p:cNvPr id="3" name="Rectangle 2"/>
+          <p:cNvSpPr/>
+          <p:nvPr/>
+        </p:nvSpPr>
+        <p:spPr>
+          <a:xfrm>
+            <a:off x="0" y="0"/>
+            <a:ext cx="12191695" cy="146304"/>
+          </a:xfrm>
+          <a:prstGeom prst="rect">
+            <a:avLst/>
+          </a:prstGeom>
+          <a:solidFill>
+            <a:srgbClr val="F5A623"/>
+          </a:solidFill>
+          <a:ln>
+            <a:noFill/>
+          </a:ln>
+          <a:effectLst/>
+        </p:spPr>
+        <p:style>
+          <a:lnRef idx="1">
+            <a:schemeClr val="accent1"/>
+          </a:lnRef>
+          <a:fillRef idx="3">
+            <a:schemeClr val="accent1"/>
+          </a:fillRef>
+          <a:effectRef idx="2">
+            <a:schemeClr val="accent1"/>
+          </a:effectRef>
+          <a:fontRef idx="minor">
+            <a:schemeClr val="lt1"/>
+          </a:fontRef>
+        </p:style>
+        <p:txBody>
+          <a:bodyPr rtlCol="0" anchor="ctr"/>
+          <a:lstStyle/>
+          <a:p>
+            <a:pPr algn="ctr"/>
+          </a:p>
+        </p:txBody>
+      </p:sp>
+      <p:sp>
+        <p:nvSpPr>
+          <p:cNvPr id="4" name="TextBox 3"/>
+          <p:cNvSpPr txBox="1"/>
+          <p:nvPr/>
+        </p:nvSpPr>
+        <p:spPr>
+          <a:xfrm>
+            <a:off x="502920" y="310896"/>
+            <a:ext cx="11155680" cy="365760"/>
+          </a:xfrm>
+          <a:prstGeom prst="rect">
+            <a:avLst/>
+          </a:prstGeom>
+          <a:noFill/>
+        </p:spPr>
+        <p:txBody>
+          <a:bodyPr wrap="square" anchor="t" lIns="45720" rIns="45720" tIns="18288" bIns="18288">
+            <a:spAutoFit/>
+          </a:bodyPr>
+          <a:lstStyle/>
+          <a:p>
+            <a:pPr algn="l">
+              <a:lnSpc>
+                <a:spcPct val="100000"/>
+              </a:lnSpc>
+              <a:spcBef>
+                <a:spcPts val="0"/>
+              </a:spcBef>
+              <a:spcAft>
+                <a:spcPts val="400"/>
+              </a:spcAft>
+            </a:pPr>
+            <a:r>
+              <a:rPr sz="1300" b="1">
+                <a:solidFill>
+                  <a:srgbClr val="0D7377"/>
+                </a:solidFill>
+                <a:latin typeface="Segoe UI"/>
+              </a:rPr>
+              <a:t>WHY CURRENT TOOLS FAIL</a:t>
+            </a:r>
+          </a:p>
+        </p:txBody>
+      </p:sp>
+      <p:sp>
+        <p:nvSpPr>
+          <p:cNvPr id="5" name="TextBox 4"/>
+          <p:cNvSpPr txBox="1"/>
+          <p:nvPr/>
+        </p:nvSpPr>
+        <p:spPr>
+          <a:xfrm>
+            <a:off x="502920" y="566928"/>
+            <a:ext cx="11155680" cy="914400"/>
+          </a:xfrm>
+          <a:prstGeom prst="rect">
+            <a:avLst/>
+          </a:prstGeom>
+          <a:noFill/>
+        </p:spPr>
+        <p:txBody>
+          <a:bodyPr wrap="square" anchor="t" lIns="45720" rIns="45720" tIns="18288" bIns="18288">
+            <a:spAutoFit/>
+          </a:bodyPr>
+          <a:lstStyle/>
+          <a:p>
+            <a:pPr algn="l">
+              <a:lnSpc>
+                <a:spcPct val="100000"/>
+              </a:lnSpc>
+              <a:spcBef>
+                <a:spcPts val="0"/>
+              </a:spcBef>
+              <a:spcAft>
+                <a:spcPts val="400"/>
+              </a:spcAft>
+            </a:pPr>
+            <a:r>
+              <a:rPr sz="3000" b="1">
+                <a:solidFill>
+                  <a:srgbClr val="0F3460"/>
+                </a:solidFill>
+                <a:latin typeface="Segoe UI"/>
+              </a:rPr>
+              <a:t>Plenty of tools exist — none convert academic intent into action</a:t>
+            </a:r>
+          </a:p>
+        </p:txBody>
+      </p:sp>
+      <p:sp>
+        <p:nvSpPr>
+          <p:cNvPr id="6" name="Rectangle 5"/>
+          <p:cNvSpPr/>
+          <p:nvPr/>
+        </p:nvSpPr>
+        <p:spPr>
+          <a:xfrm>
+            <a:off x="502920" y="1691640"/>
+            <a:ext cx="4251960" cy="658368"/>
+          </a:xfrm>
+          <a:prstGeom prst="rect">
+            <a:avLst/>
+          </a:prstGeom>
+          <a:solidFill>
+            <a:srgbClr val="0F3460"/>
+          </a:solidFill>
+          <a:ln w="12700">
+            <a:solidFill>
+              <a:srgbClr val="E2EAF4"/>
+            </a:solidFill>
+          </a:ln>
+          <a:effectLst/>
+        </p:spPr>
+        <p:style>
+          <a:lnRef idx="1">
+            <a:schemeClr val="accent1"/>
+          </a:lnRef>
+          <a:fillRef idx="3">
+            <a:schemeClr val="accent1"/>
+          </a:fillRef>
+          <a:effectRef idx="2">
+            <a:schemeClr val="accent1"/>
+          </a:effectRef>
+          <a:fontRef idx="minor">
+            <a:schemeClr val="lt1"/>
+          </a:fontRef>
+        </p:style>
+        <p:txBody>
+          <a:bodyPr rtlCol="0" anchor="ctr"/>
+          <a:lstStyle/>
+          <a:p>
+            <a:pPr algn="ctr"/>
+          </a:p>
+        </p:txBody>
+      </p:sp>
+      <p:sp>
+        <p:nvSpPr>
+          <p:cNvPr id="7" name="TextBox 6"/>
+          <p:cNvSpPr txBox="1"/>
+          <p:nvPr/>
+        </p:nvSpPr>
+        <p:spPr>
+          <a:xfrm>
+            <a:off x="640080" y="1691640"/>
+            <a:ext cx="3977640" cy="658368"/>
+          </a:xfrm>
+          <a:prstGeom prst="rect">
+            <a:avLst/>
+          </a:prstGeom>
+          <a:noFill/>
+        </p:spPr>
+        <p:txBody>
+          <a:bodyPr wrap="square" anchor="ctr" lIns="45720" rIns="45720" tIns="18288" bIns="18288">
+            <a:spAutoFit/>
+          </a:bodyPr>
+          <a:lstStyle/>
+          <a:p>
+            <a:pPr algn="l">
+              <a:lnSpc>
+                <a:spcPct val="100000"/>
+              </a:lnSpc>
+              <a:spcBef>
+                <a:spcPts val="0"/>
+              </a:spcBef>
+              <a:spcAft>
+                <a:spcPts val="400"/>
+              </a:spcAft>
+            </a:pPr>
+            <a:r>
+              <a:rPr sz="1250" b="1">
+                <a:solidFill>
+                  <a:srgbClr val="FFFFFF"/>
+                </a:solidFill>
+                <a:latin typeface="Segoe UI"/>
+              </a:rPr>
+              <a:t>Existing solution</a:t>
+            </a:r>
+          </a:p>
+        </p:txBody>
+      </p:sp>
+      <p:sp>
+        <p:nvSpPr>
+          <p:cNvPr id="8" name="Rectangle 7"/>
+          <p:cNvSpPr/>
+          <p:nvPr/>
+        </p:nvSpPr>
+        <p:spPr>
+          <a:xfrm>
+            <a:off x="4846320" y="1691640"/>
+            <a:ext cx="3611880" cy="658368"/>
+          </a:xfrm>
+          <a:prstGeom prst="rect">
+            <a:avLst/>
+          </a:prstGeom>
+          <a:solidFill>
+            <a:srgbClr val="0F3460"/>
+          </a:solidFill>
+          <a:ln w="12700">
+            <a:solidFill>
+              <a:srgbClr val="E2EAF4"/>
+            </a:solidFill>
+          </a:ln>
+          <a:effectLst/>
+        </p:spPr>
+        <p:style>
+          <a:lnRef idx="1">
+            <a:schemeClr val="accent1"/>
+          </a:lnRef>
+          <a:fillRef idx="3">
+            <a:schemeClr val="accent1"/>
+          </a:fillRef>
+          <a:effectRef idx="2">
+            <a:schemeClr val="accent1"/>
+          </a:effectRef>
+          <a:fontRef idx="minor">
+            <a:schemeClr val="lt1"/>
+          </a:fontRef>
+        </p:style>
+        <p:txBody>
+          <a:bodyPr rtlCol="0" anchor="ctr"/>
+          <a:lstStyle/>
+          <a:p>
+            <a:pPr algn="ctr"/>
+          </a:p>
+        </p:txBody>
+      </p:sp>
+      <p:sp>
+        <p:nvSpPr>
+          <p:cNvPr id="9" name="TextBox 8"/>
+          <p:cNvSpPr txBox="1"/>
+          <p:nvPr/>
+        </p:nvSpPr>
+        <p:spPr>
+          <a:xfrm>
+            <a:off x="4983480" y="1691640"/>
+            <a:ext cx="3337560" cy="658368"/>
+          </a:xfrm>
+          <a:prstGeom prst="rect">
+            <a:avLst/>
+          </a:prstGeom>
+          <a:noFill/>
+        </p:spPr>
+        <p:txBody>
+          <a:bodyPr wrap="square" anchor="ctr" lIns="45720" rIns="45720" tIns="18288" bIns="18288">
+            <a:spAutoFit/>
+          </a:bodyPr>
+          <a:lstStyle/>
+          <a:p>
+            <a:pPr algn="l">
+              <a:lnSpc>
+                <a:spcPct val="100000"/>
+              </a:lnSpc>
+              <a:spcBef>
+                <a:spcPts val="0"/>
+              </a:spcBef>
+              <a:spcAft>
+                <a:spcPts val="400"/>
+              </a:spcAft>
+            </a:pPr>
+            <a:r>
+              <a:rPr sz="1250" b="1">
+                <a:solidFill>
+                  <a:srgbClr val="FFFFFF"/>
+                </a:solidFill>
+                <a:latin typeface="Segoe UI"/>
+              </a:rPr>
+              <a:t>Its drawback</a:t>
+            </a:r>
+          </a:p>
+        </p:txBody>
+      </p:sp>
+      <p:sp>
+        <p:nvSpPr>
+          <p:cNvPr id="10" name="Rectangle 9"/>
+          <p:cNvSpPr/>
+          <p:nvPr/>
+        </p:nvSpPr>
+        <p:spPr>
+          <a:xfrm>
+            <a:off x="8549640" y="1691640"/>
+            <a:ext cx="3136392" cy="658368"/>
+          </a:xfrm>
+          <a:prstGeom prst="rect">
+            <a:avLst/>
+          </a:prstGeom>
+          <a:solidFill>
+            <a:srgbClr val="0F3460"/>
+          </a:solidFill>
+          <a:ln w="12700">
+            <a:solidFill>
+              <a:srgbClr val="E2EAF4"/>
+            </a:solidFill>
+          </a:ln>
+          <a:effectLst/>
+        </p:spPr>
+        <p:style>
+          <a:lnRef idx="1">
+            <a:schemeClr val="accent1"/>
+          </a:lnRef>
+          <a:fillRef idx="3">
+            <a:schemeClr val="accent1"/>
+          </a:fillRef>
+          <a:effectRef idx="2">
+            <a:schemeClr val="accent1"/>
+          </a:effectRef>
+          <a:fontRef idx="minor">
+            <a:schemeClr val="lt1"/>
+          </a:fontRef>
+        </p:style>
+        <p:txBody>
+          <a:bodyPr rtlCol="0" anchor="ctr"/>
+          <a:lstStyle/>
+          <a:p>
+            <a:pPr algn="ctr"/>
+          </a:p>
+        </p:txBody>
+      </p:sp>
+      <p:sp>
+        <p:nvSpPr>
+          <p:cNvPr id="11" name="TextBox 10"/>
+          <p:cNvSpPr txBox="1"/>
+          <p:nvPr/>
+        </p:nvSpPr>
+        <p:spPr>
+          <a:xfrm>
+            <a:off x="8686800" y="1691640"/>
+            <a:ext cx="2862072" cy="658368"/>
+          </a:xfrm>
+          <a:prstGeom prst="rect">
+            <a:avLst/>
+          </a:prstGeom>
+          <a:noFill/>
+        </p:spPr>
+        <p:txBody>
+          <a:bodyPr wrap="square" anchor="ctr" lIns="45720" rIns="45720" tIns="18288" bIns="18288">
+            <a:spAutoFit/>
+          </a:bodyPr>
+          <a:lstStyle/>
+          <a:p>
+            <a:pPr algn="l">
+              <a:lnSpc>
+                <a:spcPct val="100000"/>
+              </a:lnSpc>
+              <a:spcBef>
+                <a:spcPts val="0"/>
+              </a:spcBef>
+              <a:spcAft>
+                <a:spcPts val="400"/>
+              </a:spcAft>
+            </a:pPr>
+            <a:r>
+              <a:rPr sz="1250" b="1">
+                <a:solidFill>
+                  <a:srgbClr val="FFFFFF"/>
+                </a:solidFill>
+                <a:latin typeface="Segoe UI"/>
+              </a:rPr>
+              <a:t>Who it fails</a:t>
+            </a:r>
+          </a:p>
+        </p:txBody>
+      </p:sp>
+      <p:sp>
+        <p:nvSpPr>
+          <p:cNvPr id="12" name="Rectangle 11"/>
+          <p:cNvSpPr/>
+          <p:nvPr/>
+        </p:nvSpPr>
+        <p:spPr>
+          <a:xfrm>
+            <a:off x="502920" y="2404872"/>
+            <a:ext cx="4251960" cy="658368"/>
+          </a:xfrm>
+          <a:prstGeom prst="rect">
+            <a:avLst/>
+          </a:prstGeom>
+          <a:solidFill>
+            <a:srgbClr val="FFFFFF"/>
+          </a:solidFill>
+          <a:ln w="12700">
+            <a:solidFill>
+              <a:srgbClr val="E2EAF4"/>
+            </a:solidFill>
+          </a:ln>
+          <a:effectLst/>
+        </p:spPr>
+        <p:style>
+          <a:lnRef idx="1">
+            <a:schemeClr val="accent1"/>
+          </a:lnRef>
+          <a:fillRef idx="3">
+            <a:schemeClr val="accent1"/>
+          </a:fillRef>
+          <a:effectRef idx="2">
+            <a:schemeClr val="accent1"/>
+          </a:effectRef>
+          <a:fontRef idx="minor">
+            <a:schemeClr val="lt1"/>
+          </a:fontRef>
+        </p:style>
+        <p:txBody>
+          <a:bodyPr rtlCol="0" anchor="ctr"/>
+          <a:lstStyle/>
+          <a:p>
+            <a:pPr algn="ctr"/>
+          </a:p>
+        </p:txBody>
+      </p:sp>
+      <p:sp>
+        <p:nvSpPr>
+          <p:cNvPr id="13" name="TextBox 12"/>
+          <p:cNvSpPr txBox="1"/>
+          <p:nvPr/>
+        </p:nvSpPr>
+        <p:spPr>
+          <a:xfrm>
+            <a:off x="640080" y="2404872"/>
+            <a:ext cx="3977640" cy="658368"/>
+          </a:xfrm>
+          <a:prstGeom prst="rect">
+            <a:avLst/>
+          </a:prstGeom>
+          <a:noFill/>
+        </p:spPr>
+        <p:txBody>
+          <a:bodyPr wrap="square" anchor="ctr" lIns="45720" rIns="45720" tIns="18288" bIns="18288">
+            <a:spAutoFit/>
+          </a:bodyPr>
+          <a:lstStyle/>
+          <a:p>
+            <a:pPr algn="l">
+              <a:lnSpc>
+                <a:spcPct val="100000"/>
+              </a:lnSpc>
+              <a:spcBef>
+                <a:spcPts val="0"/>
+              </a:spcBef>
+              <a:spcAft>
+                <a:spcPts val="400"/>
+              </a:spcAft>
+            </a:pPr>
+            <a:r>
+              <a:rPr sz="1250" b="1">
+                <a:solidFill>
+                  <a:srgbClr val="1A2540"/>
+                </a:solidFill>
+                <a:latin typeface="Segoe UI"/>
+              </a:rPr>
+              <a:t>Planner &amp; list apps  (Todoist, Notion)</a:t>
+            </a:r>
+          </a:p>
+        </p:txBody>
+      </p:sp>
+      <p:sp>
+        <p:nvSpPr>
+          <p:cNvPr id="14" name="Rectangle 13"/>
+          <p:cNvSpPr/>
+          <p:nvPr/>
+        </p:nvSpPr>
+        <p:spPr>
+          <a:xfrm>
+            <a:off x="4846320" y="2404872"/>
+            <a:ext cx="3611880" cy="658368"/>
+          </a:xfrm>
+          <a:prstGeom prst="rect">
+            <a:avLst/>
+          </a:prstGeom>
+          <a:solidFill>
+            <a:srgbClr val="FFFFFF"/>
+          </a:solidFill>
+          <a:ln w="12700">
+            <a:solidFill>
+              <a:srgbClr val="E2EAF4"/>
+            </a:solidFill>
+          </a:ln>
+          <a:effectLst/>
+        </p:spPr>
+        <p:style>
+          <a:lnRef idx="1">
+            <a:schemeClr val="accent1"/>
+          </a:lnRef>
+          <a:fillRef idx="3">
+            <a:schemeClr val="accent1"/>
+          </a:fillRef>
+          <a:effectRef idx="2">
+            <a:schemeClr val="accent1"/>
+          </a:effectRef>
+          <a:fontRef idx="minor">
+            <a:schemeClr val="lt1"/>
+          </a:fontRef>
+        </p:style>
+        <p:txBody>
+          <a:bodyPr rtlCol="0" anchor="ctr"/>
+          <a:lstStyle/>
+          <a:p>
+            <a:pPr algn="ctr"/>
+          </a:p>
+        </p:txBody>
+      </p:sp>
+      <p:sp>
+        <p:nvSpPr>
+          <p:cNvPr id="15" name="TextBox 14"/>
+          <p:cNvSpPr txBox="1"/>
+          <p:nvPr/>
+        </p:nvSpPr>
+        <p:spPr>
+          <a:xfrm>
+            <a:off x="4983480" y="2404872"/>
+            <a:ext cx="3337560" cy="658368"/>
+          </a:xfrm>
+          <a:prstGeom prst="rect">
+            <a:avLst/>
+          </a:prstGeom>
+          <a:noFill/>
+        </p:spPr>
+        <p:txBody>
+          <a:bodyPr wrap="square" anchor="ctr" lIns="45720" rIns="45720" tIns="18288" bIns="18288">
+            <a:spAutoFit/>
+          </a:bodyPr>
+          <a:lstStyle/>
+          <a:p>
+            <a:pPr algn="l">
+              <a:lnSpc>
+                <a:spcPct val="100000"/>
+              </a:lnSpc>
+              <a:spcBef>
+                <a:spcPts val="0"/>
+              </a:spcBef>
+              <a:spcAft>
+                <a:spcPts val="400"/>
+              </a:spcAft>
+            </a:pPr>
+            <a:r>
+              <a:rPr sz="1250" b="0">
+                <a:solidFill>
+                  <a:srgbClr val="E84A5F"/>
+                </a:solidFill>
+                <a:latin typeface="Segoe UI"/>
+              </a:rPr>
+              <a:t>High manual upkeep — abandoned within days</a:t>
+            </a:r>
+          </a:p>
+        </p:txBody>
+      </p:sp>
+      <p:sp>
+        <p:nvSpPr>
+          <p:cNvPr id="16" name="Rectangle 15"/>
+          <p:cNvSpPr/>
+          <p:nvPr/>
+        </p:nvSpPr>
+        <p:spPr>
+          <a:xfrm>
+            <a:off x="8549640" y="2404872"/>
+            <a:ext cx="3136392" cy="658368"/>
+          </a:xfrm>
+          <a:prstGeom prst="rect">
+            <a:avLst/>
+          </a:prstGeom>
+          <a:solidFill>
+            <a:srgbClr val="FFFFFF"/>
+          </a:solidFill>
+          <a:ln w="12700">
+            <a:solidFill>
+              <a:srgbClr val="E2EAF4"/>
+            </a:solidFill>
+          </a:ln>
+          <a:effectLst/>
+        </p:spPr>
+        <p:style>
+          <a:lnRef idx="1">
+            <a:schemeClr val="accent1"/>
+          </a:lnRef>
+          <a:fillRef idx="3">
+            <a:schemeClr val="accent1"/>
+          </a:fillRef>
+          <a:effectRef idx="2">
+            <a:schemeClr val="accent1"/>
+          </a:effectRef>
+          <a:fontRef idx="minor">
+            <a:schemeClr val="lt1"/>
+          </a:fontRef>
+        </p:style>
+        <p:txBody>
+          <a:bodyPr rtlCol="0" anchor="ctr"/>
+          <a:lstStyle/>
+          <a:p>
+            <a:pPr algn="ctr"/>
+          </a:p>
+        </p:txBody>
+      </p:sp>
+      <p:sp>
+        <p:nvSpPr>
+          <p:cNvPr id="17" name="TextBox 16"/>
+          <p:cNvSpPr txBox="1"/>
+          <p:nvPr/>
+        </p:nvSpPr>
+        <p:spPr>
+          <a:xfrm>
+            <a:off x="8686800" y="2404872"/>
+            <a:ext cx="2862072" cy="658368"/>
+          </a:xfrm>
+          <a:prstGeom prst="rect">
+            <a:avLst/>
+          </a:prstGeom>
+          <a:noFill/>
+        </p:spPr>
+        <p:txBody>
+          <a:bodyPr wrap="square" anchor="ctr" lIns="45720" rIns="45720" tIns="18288" bIns="18288">
+            <a:spAutoFit/>
+          </a:bodyPr>
+          <a:lstStyle/>
+          <a:p>
+            <a:pPr algn="l">
+              <a:lnSpc>
+                <a:spcPct val="100000"/>
+              </a:lnSpc>
+              <a:spcBef>
+                <a:spcPts val="0"/>
+              </a:spcBef>
+              <a:spcAft>
+                <a:spcPts val="400"/>
+              </a:spcAft>
+            </a:pPr>
+            <a:r>
+              <a:rPr sz="1250" b="0">
+                <a:solidFill>
+                  <a:srgbClr val="6B7F99"/>
+                </a:solidFill>
+                <a:latin typeface="Segoe UI"/>
+              </a:rPr>
+              <a:t>Busy commuters &amp; working students</a:t>
+            </a:r>
+          </a:p>
+        </p:txBody>
+      </p:sp>
+      <p:sp>
+        <p:nvSpPr>
+          <p:cNvPr id="18" name="Rectangle 17"/>
+          <p:cNvSpPr/>
+          <p:nvPr/>
+        </p:nvSpPr>
+        <p:spPr>
+          <a:xfrm>
+            <a:off x="502920" y="3118104"/>
+            <a:ext cx="4251960" cy="658368"/>
+          </a:xfrm>
+          <a:prstGeom prst="rect">
+            <a:avLst/>
+          </a:prstGeom>
+          <a:solidFill>
+            <a:srgbClr val="FFFFFF"/>
+          </a:solidFill>
+          <a:ln w="12700">
+            <a:solidFill>
+              <a:srgbClr val="E2EAF4"/>
+            </a:solidFill>
+          </a:ln>
+          <a:effectLst/>
+        </p:spPr>
+        <p:style>
+          <a:lnRef idx="1">
+            <a:schemeClr val="accent1"/>
+          </a:lnRef>
+          <a:fillRef idx="3">
+            <a:schemeClr val="accent1"/>
+          </a:fillRef>
+          <a:effectRef idx="2">
+            <a:schemeClr val="accent1"/>
+          </a:effectRef>
+          <a:fontRef idx="minor">
+            <a:schemeClr val="lt1"/>
+          </a:fontRef>
+        </p:style>
+        <p:txBody>
+          <a:bodyPr rtlCol="0" anchor="ctr"/>
+          <a:lstStyle/>
+          <a:p>
+            <a:pPr algn="ctr"/>
+          </a:p>
+        </p:txBody>
+      </p:sp>
+      <p:sp>
+        <p:nvSpPr>
+          <p:cNvPr id="19" name="TextBox 18"/>
+          <p:cNvSpPr txBox="1"/>
+          <p:nvPr/>
+        </p:nvSpPr>
+        <p:spPr>
+          <a:xfrm>
+            <a:off x="640080" y="3118104"/>
+            <a:ext cx="3977640" cy="658368"/>
+          </a:xfrm>
+          <a:prstGeom prst="rect">
+            <a:avLst/>
+          </a:prstGeom>
+          <a:noFill/>
+        </p:spPr>
+        <p:txBody>
+          <a:bodyPr wrap="square" anchor="ctr" lIns="45720" rIns="45720" tIns="18288" bIns="18288">
+            <a:spAutoFit/>
+          </a:bodyPr>
+          <a:lstStyle/>
+          <a:p>
+            <a:pPr algn="l">
+              <a:lnSpc>
+                <a:spcPct val="100000"/>
+              </a:lnSpc>
+              <a:spcBef>
+                <a:spcPts val="0"/>
+              </a:spcBef>
+              <a:spcAft>
+                <a:spcPts val="400"/>
+              </a:spcAft>
+            </a:pPr>
+            <a:r>
+              <a:rPr sz="1250" b="1">
+                <a:solidFill>
+                  <a:srgbClr val="1A2540"/>
+                </a:solidFill>
+                <a:latin typeface="Segoe UI"/>
+              </a:rPr>
+              <a:t>Focus apps  (Forest, Pomodoro timers)</a:t>
+            </a:r>
+          </a:p>
+        </p:txBody>
+      </p:sp>
+      <p:sp>
+        <p:nvSpPr>
+          <p:cNvPr id="20" name="Rectangle 19"/>
+          <p:cNvSpPr/>
+          <p:nvPr/>
+        </p:nvSpPr>
+        <p:spPr>
+          <a:xfrm>
+            <a:off x="4846320" y="3118104"/>
+            <a:ext cx="3611880" cy="658368"/>
+          </a:xfrm>
+          <a:prstGeom prst="rect">
+            <a:avLst/>
+          </a:prstGeom>
+          <a:solidFill>
+            <a:srgbClr val="FFFFFF"/>
+          </a:solidFill>
+          <a:ln w="12700">
+            <a:solidFill>
+              <a:srgbClr val="E2EAF4"/>
+            </a:solidFill>
+          </a:ln>
+          <a:effectLst/>
+        </p:spPr>
+        <p:style>
+          <a:lnRef idx="1">
+            <a:schemeClr val="accent1"/>
+          </a:lnRef>
+          <a:fillRef idx="3">
+            <a:schemeClr val="accent1"/>
+          </a:fillRef>
+          <a:effectRef idx="2">
+            <a:schemeClr val="accent1"/>
+          </a:effectRef>
+          <a:fontRef idx="minor">
+            <a:schemeClr val="lt1"/>
+          </a:fontRef>
+        </p:style>
+        <p:txBody>
+          <a:bodyPr rtlCol="0" anchor="ctr"/>
+          <a:lstStyle/>
+          <a:p>
+            <a:pPr algn="ctr"/>
+          </a:p>
+        </p:txBody>
+      </p:sp>
+      <p:sp>
+        <p:nvSpPr>
+          <p:cNvPr id="21" name="TextBox 20"/>
+          <p:cNvSpPr txBox="1"/>
+          <p:nvPr/>
+        </p:nvSpPr>
+        <p:spPr>
+          <a:xfrm>
+            <a:off x="4983480" y="3118104"/>
+            <a:ext cx="3337560" cy="658368"/>
+          </a:xfrm>
+          <a:prstGeom prst="rect">
+            <a:avLst/>
+          </a:prstGeom>
+          <a:noFill/>
+        </p:spPr>
+        <p:txBody>
+          <a:bodyPr wrap="square" anchor="ctr" lIns="45720" rIns="45720" tIns="18288" bIns="18288">
+            <a:spAutoFit/>
+          </a:bodyPr>
+          <a:lstStyle/>
+          <a:p>
+            <a:pPr algn="l">
+              <a:lnSpc>
+                <a:spcPct val="100000"/>
+              </a:lnSpc>
+              <a:spcBef>
+                <a:spcPts val="0"/>
+              </a:spcBef>
+              <a:spcAft>
+                <a:spcPts val="400"/>
+              </a:spcAft>
+            </a:pPr>
+            <a:r>
+              <a:rPr sz="1250" b="0">
+                <a:solidFill>
+                  <a:srgbClr val="E84A5F"/>
+                </a:solidFill>
+                <a:latin typeface="Segoe UI"/>
+              </a:rPr>
+              <a:t>Track time, but no link to grades or deadlines</a:t>
+            </a:r>
+          </a:p>
+        </p:txBody>
+      </p:sp>
+      <p:sp>
+        <p:nvSpPr>
+          <p:cNvPr id="22" name="Rectangle 21"/>
+          <p:cNvSpPr/>
+          <p:nvPr/>
+        </p:nvSpPr>
+        <p:spPr>
+          <a:xfrm>
+            <a:off x="8549640" y="3118104"/>
+            <a:ext cx="3136392" cy="658368"/>
+          </a:xfrm>
+          <a:prstGeom prst="rect">
+            <a:avLst/>
+          </a:prstGeom>
+          <a:solidFill>
+            <a:srgbClr val="FFFFFF"/>
+          </a:solidFill>
+          <a:ln w="12700">
+            <a:solidFill>
+              <a:srgbClr val="E2EAF4"/>
+            </a:solidFill>
+          </a:ln>
+          <a:effectLst/>
+        </p:spPr>
+        <p:style>
+          <a:lnRef idx="1">
+            <a:schemeClr val="accent1"/>
+          </a:lnRef>
+          <a:fillRef idx="3">
+            <a:schemeClr val="accent1"/>
+          </a:fillRef>
+          <a:effectRef idx="2">
+            <a:schemeClr val="accent1"/>
+          </a:effectRef>
+          <a:fontRef idx="minor">
+            <a:schemeClr val="lt1"/>
+          </a:fontRef>
+        </p:style>
+        <p:txBody>
+          <a:bodyPr rtlCol="0" anchor="ctr"/>
+          <a:lstStyle/>
+          <a:p>
+            <a:pPr algn="ctr"/>
+          </a:p>
+        </p:txBody>
+      </p:sp>
+      <p:sp>
+        <p:nvSpPr>
+          <p:cNvPr id="23" name="TextBox 22"/>
+          <p:cNvSpPr txBox="1"/>
+          <p:nvPr/>
+        </p:nvSpPr>
+        <p:spPr>
+          <a:xfrm>
+            <a:off x="8686800" y="3118104"/>
+            <a:ext cx="2862072" cy="658368"/>
+          </a:xfrm>
+          <a:prstGeom prst="rect">
+            <a:avLst/>
+          </a:prstGeom>
+          <a:noFill/>
+        </p:spPr>
+        <p:txBody>
+          <a:bodyPr wrap="square" anchor="ctr" lIns="45720" rIns="45720" tIns="18288" bIns="18288">
+            <a:spAutoFit/>
+          </a:bodyPr>
+          <a:lstStyle/>
+          <a:p>
+            <a:pPr algn="l">
+              <a:lnSpc>
+                <a:spcPct val="100000"/>
+              </a:lnSpc>
+              <a:spcBef>
+                <a:spcPts val="0"/>
+              </a:spcBef>
+              <a:spcAft>
+                <a:spcPts val="400"/>
+              </a:spcAft>
+            </a:pPr>
+            <a:r>
+              <a:rPr sz="1250" b="0">
+                <a:solidFill>
+                  <a:srgbClr val="6B7F99"/>
+                </a:solidFill>
+                <a:latin typeface="Segoe UI"/>
+              </a:rPr>
+              <a:t>Students who need real stakes</a:t>
+            </a:r>
+          </a:p>
+        </p:txBody>
+      </p:sp>
+      <p:sp>
+        <p:nvSpPr>
+          <p:cNvPr id="24" name="Rectangle 23"/>
+          <p:cNvSpPr/>
+          <p:nvPr/>
+        </p:nvSpPr>
+        <p:spPr>
+          <a:xfrm>
+            <a:off x="502920" y="3831335"/>
+            <a:ext cx="4251960" cy="658368"/>
+          </a:xfrm>
+          <a:prstGeom prst="rect">
+            <a:avLst/>
+          </a:prstGeom>
+          <a:solidFill>
+            <a:srgbClr val="FFFFFF"/>
+          </a:solidFill>
+          <a:ln w="12700">
+            <a:solidFill>
+              <a:srgbClr val="E2EAF4"/>
+            </a:solidFill>
+          </a:ln>
+          <a:effectLst/>
+        </p:spPr>
+        <p:style>
+          <a:lnRef idx="1">
+            <a:schemeClr val="accent1"/>
+          </a:lnRef>
+          <a:fillRef idx="3">
+            <a:schemeClr val="accent1"/>
+          </a:fillRef>
+          <a:effectRef idx="2">
+            <a:schemeClr val="accent1"/>
+          </a:effectRef>
+          <a:fontRef idx="minor">
+            <a:schemeClr val="lt1"/>
+          </a:fontRef>
+        </p:style>
+        <p:txBody>
+          <a:bodyPr rtlCol="0" anchor="ctr"/>
+          <a:lstStyle/>
+          <a:p>
+            <a:pPr algn="ctr"/>
+          </a:p>
+        </p:txBody>
+      </p:sp>
+      <p:sp>
+        <p:nvSpPr>
+          <p:cNvPr id="25" name="TextBox 24"/>
+          <p:cNvSpPr txBox="1"/>
+          <p:nvPr/>
+        </p:nvSpPr>
+        <p:spPr>
+          <a:xfrm>
+            <a:off x="640080" y="3831335"/>
+            <a:ext cx="3977640" cy="658368"/>
+          </a:xfrm>
+          <a:prstGeom prst="rect">
+            <a:avLst/>
+          </a:prstGeom>
+          <a:noFill/>
+        </p:spPr>
+        <p:txBody>
+          <a:bodyPr wrap="square" anchor="ctr" lIns="45720" rIns="45720" tIns="18288" bIns="18288">
+            <a:spAutoFit/>
+          </a:bodyPr>
+          <a:lstStyle/>
+          <a:p>
+            <a:pPr algn="l">
+              <a:lnSpc>
+                <a:spcPct val="100000"/>
+              </a:lnSpc>
+              <a:spcBef>
+                <a:spcPts val="0"/>
+              </a:spcBef>
+              <a:spcAft>
+                <a:spcPts val="400"/>
+              </a:spcAft>
+            </a:pPr>
+            <a:r>
+              <a:rPr sz="1250" b="1">
+                <a:solidFill>
+                  <a:srgbClr val="1A2540"/>
+                </a:solidFill>
+                <a:latin typeface="Segoe UI"/>
+              </a:rPr>
+              <a:t>LMS portals  (Blackboard, MyADU)</a:t>
+            </a:r>
+          </a:p>
+        </p:txBody>
+      </p:sp>
+      <p:sp>
+        <p:nvSpPr>
+          <p:cNvPr id="26" name="Rectangle 25"/>
+          <p:cNvSpPr/>
+          <p:nvPr/>
+        </p:nvSpPr>
+        <p:spPr>
+          <a:xfrm>
+            <a:off x="4846320" y="3831335"/>
+            <a:ext cx="3611880" cy="658368"/>
+          </a:xfrm>
+          <a:prstGeom prst="rect">
+            <a:avLst/>
+          </a:prstGeom>
+          <a:solidFill>
+            <a:srgbClr val="FFFFFF"/>
+          </a:solidFill>
+          <a:ln w="12700">
+            <a:solidFill>
+              <a:srgbClr val="E2EAF4"/>
+            </a:solidFill>
+          </a:ln>
+          <a:effectLst/>
+        </p:spPr>
+        <p:style>
+          <a:lnRef idx="1">
+            <a:schemeClr val="accent1"/>
+          </a:lnRef>
+          <a:fillRef idx="3">
+            <a:schemeClr val="accent1"/>
+          </a:fillRef>
+          <a:effectRef idx="2">
+            <a:schemeClr val="accent1"/>
+          </a:effectRef>
+          <a:fontRef idx="minor">
+            <a:schemeClr val="lt1"/>
+          </a:fontRef>
+        </p:style>
+        <p:txBody>
+          <a:bodyPr rtlCol="0" anchor="ctr"/>
+          <a:lstStyle/>
+          <a:p>
+            <a:pPr algn="ctr"/>
+          </a:p>
+        </p:txBody>
+      </p:sp>
+      <p:sp>
+        <p:nvSpPr>
+          <p:cNvPr id="27" name="TextBox 26"/>
+          <p:cNvSpPr txBox="1"/>
+          <p:nvPr/>
+        </p:nvSpPr>
+        <p:spPr>
+          <a:xfrm>
+            <a:off x="4983480" y="3831335"/>
+            <a:ext cx="3337560" cy="658368"/>
+          </a:xfrm>
+          <a:prstGeom prst="rect">
+            <a:avLst/>
+          </a:prstGeom>
+          <a:noFill/>
+        </p:spPr>
+        <p:txBody>
+          <a:bodyPr wrap="square" anchor="ctr" lIns="45720" rIns="45720" tIns="18288" bIns="18288">
+            <a:spAutoFit/>
+          </a:bodyPr>
+          <a:lstStyle/>
+          <a:p>
+            <a:pPr algn="l">
+              <a:lnSpc>
+                <a:spcPct val="100000"/>
+              </a:lnSpc>
+              <a:spcBef>
+                <a:spcPts val="0"/>
+              </a:spcBef>
+              <a:spcAft>
+                <a:spcPts val="400"/>
+              </a:spcAft>
+            </a:pPr>
+            <a:r>
+              <a:rPr sz="1250" b="0">
+                <a:solidFill>
+                  <a:srgbClr val="E84A5F"/>
+                </a:solidFill>
+                <a:latin typeface="Segoe UI"/>
+              </a:rPr>
+              <a:t>Show deadlines, offer zero motivation or guidance</a:t>
+            </a:r>
+          </a:p>
+        </p:txBody>
+      </p:sp>
+      <p:sp>
+        <p:nvSpPr>
+          <p:cNvPr id="28" name="Rectangle 27"/>
+          <p:cNvSpPr/>
+          <p:nvPr/>
+        </p:nvSpPr>
+        <p:spPr>
+          <a:xfrm>
+            <a:off x="8549640" y="3831335"/>
+            <a:ext cx="3136392" cy="658368"/>
+          </a:xfrm>
+          <a:prstGeom prst="rect">
+            <a:avLst/>
+          </a:prstGeom>
+          <a:solidFill>
+            <a:srgbClr val="FFFFFF"/>
+          </a:solidFill>
+          <a:ln w="12700">
+            <a:solidFill>
+              <a:srgbClr val="E2EAF4"/>
+            </a:solidFill>
+          </a:ln>
+          <a:effectLst/>
+        </p:spPr>
+        <p:style>
+          <a:lnRef idx="1">
+            <a:schemeClr val="accent1"/>
+          </a:lnRef>
+          <a:fillRef idx="3">
+            <a:schemeClr val="accent1"/>
+          </a:fillRef>
+          <a:effectRef idx="2">
+            <a:schemeClr val="accent1"/>
+          </a:effectRef>
+          <a:fontRef idx="minor">
+            <a:schemeClr val="lt1"/>
+          </a:fontRef>
+        </p:style>
+        <p:txBody>
+          <a:bodyPr rtlCol="0" anchor="ctr"/>
+          <a:lstStyle/>
+          <a:p>
+            <a:pPr algn="ctr"/>
+          </a:p>
+        </p:txBody>
+      </p:sp>
+      <p:sp>
+        <p:nvSpPr>
+          <p:cNvPr id="29" name="TextBox 28"/>
+          <p:cNvSpPr txBox="1"/>
+          <p:nvPr/>
+        </p:nvSpPr>
+        <p:spPr>
+          <a:xfrm>
+            <a:off x="8686800" y="3831335"/>
+            <a:ext cx="2862072" cy="658368"/>
+          </a:xfrm>
+          <a:prstGeom prst="rect">
+            <a:avLst/>
+          </a:prstGeom>
+          <a:noFill/>
+        </p:spPr>
+        <p:txBody>
+          <a:bodyPr wrap="square" anchor="ctr" lIns="45720" rIns="45720" tIns="18288" bIns="18288">
+            <a:spAutoFit/>
+          </a:bodyPr>
+          <a:lstStyle/>
+          <a:p>
+            <a:pPr algn="l">
+              <a:lnSpc>
+                <a:spcPct val="100000"/>
+              </a:lnSpc>
+              <a:spcBef>
+                <a:spcPts val="0"/>
+              </a:spcBef>
+              <a:spcAft>
+                <a:spcPts val="400"/>
+              </a:spcAft>
+            </a:pPr>
+            <a:r>
+              <a:rPr sz="1250" b="0">
+                <a:solidFill>
+                  <a:srgbClr val="6B7F99"/>
+                </a:solidFill>
+                <a:latin typeface="Segoe UI"/>
+              </a:rPr>
+              <a:t>Chronic procrastinators</a:t>
+            </a:r>
+          </a:p>
+        </p:txBody>
+      </p:sp>
+      <p:sp>
+        <p:nvSpPr>
+          <p:cNvPr id="30" name="Rectangle 29"/>
+          <p:cNvSpPr/>
+          <p:nvPr/>
+        </p:nvSpPr>
+        <p:spPr>
+          <a:xfrm>
+            <a:off x="502920" y="4544568"/>
+            <a:ext cx="4251960" cy="658368"/>
+          </a:xfrm>
+          <a:prstGeom prst="rect">
+            <a:avLst/>
+          </a:prstGeom>
+          <a:solidFill>
+            <a:srgbClr val="FFFFFF"/>
+          </a:solidFill>
+          <a:ln w="12700">
+            <a:solidFill>
+              <a:srgbClr val="E2EAF4"/>
+            </a:solidFill>
+          </a:ln>
+          <a:effectLst/>
+        </p:spPr>
+        <p:style>
+          <a:lnRef idx="1">
+            <a:schemeClr val="accent1"/>
+          </a:lnRef>
+          <a:fillRef idx="3">
+            <a:schemeClr val="accent1"/>
+          </a:fillRef>
+          <a:effectRef idx="2">
+            <a:schemeClr val="accent1"/>
+          </a:effectRef>
+          <a:fontRef idx="minor">
+            <a:schemeClr val="lt1"/>
+          </a:fontRef>
+        </p:style>
+        <p:txBody>
+          <a:bodyPr rtlCol="0" anchor="ctr"/>
+          <a:lstStyle/>
+          <a:p>
+            <a:pPr algn="ctr"/>
+          </a:p>
+        </p:txBody>
+      </p:sp>
+      <p:sp>
+        <p:nvSpPr>
+          <p:cNvPr id="31" name="TextBox 30"/>
+          <p:cNvSpPr txBox="1"/>
+          <p:nvPr/>
+        </p:nvSpPr>
+        <p:spPr>
+          <a:xfrm>
+            <a:off x="640080" y="4544568"/>
+            <a:ext cx="3977640" cy="658368"/>
+          </a:xfrm>
+          <a:prstGeom prst="rect">
+            <a:avLst/>
+          </a:prstGeom>
+          <a:noFill/>
+        </p:spPr>
+        <p:txBody>
+          <a:bodyPr wrap="square" anchor="ctr" lIns="45720" rIns="45720" tIns="18288" bIns="18288">
+            <a:spAutoFit/>
+          </a:bodyPr>
+          <a:lstStyle/>
+          <a:p>
+            <a:pPr algn="l">
+              <a:lnSpc>
+                <a:spcPct val="100000"/>
+              </a:lnSpc>
+              <a:spcBef>
+                <a:spcPts val="0"/>
+              </a:spcBef>
+              <a:spcAft>
+                <a:spcPts val="400"/>
+              </a:spcAft>
+            </a:pPr>
+            <a:r>
+              <a:rPr sz="1250" b="1">
+                <a:solidFill>
+                  <a:srgbClr val="1A2540"/>
+                </a:solidFill>
+                <a:latin typeface="Segoe UI"/>
+              </a:rPr>
+              <a:t>Gamified habit apps  (Habitica, Duolingo)</a:t>
+            </a:r>
+          </a:p>
+        </p:txBody>
+      </p:sp>
+      <p:sp>
+        <p:nvSpPr>
+          <p:cNvPr id="32" name="Rectangle 31"/>
+          <p:cNvSpPr/>
+          <p:nvPr/>
+        </p:nvSpPr>
+        <p:spPr>
+          <a:xfrm>
+            <a:off x="4846320" y="4544568"/>
+            <a:ext cx="3611880" cy="658368"/>
+          </a:xfrm>
+          <a:prstGeom prst="rect">
+            <a:avLst/>
+          </a:prstGeom>
+          <a:solidFill>
+            <a:srgbClr val="FFFFFF"/>
+          </a:solidFill>
+          <a:ln w="12700">
+            <a:solidFill>
+              <a:srgbClr val="E2EAF4"/>
+            </a:solidFill>
+          </a:ln>
+          <a:effectLst/>
+        </p:spPr>
+        <p:style>
+          <a:lnRef idx="1">
+            <a:schemeClr val="accent1"/>
+          </a:lnRef>
+          <a:fillRef idx="3">
+            <a:schemeClr val="accent1"/>
+          </a:fillRef>
+          <a:effectRef idx="2">
+            <a:schemeClr val="accent1"/>
+          </a:effectRef>
+          <a:fontRef idx="minor">
+            <a:schemeClr val="lt1"/>
+          </a:fontRef>
+        </p:style>
+        <p:txBody>
+          <a:bodyPr rtlCol="0" anchor="ctr"/>
+          <a:lstStyle/>
+          <a:p>
+            <a:pPr algn="ctr"/>
+          </a:p>
+        </p:txBody>
+      </p:sp>
+      <p:sp>
+        <p:nvSpPr>
+          <p:cNvPr id="33" name="TextBox 32"/>
+          <p:cNvSpPr txBox="1"/>
+          <p:nvPr/>
+        </p:nvSpPr>
+        <p:spPr>
+          <a:xfrm>
+            <a:off x="4983480" y="4544568"/>
+            <a:ext cx="3337560" cy="658368"/>
+          </a:xfrm>
+          <a:prstGeom prst="rect">
+            <a:avLst/>
+          </a:prstGeom>
+          <a:noFill/>
+        </p:spPr>
+        <p:txBody>
+          <a:bodyPr wrap="square" anchor="ctr" lIns="45720" rIns="45720" tIns="18288" bIns="18288">
+            <a:spAutoFit/>
+          </a:bodyPr>
+          <a:lstStyle/>
+          <a:p>
+            <a:pPr algn="l">
+              <a:lnSpc>
+                <a:spcPct val="100000"/>
+              </a:lnSpc>
+              <a:spcBef>
+                <a:spcPts val="0"/>
+              </a:spcBef>
+              <a:spcAft>
+                <a:spcPts val="400"/>
+              </a:spcAft>
+            </a:pPr>
+            <a:r>
+              <a:rPr sz="1250" b="0">
+                <a:solidFill>
+                  <a:srgbClr val="E84A5F"/>
+                </a:solidFill>
+                <a:latin typeface="Segoe UI"/>
+              </a:rPr>
+              <a:t>Fun, but disconnected from real academic work</a:t>
+            </a:r>
+          </a:p>
+        </p:txBody>
+      </p:sp>
+      <p:sp>
+        <p:nvSpPr>
+          <p:cNvPr id="34" name="Rectangle 33"/>
+          <p:cNvSpPr/>
+          <p:nvPr/>
+        </p:nvSpPr>
+        <p:spPr>
+          <a:xfrm>
+            <a:off x="8549640" y="4544568"/>
+            <a:ext cx="3136392" cy="658368"/>
+          </a:xfrm>
+          <a:prstGeom prst="rect">
+            <a:avLst/>
+          </a:prstGeom>
+          <a:solidFill>
+            <a:srgbClr val="FFFFFF"/>
+          </a:solidFill>
+          <a:ln w="12700">
+            <a:solidFill>
+              <a:srgbClr val="E2EAF4"/>
+            </a:solidFill>
+          </a:ln>
+          <a:effectLst/>
+        </p:spPr>
+        <p:style>
+          <a:lnRef idx="1">
+            <a:schemeClr val="accent1"/>
+          </a:lnRef>
+          <a:fillRef idx="3">
+            <a:schemeClr val="accent1"/>
+          </a:fillRef>
+          <a:effectRef idx="2">
+            <a:schemeClr val="accent1"/>
+          </a:effectRef>
+          <a:fontRef idx="minor">
+            <a:schemeClr val="lt1"/>
+          </a:fontRef>
+        </p:style>
+        <p:txBody>
+          <a:bodyPr rtlCol="0" anchor="ctr"/>
+          <a:lstStyle/>
+          <a:p>
+            <a:pPr algn="ctr"/>
+          </a:p>
+        </p:txBody>
+      </p:sp>
+      <p:sp>
+        <p:nvSpPr>
+          <p:cNvPr id="35" name="TextBox 34"/>
+          <p:cNvSpPr txBox="1"/>
+          <p:nvPr/>
+        </p:nvSpPr>
+        <p:spPr>
+          <a:xfrm>
+            <a:off x="8686800" y="4544568"/>
+            <a:ext cx="2862072" cy="658368"/>
+          </a:xfrm>
+          <a:prstGeom prst="rect">
+            <a:avLst/>
+          </a:prstGeom>
+          <a:noFill/>
+        </p:spPr>
+        <p:txBody>
+          <a:bodyPr wrap="square" anchor="ctr" lIns="45720" rIns="45720" tIns="18288" bIns="18288">
+            <a:spAutoFit/>
+          </a:bodyPr>
+          <a:lstStyle/>
+          <a:p>
+            <a:pPr algn="l">
+              <a:lnSpc>
+                <a:spcPct val="100000"/>
+              </a:lnSpc>
+              <a:spcBef>
+                <a:spcPts val="0"/>
+              </a:spcBef>
+              <a:spcAft>
+                <a:spcPts val="400"/>
+              </a:spcAft>
+            </a:pPr>
+            <a:r>
+              <a:rPr sz="1250" b="0">
+                <a:solidFill>
+                  <a:srgbClr val="6B7F99"/>
+                </a:solidFill>
+                <a:latin typeface="Segoe UI"/>
+              </a:rPr>
+              <a:t>Course-focused students</a:t>
+            </a:r>
+          </a:p>
+        </p:txBody>
+      </p:sp>
+      <p:sp>
+        <p:nvSpPr>
+          <p:cNvPr id="36" name="Rectangle 35"/>
+          <p:cNvSpPr/>
+          <p:nvPr/>
+        </p:nvSpPr>
+        <p:spPr>
+          <a:xfrm>
+            <a:off x="502920" y="5257800"/>
+            <a:ext cx="4251960" cy="658368"/>
+          </a:xfrm>
+          <a:prstGeom prst="rect">
+            <a:avLst/>
+          </a:prstGeom>
+          <a:solidFill>
+            <a:srgbClr val="FFFFFF"/>
+          </a:solidFill>
+          <a:ln w="12700">
+            <a:solidFill>
+              <a:srgbClr val="E2EAF4"/>
+            </a:solidFill>
+          </a:ln>
+          <a:effectLst/>
+        </p:spPr>
+        <p:style>
+          <a:lnRef idx="1">
+            <a:schemeClr val="accent1"/>
+          </a:lnRef>
+          <a:fillRef idx="3">
+            <a:schemeClr val="accent1"/>
+          </a:fillRef>
+          <a:effectRef idx="2">
+            <a:schemeClr val="accent1"/>
+          </a:effectRef>
+          <a:fontRef idx="minor">
+            <a:schemeClr val="lt1"/>
+          </a:fontRef>
+        </p:style>
+        <p:txBody>
+          <a:bodyPr rtlCol="0" anchor="ctr"/>
+          <a:lstStyle/>
+          <a:p>
+            <a:pPr algn="ctr"/>
+          </a:p>
+        </p:txBody>
+      </p:sp>
+      <p:sp>
+        <p:nvSpPr>
+          <p:cNvPr id="37" name="TextBox 36"/>
+          <p:cNvSpPr txBox="1"/>
+          <p:nvPr/>
+        </p:nvSpPr>
+        <p:spPr>
+          <a:xfrm>
+            <a:off x="640080" y="5257800"/>
+            <a:ext cx="3977640" cy="658368"/>
+          </a:xfrm>
+          <a:prstGeom prst="rect">
+            <a:avLst/>
+          </a:prstGeom>
+          <a:noFill/>
+        </p:spPr>
+        <p:txBody>
+          <a:bodyPr wrap="square" anchor="ctr" lIns="45720" rIns="45720" tIns="18288" bIns="18288">
+            <a:spAutoFit/>
+          </a:bodyPr>
+          <a:lstStyle/>
+          <a:p>
+            <a:pPr algn="l">
+              <a:lnSpc>
+                <a:spcPct val="100000"/>
+              </a:lnSpc>
+              <a:spcBef>
+                <a:spcPts val="0"/>
+              </a:spcBef>
+              <a:spcAft>
+                <a:spcPts val="400"/>
+              </a:spcAft>
+            </a:pPr>
+            <a:r>
+              <a:rPr sz="1250" b="1">
+                <a:solidFill>
+                  <a:srgbClr val="1A2540"/>
+                </a:solidFill>
+                <a:latin typeface="Segoe UI"/>
+              </a:rPr>
+              <a:t>Reminder / notification apps</a:t>
+            </a:r>
+          </a:p>
+        </p:txBody>
+      </p:sp>
+      <p:sp>
+        <p:nvSpPr>
+          <p:cNvPr id="38" name="Rectangle 37"/>
+          <p:cNvSpPr/>
+          <p:nvPr/>
+        </p:nvSpPr>
+        <p:spPr>
+          <a:xfrm>
+            <a:off x="4846320" y="5257800"/>
+            <a:ext cx="3611880" cy="658368"/>
+          </a:xfrm>
+          <a:prstGeom prst="rect">
+            <a:avLst/>
+          </a:prstGeom>
+          <a:solidFill>
+            <a:srgbClr val="FFFFFF"/>
+          </a:solidFill>
+          <a:ln w="12700">
+            <a:solidFill>
+              <a:srgbClr val="E2EAF4"/>
+            </a:solidFill>
+          </a:ln>
+          <a:effectLst/>
+        </p:spPr>
+        <p:style>
+          <a:lnRef idx="1">
+            <a:schemeClr val="accent1"/>
+          </a:lnRef>
+          <a:fillRef idx="3">
+            <a:schemeClr val="accent1"/>
+          </a:fillRef>
+          <a:effectRef idx="2">
+            <a:schemeClr val="accent1"/>
+          </a:effectRef>
+          <a:fontRef idx="minor">
+            <a:schemeClr val="lt1"/>
+          </a:fontRef>
+        </p:style>
+        <p:txBody>
+          <a:bodyPr rtlCol="0" anchor="ctr"/>
+          <a:lstStyle/>
+          <a:p>
+            <a:pPr algn="ctr"/>
+          </a:p>
+        </p:txBody>
+      </p:sp>
+      <p:sp>
+        <p:nvSpPr>
+          <p:cNvPr id="39" name="TextBox 38"/>
+          <p:cNvSpPr txBox="1"/>
+          <p:nvPr/>
+        </p:nvSpPr>
+        <p:spPr>
+          <a:xfrm>
+            <a:off x="4983480" y="5257800"/>
+            <a:ext cx="3337560" cy="658368"/>
+          </a:xfrm>
+          <a:prstGeom prst="rect">
+            <a:avLst/>
+          </a:prstGeom>
+          <a:noFill/>
+        </p:spPr>
+        <p:txBody>
+          <a:bodyPr wrap="square" anchor="ctr" lIns="45720" rIns="45720" tIns="18288" bIns="18288">
+            <a:spAutoFit/>
+          </a:bodyPr>
+          <a:lstStyle/>
+          <a:p>
+            <a:pPr algn="l">
+              <a:lnSpc>
+                <a:spcPct val="100000"/>
+              </a:lnSpc>
+              <a:spcBef>
+                <a:spcPts val="0"/>
+              </a:spcBef>
+              <a:spcAft>
+                <a:spcPts val="400"/>
+              </a:spcAft>
+            </a:pPr>
+            <a:r>
+              <a:rPr sz="1250" b="0">
+                <a:solidFill>
+                  <a:srgbClr val="E84A5F"/>
+                </a:solidFill>
+                <a:latin typeface="Segoe UI"/>
+              </a:rPr>
+              <a:t>Notify — but never prompt the next action</a:t>
+            </a:r>
+          </a:p>
+        </p:txBody>
+      </p:sp>
+      <p:sp>
+        <p:nvSpPr>
+          <p:cNvPr id="40" name="Rectangle 39"/>
+          <p:cNvSpPr/>
+          <p:nvPr/>
+        </p:nvSpPr>
+        <p:spPr>
+          <a:xfrm>
+            <a:off x="8549640" y="5257800"/>
+            <a:ext cx="3136392" cy="658368"/>
+          </a:xfrm>
+          <a:prstGeom prst="rect">
+            <a:avLst/>
+          </a:prstGeom>
+          <a:solidFill>
+            <a:srgbClr val="FFFFFF"/>
+          </a:solidFill>
+          <a:ln w="12700">
+            <a:solidFill>
+              <a:srgbClr val="E2EAF4"/>
+            </a:solidFill>
+          </a:ln>
+          <a:effectLst/>
+        </p:spPr>
+        <p:style>
+          <a:lnRef idx="1">
+            <a:schemeClr val="accent1"/>
+          </a:lnRef>
+          <a:fillRef idx="3">
+            <a:schemeClr val="accent1"/>
+          </a:fillRef>
+          <a:effectRef idx="2">
+            <a:schemeClr val="accent1"/>
+          </a:effectRef>
+          <a:fontRef idx="minor">
+            <a:schemeClr val="lt1"/>
+          </a:fontRef>
+        </p:style>
+        <p:txBody>
+          <a:bodyPr rtlCol="0" anchor="ctr"/>
+          <a:lstStyle/>
+          <a:p>
+            <a:pPr algn="ctr"/>
+          </a:p>
+        </p:txBody>
+      </p:sp>
+      <p:sp>
+        <p:nvSpPr>
+          <p:cNvPr id="41" name="TextBox 40"/>
+          <p:cNvSpPr txBox="1"/>
+          <p:nvPr/>
+        </p:nvSpPr>
+        <p:spPr>
+          <a:xfrm>
+            <a:off x="8686800" y="5257800"/>
+            <a:ext cx="2862072" cy="658368"/>
+          </a:xfrm>
+          <a:prstGeom prst="rect">
+            <a:avLst/>
+          </a:prstGeom>
+          <a:noFill/>
+        </p:spPr>
+        <p:txBody>
+          <a:bodyPr wrap="square" anchor="ctr" lIns="45720" rIns="45720" tIns="18288" bIns="18288">
+            <a:spAutoFit/>
+          </a:bodyPr>
+          <a:lstStyle/>
+          <a:p>
+            <a:pPr algn="l">
+              <a:lnSpc>
+                <a:spcPct val="100000"/>
+              </a:lnSpc>
+              <a:spcBef>
+                <a:spcPts val="0"/>
+              </a:spcBef>
+              <a:spcAft>
+                <a:spcPts val="400"/>
+              </a:spcAft>
+            </a:pPr>
+            <a:r>
+              <a:rPr sz="1250" b="0">
+                <a:solidFill>
+                  <a:srgbClr val="6B7F99"/>
+                </a:solidFill>
+                <a:latin typeface="Segoe UI"/>
+              </a:rPr>
+              <a:t>Anxiety-driven avoiders</a:t>
+            </a:r>
+          </a:p>
+        </p:txBody>
+      </p:sp>
+      <p:sp>
+        <p:nvSpPr>
+          <p:cNvPr id="42" name="Rounded Rectangle 41"/>
+          <p:cNvSpPr/>
+          <p:nvPr/>
+        </p:nvSpPr>
+        <p:spPr>
+          <a:xfrm>
+            <a:off x="502920" y="6035040"/>
+            <a:ext cx="11155680" cy="548640"/>
+          </a:xfrm>
+          <a:prstGeom prst="roundRect">
+            <a:avLst/>
+          </a:prstGeom>
+          <a:solidFill>
+            <a:srgbClr val="E7F7F2"/>
+          </a:solidFill>
+          <a:ln w="12700">
+            <a:solidFill>
+              <a:srgbClr val="E2EAF4"/>
+            </a:solidFill>
+          </a:ln>
+          <a:effectLst/>
+        </p:spPr>
+        <p:style>
+          <a:lnRef idx="1">
+            <a:schemeClr val="accent1"/>
+          </a:lnRef>
+          <a:fillRef idx="3">
+            <a:schemeClr val="accent1"/>
+          </a:fillRef>
+          <a:effectRef idx="2">
+            <a:schemeClr val="accent1"/>
+          </a:effectRef>
+          <a:fontRef idx="minor">
+            <a:schemeClr val="lt1"/>
+          </a:fontRef>
+        </p:style>
+        <p:txBody>
+          <a:bodyPr rtlCol="0" anchor="ctr"/>
+          <a:lstStyle/>
+          <a:p>
+            <a:pPr algn="ctr"/>
+          </a:p>
+        </p:txBody>
+      </p:sp>
+      <p:sp>
+        <p:nvSpPr>
+          <p:cNvPr id="43" name="TextBox 42"/>
+          <p:cNvSpPr txBox="1"/>
+          <p:nvPr/>
+        </p:nvSpPr>
+        <p:spPr>
+          <a:xfrm>
+            <a:off x="502920" y="6035040"/>
+            <a:ext cx="11155680" cy="548640"/>
+          </a:xfrm>
+          <a:prstGeom prst="rect">
+            <a:avLst/>
+          </a:prstGeom>
+          <a:noFill/>
+        </p:spPr>
+        <p:txBody>
+          <a:bodyPr wrap="square" anchor="ctr" lIns="45720" rIns="45720" tIns="18288" bIns="18288">
+            <a:spAutoFit/>
+          </a:bodyPr>
+          <a:lstStyle/>
+          <a:p>
+            <a:pPr algn="ctr">
+              <a:lnSpc>
+                <a:spcPct val="100000"/>
+              </a:lnSpc>
+              <a:spcBef>
+                <a:spcPts val="0"/>
+              </a:spcBef>
+              <a:spcAft>
+                <a:spcPts val="400"/>
+              </a:spcAft>
+            </a:pPr>
+            <a:r>
+              <a:rPr sz="1300" b="0">
+                <a:solidFill>
+                  <a:srgbClr val="1A2540"/>
+                </a:solidFill>
+                <a:latin typeface="Segoe UI"/>
+              </a:rPr>
+              <a:t>Every competitor fails on one of three fronts: </a:t>
+            </a:r>
+            <a:r>
+              <a:rPr sz="1300" b="1">
+                <a:solidFill>
+                  <a:srgbClr val="0D7377"/>
+                </a:solidFill>
+                <a:latin typeface="Segoe UI"/>
+              </a:rPr>
+              <a:t>maintenance, stakes, or motivation</a:t>
+            </a:r>
+            <a:r>
+              <a:rPr sz="1300" b="0">
+                <a:solidFill>
+                  <a:srgbClr val="1A2540"/>
+                </a:solidFill>
+                <a:latin typeface="Segoe UI"/>
+              </a:rPr>
+              <a:t>.  StudyStrike fixes all three.</a:t>
+            </a:r>
+          </a:p>
+        </p:txBody>
+      </p:sp>
+    </p:spTree>
+  </p:cSld>
+  <p:clrMapOvr>
+    <a:masterClrMapping/>
+  </p:clrMapOvr>
+</p:sld>
+</file>
+
+<file path=ppt/slides/slide19.xml><?xml version="1.0" encoding="utf-8"?>
+<p:sld xmlns:a="http://schemas.openxmlformats.org/drawingml/2006/main" xmlns:p="http://schemas.openxmlformats.org/presentationml/2006/main" xmlns:r="http://schemas.openxmlformats.org/officeDocument/2006/relationships">
+  <p:cSld>
+    <p:spTree>
+      <p:nvGrpSpPr>
+        <p:cNvPr id="1" name=""/>
+        <p:cNvGrpSpPr/>
+        <p:nvPr/>
+      </p:nvGrpSpPr>
+      <p:grpSpPr/>
+      <p:sp>
+        <p:nvSpPr>
+          <p:cNvPr id="2" name="Rectangle 1"/>
+          <p:cNvSpPr/>
+          <p:nvPr/>
+        </p:nvSpPr>
+        <p:spPr>
+          <a:xfrm>
+            <a:off x="0" y="0"/>
+            <a:ext cx="12191695" cy="6858000"/>
+          </a:xfrm>
+          <a:prstGeom prst="rect">
+            <a:avLst/>
+          </a:prstGeom>
+          <a:solidFill>
+            <a:srgbClr val="F8FAFD"/>
+          </a:solidFill>
+          <a:ln>
+            <a:noFill/>
+          </a:ln>
+          <a:effectLst/>
+        </p:spPr>
+        <p:style>
+          <a:lnRef idx="1">
+            <a:schemeClr val="accent1"/>
+          </a:lnRef>
+          <a:fillRef idx="3">
+            <a:schemeClr val="accent1"/>
+          </a:fillRef>
+          <a:effectRef idx="2">
+            <a:schemeClr val="accent1"/>
+          </a:effectRef>
+          <a:fontRef idx="minor">
+            <a:schemeClr val="lt1"/>
+          </a:fontRef>
+        </p:style>
+        <p:txBody>
+          <a:bodyPr rtlCol="0" anchor="ctr"/>
+          <a:lstStyle/>
+          <a:p>
+            <a:pPr algn="ctr"/>
+          </a:p>
+        </p:txBody>
+      </p:sp>
+      <p:sp>
+        <p:nvSpPr>
+          <p:cNvPr id="3" name="Rectangle 2"/>
+          <p:cNvSpPr/>
+          <p:nvPr/>
+        </p:nvSpPr>
+        <p:spPr>
+          <a:xfrm>
+            <a:off x="0" y="0"/>
+            <a:ext cx="12191695" cy="146304"/>
+          </a:xfrm>
+          <a:prstGeom prst="rect">
+            <a:avLst/>
+          </a:prstGeom>
+          <a:solidFill>
+            <a:srgbClr val="F5A623"/>
+          </a:solidFill>
+          <a:ln>
+            <a:noFill/>
+          </a:ln>
+          <a:effectLst/>
+        </p:spPr>
+        <p:style>
+          <a:lnRef idx="1">
+            <a:schemeClr val="accent1"/>
+          </a:lnRef>
+          <a:fillRef idx="3">
+            <a:schemeClr val="accent1"/>
+          </a:fillRef>
+          <a:effectRef idx="2">
+            <a:schemeClr val="accent1"/>
+          </a:effectRef>
+          <a:fontRef idx="minor">
+            <a:schemeClr val="lt1"/>
+          </a:fontRef>
+        </p:style>
+        <p:txBody>
+          <a:bodyPr rtlCol="0" anchor="ctr"/>
+          <a:lstStyle/>
+          <a:p>
+            <a:pPr algn="ctr"/>
+          </a:p>
+        </p:txBody>
+      </p:sp>
+      <p:sp>
+        <p:nvSpPr>
+          <p:cNvPr id="4" name="TextBox 3"/>
+          <p:cNvSpPr txBox="1"/>
+          <p:nvPr/>
+        </p:nvSpPr>
+        <p:spPr>
+          <a:xfrm>
+            <a:off x="502920" y="310896"/>
+            <a:ext cx="11155680" cy="365760"/>
+          </a:xfrm>
+          <a:prstGeom prst="rect">
+            <a:avLst/>
+          </a:prstGeom>
+          <a:noFill/>
+        </p:spPr>
+        <p:txBody>
+          <a:bodyPr wrap="square" anchor="t" lIns="45720" rIns="45720" tIns="18288" bIns="18288">
+            <a:spAutoFit/>
+          </a:bodyPr>
+          <a:lstStyle/>
+          <a:p>
+            <a:pPr algn="l">
+              <a:lnSpc>
+                <a:spcPct val="100000"/>
+              </a:lnSpc>
+              <a:spcBef>
+                <a:spcPts val="0"/>
+              </a:spcBef>
+              <a:spcAft>
+                <a:spcPts val="400"/>
+              </a:spcAft>
+            </a:pPr>
+            <a:r>
+              <a:rPr sz="1300" b="1">
+                <a:solidFill>
+                  <a:srgbClr val="0D7377"/>
+                </a:solidFill>
+                <a:latin typeface="Segoe UI"/>
+              </a:rPr>
+              <a:t>OUR MVP</a:t>
+            </a:r>
+          </a:p>
+        </p:txBody>
+      </p:sp>
+      <p:sp>
+        <p:nvSpPr>
+          <p:cNvPr id="5" name="TextBox 4"/>
+          <p:cNvSpPr txBox="1"/>
+          <p:nvPr/>
+        </p:nvSpPr>
+        <p:spPr>
+          <a:xfrm>
+            <a:off x="502920" y="566928"/>
+            <a:ext cx="11155680" cy="914400"/>
+          </a:xfrm>
+          <a:prstGeom prst="rect">
+            <a:avLst/>
+          </a:prstGeom>
+          <a:noFill/>
+        </p:spPr>
+        <p:txBody>
+          <a:bodyPr wrap="square" anchor="t" lIns="45720" rIns="45720" tIns="18288" bIns="18288">
+            <a:spAutoFit/>
+          </a:bodyPr>
+          <a:lstStyle/>
+          <a:p>
+            <a:pPr algn="l">
+              <a:lnSpc>
+                <a:spcPct val="100000"/>
+              </a:lnSpc>
+              <a:spcBef>
+                <a:spcPts val="0"/>
+              </a:spcBef>
+              <a:spcAft>
+                <a:spcPts val="400"/>
+              </a:spcAft>
+            </a:pPr>
+            <a:r>
+              <a:rPr sz="3000" b="1">
+                <a:solidFill>
+                  <a:srgbClr val="0F3460"/>
+                </a:solidFill>
+                <a:latin typeface="Segoe UI"/>
+              </a:rPr>
+              <a:t>A working web platform — built, running, and pilot-tested</a:t>
+            </a:r>
+          </a:p>
+        </p:txBody>
+      </p:sp>
+      <p:sp>
+        <p:nvSpPr>
+          <p:cNvPr id="6" name="Rounded Rectangle 5"/>
+          <p:cNvSpPr/>
+          <p:nvPr/>
+        </p:nvSpPr>
+        <p:spPr>
+          <a:xfrm>
+            <a:off x="502920" y="1737360"/>
+            <a:ext cx="5486400" cy="4297680"/>
+          </a:xfrm>
+          <a:prstGeom prst="roundRect">
+            <a:avLst/>
+          </a:prstGeom>
+          <a:solidFill>
+            <a:srgbClr val="0F3460"/>
+          </a:solidFill>
+          <a:ln>
+            <a:noFill/>
+          </a:ln>
+          <a:effectLst/>
+        </p:spPr>
+        <p:style>
+          <a:lnRef idx="1">
+            <a:schemeClr val="accent1"/>
+          </a:lnRef>
+          <a:fillRef idx="3">
+            <a:schemeClr val="accent1"/>
+          </a:fillRef>
+          <a:effectRef idx="2">
+            <a:schemeClr val="accent1"/>
+          </a:effectRef>
+          <a:fontRef idx="minor">
+            <a:schemeClr val="lt1"/>
+          </a:fontRef>
+        </p:style>
+        <p:txBody>
+          <a:bodyPr rtlCol="0" anchor="ctr"/>
+          <a:lstStyle/>
+          <a:p>
+            <a:pPr algn="ctr"/>
+          </a:p>
+        </p:txBody>
+      </p:sp>
+      <p:sp>
+        <p:nvSpPr>
+          <p:cNvPr id="7" name="TextBox 6"/>
+          <p:cNvSpPr txBox="1"/>
+          <p:nvPr/>
+        </p:nvSpPr>
+        <p:spPr>
+          <a:xfrm>
+            <a:off x="822960" y="2103120"/>
+            <a:ext cx="4892040" cy="2377440"/>
+          </a:xfrm>
+          <a:prstGeom prst="rect">
+            <a:avLst/>
+          </a:prstGeom>
+          <a:noFill/>
+        </p:spPr>
+        <p:txBody>
+          <a:bodyPr wrap="square" anchor="t" lIns="45720" rIns="45720" tIns="18288" bIns="18288">
+            <a:spAutoFit/>
+          </a:bodyPr>
+          <a:lstStyle/>
+          <a:p>
+            <a:pPr algn="l">
+              <a:lnSpc>
+                <a:spcPct val="110000"/>
+              </a:lnSpc>
+              <a:spcBef>
+                <a:spcPts val="0"/>
+              </a:spcBef>
+              <a:spcAft>
+                <a:spcPts val="400"/>
+              </a:spcAft>
+            </a:pPr>
+            <a:r>
+              <a:rPr sz="2200" b="1">
+                <a:solidFill>
+                  <a:srgbClr val="FFFFFF"/>
+                </a:solidFill>
+                <a:latin typeface="Segoe UI"/>
+              </a:rPr>
+              <a:t>StudyStrike is a functional web app today —</a:t>
+            </a:r>
+          </a:p>
+          <a:p>
+            <a:pPr algn="l">
+              <a:lnSpc>
+                <a:spcPct val="110000"/>
+              </a:lnSpc>
+              <a:spcBef>
+                <a:spcPts val="0"/>
+              </a:spcBef>
+              <a:spcAft>
+                <a:spcPts val="400"/>
+              </a:spcAft>
+            </a:pPr>
+            <a:r>
+              <a:rPr sz="800" b="0">
+                <a:solidFill>
+                  <a:srgbClr val="FFFFFF"/>
+                </a:solidFill>
+                <a:latin typeface="Segoe UI"/>
+              </a:rPr>
+              <a:t/>
+            </a:r>
+          </a:p>
+          <a:p>
+            <a:pPr algn="l">
+              <a:lnSpc>
+                <a:spcPct val="110000"/>
+              </a:lnSpc>
+              <a:spcBef>
+                <a:spcPts val="0"/>
+              </a:spcBef>
+              <a:spcAft>
+                <a:spcPts val="400"/>
+              </a:spcAft>
+            </a:pPr>
+            <a:r>
+              <a:rPr sz="1800" b="1">
+                <a:solidFill>
+                  <a:srgbClr val="FFD166"/>
+                </a:solidFill>
+                <a:latin typeface="Segoe UI"/>
+              </a:rPr>
+              <a:t>not a mock-up. Students log in, study under verified focus, earn points, and climb a live per-course leaderboard.</a:t>
+            </a:r>
+          </a:p>
+        </p:txBody>
+      </p:sp>
+      <p:sp>
+        <p:nvSpPr>
+          <p:cNvPr id="8" name="Rounded Rectangle 7"/>
+          <p:cNvSpPr/>
+          <p:nvPr/>
+        </p:nvSpPr>
+        <p:spPr>
+          <a:xfrm>
+            <a:off x="822960" y="5029200"/>
+            <a:ext cx="4846320" cy="777240"/>
+          </a:xfrm>
+          <a:prstGeom prst="roundRect">
+            <a:avLst/>
+          </a:prstGeom>
+          <a:solidFill>
+            <a:srgbClr val="143E78"/>
+          </a:solidFill>
+          <a:ln>
+            <a:noFill/>
+          </a:ln>
+          <a:effectLst/>
+        </p:spPr>
+        <p:style>
+          <a:lnRef idx="1">
+            <a:schemeClr val="accent1"/>
+          </a:lnRef>
+          <a:fillRef idx="3">
+            <a:schemeClr val="accent1"/>
+          </a:fillRef>
+          <a:effectRef idx="2">
+            <a:schemeClr val="accent1"/>
+          </a:effectRef>
+          <a:fontRef idx="minor">
+            <a:schemeClr val="lt1"/>
+          </a:fontRef>
+        </p:style>
+        <p:txBody>
+          <a:bodyPr rtlCol="0" anchor="ctr"/>
+          <a:lstStyle/>
+          <a:p>
+            <a:pPr algn="ctr"/>
+          </a:p>
+        </p:txBody>
+      </p:sp>
+      <p:sp>
+        <p:nvSpPr>
+          <p:cNvPr id="9" name="TextBox 8"/>
+          <p:cNvSpPr txBox="1"/>
+          <p:nvPr/>
+        </p:nvSpPr>
+        <p:spPr>
+          <a:xfrm>
+            <a:off x="822960" y="5029200"/>
+            <a:ext cx="4846320" cy="777240"/>
+          </a:xfrm>
+          <a:prstGeom prst="rect">
+            <a:avLst/>
+          </a:prstGeom>
+          <a:noFill/>
+        </p:spPr>
+        <p:txBody>
+          <a:bodyPr wrap="square" anchor="ctr" lIns="45720" rIns="45720" tIns="18288" bIns="18288">
+            <a:spAutoFit/>
+          </a:bodyPr>
+          <a:lstStyle/>
+          <a:p>
+            <a:pPr algn="ctr">
+              <a:lnSpc>
+                <a:spcPct val="100000"/>
+              </a:lnSpc>
+              <a:spcBef>
+                <a:spcPts val="0"/>
+              </a:spcBef>
+              <a:spcAft>
+                <a:spcPts val="400"/>
+              </a:spcAft>
+            </a:pPr>
+            <a:r>
+              <a:rPr sz="1350" b="1">
+                <a:solidFill>
+                  <a:srgbClr val="FFFFFF"/>
+                </a:solidFill>
+                <a:latin typeface="Segoe UI"/>
+              </a:rPr>
+              <a:t>✓  Validated with a 5-student, 1-week pilot</a:t>
+            </a:r>
+          </a:p>
+        </p:txBody>
+      </p:sp>
+      <p:sp>
+        <p:nvSpPr>
+          <p:cNvPr id="10" name="TextBox 9"/>
+          <p:cNvSpPr txBox="1"/>
+          <p:nvPr/>
+        </p:nvSpPr>
+        <p:spPr>
+          <a:xfrm>
+            <a:off x="6263640" y="1783080"/>
+            <a:ext cx="5486400" cy="365760"/>
+          </a:xfrm>
+          <a:prstGeom prst="rect">
+            <a:avLst/>
+          </a:prstGeom>
+          <a:noFill/>
+        </p:spPr>
+        <p:txBody>
+          <a:bodyPr wrap="square" anchor="t" lIns="45720" rIns="45720" tIns="18288" bIns="18288">
+            <a:spAutoFit/>
+          </a:bodyPr>
+          <a:lstStyle/>
+          <a:p>
+            <a:pPr algn="l">
+              <a:lnSpc>
+                <a:spcPct val="100000"/>
+              </a:lnSpc>
+              <a:spcBef>
+                <a:spcPts val="0"/>
+              </a:spcBef>
+              <a:spcAft>
+                <a:spcPts val="400"/>
+              </a:spcAft>
+            </a:pPr>
+            <a:r>
+              <a:rPr sz="1500" b="1">
+                <a:solidFill>
+                  <a:srgbClr val="1A2540"/>
+                </a:solidFill>
+                <a:latin typeface="Segoe UI"/>
+              </a:rPr>
+              <a:t>What's in the MVP</a:t>
+            </a:r>
+          </a:p>
+        </p:txBody>
+      </p:sp>
+      <p:sp>
+        <p:nvSpPr>
+          <p:cNvPr id="11" name="Rounded Rectangle 10"/>
+          <p:cNvSpPr/>
+          <p:nvPr/>
+        </p:nvSpPr>
+        <p:spPr>
+          <a:xfrm>
+            <a:off x="6263640" y="2194560"/>
+            <a:ext cx="5486400" cy="621792"/>
+          </a:xfrm>
+          <a:prstGeom prst="roundRect">
+            <a:avLst/>
+          </a:prstGeom>
+          <a:solidFill>
+            <a:srgbClr val="FFFFFF"/>
+          </a:solidFill>
+          <a:ln w="12700">
+            <a:solidFill>
+              <a:srgbClr val="E2EAF4"/>
+            </a:solidFill>
+          </a:ln>
+          <a:effectLst/>
+        </p:spPr>
+        <p:style>
+          <a:lnRef idx="1">
+            <a:schemeClr val="accent1"/>
+          </a:lnRef>
+          <a:fillRef idx="3">
+            <a:schemeClr val="accent1"/>
+          </a:fillRef>
+          <a:effectRef idx="2">
+            <a:schemeClr val="accent1"/>
+          </a:effectRef>
+          <a:fontRef idx="minor">
+            <a:schemeClr val="lt1"/>
+          </a:fontRef>
+        </p:style>
+        <p:txBody>
+          <a:bodyPr rtlCol="0" anchor="ctr"/>
+          <a:lstStyle/>
+          <a:p>
+            <a:pPr algn="ctr"/>
+          </a:p>
+        </p:txBody>
+      </p:sp>
+      <p:sp>
+        <p:nvSpPr>
+          <p:cNvPr id="12" name="TextBox 11"/>
+          <p:cNvSpPr txBox="1"/>
+          <p:nvPr/>
+        </p:nvSpPr>
+        <p:spPr>
+          <a:xfrm>
+            <a:off x="6400800" y="2194560"/>
+            <a:ext cx="548640" cy="621792"/>
+          </a:xfrm>
+          <a:prstGeom prst="rect">
+            <a:avLst/>
+          </a:prstGeom>
+          <a:noFill/>
+        </p:spPr>
+        <p:txBody>
+          <a:bodyPr wrap="square" anchor="ctr" lIns="45720" rIns="45720" tIns="18288" bIns="18288">
+            <a:spAutoFit/>
+          </a:bodyPr>
+          <a:lstStyle/>
+          <a:p>
+            <a:pPr algn="ctr">
+              <a:lnSpc>
+                <a:spcPct val="100000"/>
+              </a:lnSpc>
+              <a:spcBef>
+                <a:spcPts val="0"/>
+              </a:spcBef>
+              <a:spcAft>
+                <a:spcPts val="400"/>
+              </a:spcAft>
+            </a:pPr>
+            <a:r>
+              <a:rPr sz="1800" b="1">
+                <a:solidFill>
+                  <a:srgbClr val="0F3460"/>
+                </a:solidFill>
+                <a:latin typeface="Segoe UI"/>
+              </a:rPr>
+              <a:t>🔒</a:t>
+            </a:r>
+          </a:p>
+        </p:txBody>
+      </p:sp>
+      <p:sp>
+        <p:nvSpPr>
+          <p:cNvPr id="13" name="TextBox 12"/>
+          <p:cNvSpPr txBox="1"/>
+          <p:nvPr/>
+        </p:nvSpPr>
+        <p:spPr>
+          <a:xfrm>
+            <a:off x="6949440" y="2240279"/>
+            <a:ext cx="4663440" cy="548640"/>
+          </a:xfrm>
+          <a:prstGeom prst="rect">
+            <a:avLst/>
+          </a:prstGeom>
+          <a:noFill/>
+        </p:spPr>
+        <p:txBody>
+          <a:bodyPr wrap="square" anchor="ctr" lIns="45720" rIns="45720" tIns="18288" bIns="18288">
+            <a:spAutoFit/>
+          </a:bodyPr>
+          <a:lstStyle/>
+          <a:p>
+            <a:pPr algn="l">
+              <a:lnSpc>
+                <a:spcPct val="95000"/>
+              </a:lnSpc>
+              <a:spcBef>
+                <a:spcPts val="0"/>
+              </a:spcBef>
+              <a:spcAft>
+                <a:spcPts val="400"/>
+              </a:spcAft>
+            </a:pPr>
+            <a:r>
+              <a:rPr sz="1300" b="1">
+                <a:solidFill>
+                  <a:srgbClr val="0F3460"/>
+                </a:solidFill>
+                <a:latin typeface="Segoe UI"/>
+              </a:rPr>
+              <a:t>Verified Focus Monitor  </a:t>
+            </a:r>
+            <a:r>
+              <a:rPr sz="1150" b="0">
+                <a:solidFill>
+                  <a:srgbClr val="6B7F99"/>
+                </a:solidFill>
+                <a:latin typeface="Segoe UI"/>
+              </a:rPr>
+              <a:t>— webcam + screen presence confirm real focus</a:t>
+            </a:r>
+          </a:p>
+        </p:txBody>
+      </p:sp>
+      <p:sp>
+        <p:nvSpPr>
+          <p:cNvPr id="14" name="Rounded Rectangle 13"/>
+          <p:cNvSpPr/>
+          <p:nvPr/>
+        </p:nvSpPr>
+        <p:spPr>
+          <a:xfrm>
+            <a:off x="6263640" y="2907791"/>
+            <a:ext cx="5486400" cy="621792"/>
+          </a:xfrm>
+          <a:prstGeom prst="roundRect">
+            <a:avLst/>
+          </a:prstGeom>
+          <a:solidFill>
+            <a:srgbClr val="FFFFFF"/>
+          </a:solidFill>
+          <a:ln w="12700">
+            <a:solidFill>
+              <a:srgbClr val="E2EAF4"/>
+            </a:solidFill>
+          </a:ln>
+          <a:effectLst/>
+        </p:spPr>
+        <p:style>
+          <a:lnRef idx="1">
+            <a:schemeClr val="accent1"/>
+          </a:lnRef>
+          <a:fillRef idx="3">
+            <a:schemeClr val="accent1"/>
+          </a:fillRef>
+          <a:effectRef idx="2">
+            <a:schemeClr val="accent1"/>
+          </a:effectRef>
+          <a:fontRef idx="minor">
+            <a:schemeClr val="lt1"/>
+          </a:fontRef>
+        </p:style>
+        <p:txBody>
+          <a:bodyPr rtlCol="0" anchor="ctr"/>
+          <a:lstStyle/>
+          <a:p>
+            <a:pPr algn="ctr"/>
+          </a:p>
+        </p:txBody>
+      </p:sp>
+      <p:sp>
+        <p:nvSpPr>
+          <p:cNvPr id="15" name="TextBox 14"/>
+          <p:cNvSpPr txBox="1"/>
+          <p:nvPr/>
+        </p:nvSpPr>
+        <p:spPr>
+          <a:xfrm>
+            <a:off x="6400800" y="2907791"/>
+            <a:ext cx="548640" cy="621792"/>
+          </a:xfrm>
+          <a:prstGeom prst="rect">
+            <a:avLst/>
+          </a:prstGeom>
+          <a:noFill/>
+        </p:spPr>
+        <p:txBody>
+          <a:bodyPr wrap="square" anchor="ctr" lIns="45720" rIns="45720" tIns="18288" bIns="18288">
+            <a:spAutoFit/>
+          </a:bodyPr>
+          <a:lstStyle/>
+          <a:p>
+            <a:pPr algn="ctr">
+              <a:lnSpc>
+                <a:spcPct val="100000"/>
+              </a:lnSpc>
+              <a:spcBef>
+                <a:spcPts val="0"/>
+              </a:spcBef>
+              <a:spcAft>
+                <a:spcPts val="400"/>
+              </a:spcAft>
+            </a:pPr>
+            <a:r>
+              <a:rPr sz="1800" b="1">
+                <a:solidFill>
+                  <a:srgbClr val="0F3460"/>
+                </a:solidFill>
+                <a:latin typeface="Segoe UI"/>
+              </a:rPr>
+              <a:t>🏆</a:t>
+            </a:r>
+          </a:p>
+        </p:txBody>
+      </p:sp>
+      <p:sp>
+        <p:nvSpPr>
+          <p:cNvPr id="16" name="TextBox 15"/>
+          <p:cNvSpPr txBox="1"/>
+          <p:nvPr/>
+        </p:nvSpPr>
+        <p:spPr>
+          <a:xfrm>
+            <a:off x="6949440" y="2953511"/>
+            <a:ext cx="4663440" cy="548640"/>
+          </a:xfrm>
+          <a:prstGeom prst="rect">
+            <a:avLst/>
+          </a:prstGeom>
+          <a:noFill/>
+        </p:spPr>
+        <p:txBody>
+          <a:bodyPr wrap="square" anchor="ctr" lIns="45720" rIns="45720" tIns="18288" bIns="18288">
+            <a:spAutoFit/>
+          </a:bodyPr>
+          <a:lstStyle/>
+          <a:p>
+            <a:pPr algn="l">
+              <a:lnSpc>
+                <a:spcPct val="95000"/>
+              </a:lnSpc>
+              <a:spcBef>
+                <a:spcPts val="0"/>
+              </a:spcBef>
+              <a:spcAft>
+                <a:spcPts val="400"/>
+              </a:spcAft>
+            </a:pPr>
+            <a:r>
+              <a:rPr sz="1300" b="1">
+                <a:solidFill>
+                  <a:srgbClr val="0F3460"/>
+                </a:solidFill>
+                <a:latin typeface="Segoe UI"/>
+              </a:rPr>
+              <a:t>Grade-linked Leaderboard  </a:t>
+            </a:r>
+            <a:r>
+              <a:rPr sz="1150" b="0">
+                <a:solidFill>
+                  <a:srgbClr val="6B7F99"/>
+                </a:solidFill>
+                <a:latin typeface="Segoe UI"/>
+              </a:rPr>
+              <a:t>— live weekly rankings, up to +2% grade bonus</a:t>
+            </a:r>
+          </a:p>
+        </p:txBody>
+      </p:sp>
+      <p:sp>
+        <p:nvSpPr>
+          <p:cNvPr id="17" name="Rounded Rectangle 16"/>
+          <p:cNvSpPr/>
+          <p:nvPr/>
+        </p:nvSpPr>
+        <p:spPr>
+          <a:xfrm>
+            <a:off x="6263640" y="3621024"/>
+            <a:ext cx="5486400" cy="621792"/>
+          </a:xfrm>
+          <a:prstGeom prst="roundRect">
+            <a:avLst/>
+          </a:prstGeom>
+          <a:solidFill>
+            <a:srgbClr val="FFFFFF"/>
+          </a:solidFill>
+          <a:ln w="12700">
+            <a:solidFill>
+              <a:srgbClr val="E2EAF4"/>
+            </a:solidFill>
+          </a:ln>
+          <a:effectLst/>
+        </p:spPr>
+        <p:style>
+          <a:lnRef idx="1">
+            <a:schemeClr val="accent1"/>
+          </a:lnRef>
+          <a:fillRef idx="3">
+            <a:schemeClr val="accent1"/>
+          </a:fillRef>
+          <a:effectRef idx="2">
+            <a:schemeClr val="accent1"/>
+          </a:effectRef>
+          <a:fontRef idx="minor">
+            <a:schemeClr val="lt1"/>
+          </a:fontRef>
+        </p:style>
+        <p:txBody>
+          <a:bodyPr rtlCol="0" anchor="ctr"/>
+          <a:lstStyle/>
+          <a:p>
+            <a:pPr algn="ctr"/>
+          </a:p>
+        </p:txBody>
+      </p:sp>
+      <p:sp>
+        <p:nvSpPr>
+          <p:cNvPr id="18" name="TextBox 17"/>
+          <p:cNvSpPr txBox="1"/>
+          <p:nvPr/>
+        </p:nvSpPr>
+        <p:spPr>
+          <a:xfrm>
+            <a:off x="6400800" y="3621024"/>
+            <a:ext cx="548640" cy="621792"/>
+          </a:xfrm>
+          <a:prstGeom prst="rect">
+            <a:avLst/>
+          </a:prstGeom>
+          <a:noFill/>
+        </p:spPr>
+        <p:txBody>
+          <a:bodyPr wrap="square" anchor="ctr" lIns="45720" rIns="45720" tIns="18288" bIns="18288">
+            <a:spAutoFit/>
+          </a:bodyPr>
+          <a:lstStyle/>
+          <a:p>
+            <a:pPr algn="ctr">
+              <a:lnSpc>
+                <a:spcPct val="100000"/>
+              </a:lnSpc>
+              <a:spcBef>
+                <a:spcPts val="0"/>
+              </a:spcBef>
+              <a:spcAft>
+                <a:spcPts val="400"/>
+              </a:spcAft>
+            </a:pPr>
+            <a:r>
+              <a:rPr sz="1800" b="1">
+                <a:solidFill>
+                  <a:srgbClr val="0F3460"/>
+                </a:solidFill>
+                <a:latin typeface="Segoe UI"/>
+              </a:rPr>
+              <a:t>📋</a:t>
+            </a:r>
+          </a:p>
+        </p:txBody>
+      </p:sp>
+      <p:sp>
+        <p:nvSpPr>
+          <p:cNvPr id="19" name="TextBox 18"/>
+          <p:cNvSpPr txBox="1"/>
+          <p:nvPr/>
+        </p:nvSpPr>
+        <p:spPr>
+          <a:xfrm>
+            <a:off x="6949440" y="3666744"/>
+            <a:ext cx="4663440" cy="548640"/>
+          </a:xfrm>
+          <a:prstGeom prst="rect">
+            <a:avLst/>
+          </a:prstGeom>
+          <a:noFill/>
+        </p:spPr>
+        <p:txBody>
+          <a:bodyPr wrap="square" anchor="ctr" lIns="45720" rIns="45720" tIns="18288" bIns="18288">
+            <a:spAutoFit/>
+          </a:bodyPr>
+          <a:lstStyle/>
+          <a:p>
+            <a:pPr algn="l">
+              <a:lnSpc>
+                <a:spcPct val="95000"/>
+              </a:lnSpc>
+              <a:spcBef>
+                <a:spcPts val="0"/>
+              </a:spcBef>
+              <a:spcAft>
+                <a:spcPts val="400"/>
+              </a:spcAft>
+            </a:pPr>
+            <a:r>
+              <a:rPr sz="1300" b="1">
+                <a:solidFill>
+                  <a:srgbClr val="0F3460"/>
+                </a:solidFill>
+                <a:latin typeface="Segoe UI"/>
+              </a:rPr>
+              <a:t>Smart Task Prioritiser  </a:t>
+            </a:r>
+            <a:r>
+              <a:rPr sz="1150" b="0">
+                <a:solidFill>
+                  <a:srgbClr val="6B7F99"/>
+                </a:solidFill>
+                <a:latin typeface="Segoe UI"/>
+              </a:rPr>
+              <a:t>— auto-sorted by urgency, with progress bars</a:t>
+            </a:r>
+          </a:p>
+        </p:txBody>
+      </p:sp>
+      <p:sp>
+        <p:nvSpPr>
+          <p:cNvPr id="20" name="Rounded Rectangle 19"/>
+          <p:cNvSpPr/>
+          <p:nvPr/>
+        </p:nvSpPr>
+        <p:spPr>
+          <a:xfrm>
+            <a:off x="6263640" y="4334256"/>
+            <a:ext cx="5486400" cy="621792"/>
+          </a:xfrm>
+          <a:prstGeom prst="roundRect">
+            <a:avLst/>
+          </a:prstGeom>
+          <a:solidFill>
+            <a:srgbClr val="FFFFFF"/>
+          </a:solidFill>
+          <a:ln w="12700">
+            <a:solidFill>
+              <a:srgbClr val="E2EAF4"/>
+            </a:solidFill>
+          </a:ln>
+          <a:effectLst/>
+        </p:spPr>
+        <p:style>
+          <a:lnRef idx="1">
+            <a:schemeClr val="accent1"/>
+          </a:lnRef>
+          <a:fillRef idx="3">
+            <a:schemeClr val="accent1"/>
+          </a:fillRef>
+          <a:effectRef idx="2">
+            <a:schemeClr val="accent1"/>
+          </a:effectRef>
+          <a:fontRef idx="minor">
+            <a:schemeClr val="lt1"/>
+          </a:fontRef>
+        </p:style>
+        <p:txBody>
+          <a:bodyPr rtlCol="0" anchor="ctr"/>
+          <a:lstStyle/>
+          <a:p>
+            <a:pPr algn="ctr"/>
+          </a:p>
+        </p:txBody>
+      </p:sp>
+      <p:sp>
+        <p:nvSpPr>
+          <p:cNvPr id="21" name="TextBox 20"/>
+          <p:cNvSpPr txBox="1"/>
+          <p:nvPr/>
+        </p:nvSpPr>
+        <p:spPr>
+          <a:xfrm>
+            <a:off x="6400800" y="4334256"/>
+            <a:ext cx="548640" cy="621792"/>
+          </a:xfrm>
+          <a:prstGeom prst="rect">
+            <a:avLst/>
+          </a:prstGeom>
+          <a:noFill/>
+        </p:spPr>
+        <p:txBody>
+          <a:bodyPr wrap="square" anchor="ctr" lIns="45720" rIns="45720" tIns="18288" bIns="18288">
+            <a:spAutoFit/>
+          </a:bodyPr>
+          <a:lstStyle/>
+          <a:p>
+            <a:pPr algn="ctr">
+              <a:lnSpc>
+                <a:spcPct val="100000"/>
+              </a:lnSpc>
+              <a:spcBef>
+                <a:spcPts val="0"/>
+              </a:spcBef>
+              <a:spcAft>
+                <a:spcPts val="400"/>
+              </a:spcAft>
+            </a:pPr>
+            <a:r>
+              <a:rPr sz="1800" b="1">
+                <a:solidFill>
+                  <a:srgbClr val="0F3460"/>
+                </a:solidFill>
+                <a:latin typeface="Segoe UI"/>
+              </a:rPr>
+              <a:t>🧑‍🏫</a:t>
+            </a:r>
+          </a:p>
+        </p:txBody>
+      </p:sp>
+      <p:sp>
+        <p:nvSpPr>
+          <p:cNvPr id="22" name="TextBox 21"/>
+          <p:cNvSpPr txBox="1"/>
+          <p:nvPr/>
+        </p:nvSpPr>
+        <p:spPr>
+          <a:xfrm>
+            <a:off x="6949440" y="4379976"/>
+            <a:ext cx="4663440" cy="548640"/>
+          </a:xfrm>
+          <a:prstGeom prst="rect">
+            <a:avLst/>
+          </a:prstGeom>
+          <a:noFill/>
+        </p:spPr>
+        <p:txBody>
+          <a:bodyPr wrap="square" anchor="ctr" lIns="45720" rIns="45720" tIns="18288" bIns="18288">
+            <a:spAutoFit/>
+          </a:bodyPr>
+          <a:lstStyle/>
+          <a:p>
+            <a:pPr algn="l">
+              <a:lnSpc>
+                <a:spcPct val="95000"/>
+              </a:lnSpc>
+              <a:spcBef>
+                <a:spcPts val="0"/>
+              </a:spcBef>
+              <a:spcAft>
+                <a:spcPts val="400"/>
+              </a:spcAft>
+            </a:pPr>
+            <a:r>
+              <a:rPr sz="1300" b="1">
+                <a:solidFill>
+                  <a:srgbClr val="0F3460"/>
+                </a:solidFill>
+                <a:latin typeface="Segoe UI"/>
+              </a:rPr>
+              <a:t>Instructor Dashboard  </a:t>
+            </a:r>
+            <a:r>
+              <a:rPr sz="1150" b="0">
+                <a:solidFill>
+                  <a:srgbClr val="6B7F99"/>
+                </a:solidFill>
+                <a:latin typeface="Segoe UI"/>
+              </a:rPr>
+              <a:t>— progress, focus %, and at-risk flags</a:t>
+            </a:r>
+          </a:p>
+        </p:txBody>
+      </p:sp>
+      <p:sp>
+        <p:nvSpPr>
+          <p:cNvPr id="23" name="TextBox 22"/>
+          <p:cNvSpPr txBox="1"/>
+          <p:nvPr/>
+        </p:nvSpPr>
+        <p:spPr>
+          <a:xfrm>
+            <a:off x="6263640" y="5120640"/>
+            <a:ext cx="5486400" cy="365760"/>
+          </a:xfrm>
+          <a:prstGeom prst="rect">
+            <a:avLst/>
+          </a:prstGeom>
+          <a:noFill/>
+        </p:spPr>
+        <p:txBody>
+          <a:bodyPr wrap="square" anchor="t" lIns="45720" rIns="45720" tIns="18288" bIns="18288">
+            <a:spAutoFit/>
+          </a:bodyPr>
+          <a:lstStyle/>
+          <a:p>
+            <a:pPr algn="l">
+              <a:lnSpc>
+                <a:spcPct val="100000"/>
+              </a:lnSpc>
+              <a:spcBef>
+                <a:spcPts val="0"/>
+              </a:spcBef>
+              <a:spcAft>
+                <a:spcPts val="400"/>
+              </a:spcAft>
+            </a:pPr>
+            <a:r>
+              <a:rPr sz="1200" b="1">
+                <a:solidFill>
+                  <a:srgbClr val="6B7F99"/>
+                </a:solidFill>
+                <a:latin typeface="Segoe UI"/>
+              </a:rPr>
+              <a:t>Intentionally out of scope (next phases):</a:t>
+            </a:r>
+          </a:p>
+        </p:txBody>
+      </p:sp>
+      <p:sp>
+        <p:nvSpPr>
+          <p:cNvPr id="24" name="TextBox 23"/>
+          <p:cNvSpPr txBox="1"/>
+          <p:nvPr/>
+        </p:nvSpPr>
+        <p:spPr>
+          <a:xfrm>
+            <a:off x="6263640" y="5440680"/>
+            <a:ext cx="5486400" cy="548640"/>
+          </a:xfrm>
+          <a:prstGeom prst="rect">
+            <a:avLst/>
+          </a:prstGeom>
+          <a:noFill/>
+        </p:spPr>
+        <p:txBody>
+          <a:bodyPr wrap="square" anchor="t" lIns="45720" rIns="45720" tIns="18288" bIns="18288">
+            <a:spAutoFit/>
+          </a:bodyPr>
+          <a:lstStyle/>
+          <a:p>
+            <a:pPr algn="l">
+              <a:lnSpc>
+                <a:spcPct val="100000"/>
+              </a:lnSpc>
+              <a:spcBef>
+                <a:spcPts val="0"/>
+              </a:spcBef>
+              <a:spcAft>
+                <a:spcPts val="400"/>
+              </a:spcAft>
+            </a:pPr>
+            <a:r>
+              <a:rPr sz="1200" b="0">
+                <a:solidFill>
+                  <a:srgbClr val="6B7F99"/>
+                </a:solidFill>
+                <a:latin typeface="Segoe UI"/>
+              </a:rPr>
+              <a:t>native mobile app · full LMS API · AI task-duration model</a:t>
             </a:r>
           </a:p>
         </p:txBody>
@@ -14883,7 +18006,7 @@
 </p:sld>
 </file>
 
-<file path=ppt/slides/slide3.xml><?xml version="1.0" encoding="utf-8"?>
+<file path=ppt/slides/slide20.xml><?xml version="1.0" encoding="utf-8"?>
 <p:sld xmlns:a="http://schemas.openxmlformats.org/drawingml/2006/main" xmlns:p="http://schemas.openxmlformats.org/presentationml/2006/main" xmlns:r="http://schemas.openxmlformats.org/officeDocument/2006/relationships">
   <p:cSld>
     <p:spTree>
@@ -15021,7 +18144,7 @@
                 </a:solidFill>
                 <a:latin typeface="Segoe UI"/>
               </a:rPr>
-              <a:t>WHAT THE RESEARCH TOLD US</a:t>
+              <a:t>BUSINESS MODEL</a:t>
             </a:r>
           </a:p>
         </p:txBody>
@@ -15066,7 +18189,7 @@
                 </a:solidFill>
                 <a:latin typeface="Segoe UI"/>
               </a:rPr>
-              <a:t>Four insights that point to one belief</a:t>
+              <a:t>How we create and capture value</a:t>
             </a:r>
           </a:p>
         </p:txBody>
@@ -15079,8 +18202,8 @@
         </p:nvSpPr>
         <p:spPr>
           <a:xfrm>
-            <a:off x="502920" y="1691640"/>
-            <a:ext cx="5394960" cy="1874519"/>
+            <a:off x="502920" y="1783080"/>
+            <a:ext cx="4572000" cy="4206240"/>
           </a:xfrm>
           <a:prstGeom prst="roundRect">
             <a:avLst/>
@@ -15119,23 +18242,70 @@
       </p:sp>
       <p:sp>
         <p:nvSpPr>
-          <p:cNvPr id="7" name="Rectangle 6"/>
+          <p:cNvPr id="7" name="TextBox 6"/>
+          <p:cNvSpPr txBox="1"/>
+          <p:nvPr/>
+        </p:nvSpPr>
+        <p:spPr>
+          <a:xfrm>
+            <a:off x="731520" y="1965960"/>
+            <a:ext cx="4114800" cy="365760"/>
+          </a:xfrm>
+          <a:prstGeom prst="rect">
+            <a:avLst/>
+          </a:prstGeom>
+          <a:noFill/>
+        </p:spPr>
+        <p:txBody>
+          <a:bodyPr wrap="square" anchor="t" lIns="45720" rIns="45720" tIns="18288" bIns="18288">
+            <a:spAutoFit/>
+          </a:bodyPr>
+          <a:lstStyle/>
+          <a:p>
+            <a:pPr algn="l">
+              <a:lnSpc>
+                <a:spcPct val="100000"/>
+              </a:lnSpc>
+              <a:spcBef>
+                <a:spcPts val="0"/>
+              </a:spcBef>
+              <a:spcAft>
+                <a:spcPts val="400"/>
+              </a:spcAft>
+            </a:pPr>
+            <a:r>
+              <a:rPr sz="1500" b="1">
+                <a:solidFill>
+                  <a:srgbClr val="0F3460"/>
+                </a:solidFill>
+                <a:latin typeface="Segoe UI"/>
+              </a:rPr>
+              <a:t>Who we serve</a:t>
+            </a:r>
+          </a:p>
+        </p:txBody>
+      </p:sp>
+      <p:sp>
+        <p:nvSpPr>
+          <p:cNvPr id="8" name="Rounded Rectangle 7"/>
           <p:cNvSpPr/>
           <p:nvPr/>
         </p:nvSpPr>
         <p:spPr>
           <a:xfrm>
-            <a:off x="502920" y="1691640"/>
-            <a:ext cx="1097280" cy="1874519"/>
-          </a:xfrm>
-          <a:prstGeom prst="rect">
+            <a:off x="731520" y="2423160"/>
+            <a:ext cx="4114800" cy="777240"/>
+          </a:xfrm>
+          <a:prstGeom prst="roundRect">
             <a:avLst/>
           </a:prstGeom>
           <a:solidFill>
-            <a:srgbClr val="EEF4FD"/>
+            <a:srgbClr val="F8FAFD"/>
           </a:solidFill>
-          <a:ln>
-            <a:noFill/>
+          <a:ln w="12700">
+            <a:solidFill>
+              <a:srgbClr val="E2EAF4"/>
+            </a:solidFill>
           </a:ln>
           <a:effectLst/>
         </p:spPr>
@@ -15163,59 +18333,14 @@
       </p:sp>
       <p:sp>
         <p:nvSpPr>
-          <p:cNvPr id="8" name="TextBox 7"/>
-          <p:cNvSpPr txBox="1"/>
-          <p:nvPr/>
-        </p:nvSpPr>
-        <p:spPr>
-          <a:xfrm>
-            <a:off x="502920" y="1691640"/>
-            <a:ext cx="1097280" cy="1874519"/>
-          </a:xfrm>
-          <a:prstGeom prst="rect">
-            <a:avLst/>
-          </a:prstGeom>
-          <a:noFill/>
-        </p:spPr>
-        <p:txBody>
-          <a:bodyPr wrap="square" anchor="ctr" lIns="45720" rIns="45720" tIns="18288" bIns="18288">
-            <a:spAutoFit/>
-          </a:bodyPr>
-          <a:lstStyle/>
-          <a:p>
-            <a:pPr algn="ctr">
-              <a:lnSpc>
-                <a:spcPct val="100000"/>
-              </a:lnSpc>
-              <a:spcBef>
-                <a:spcPts val="0"/>
-              </a:spcBef>
-              <a:spcAft>
-                <a:spcPts val="400"/>
-              </a:spcAft>
-            </a:pPr>
-            <a:r>
-              <a:rPr sz="4000" b="1">
-                <a:solidFill>
-                  <a:srgbClr val="1A5490"/>
-                </a:solidFill>
-                <a:latin typeface="Segoe UI"/>
-              </a:rPr>
-              <a:t>01</a:t>
-            </a:r>
-          </a:p>
-        </p:txBody>
-      </p:sp>
-      <p:sp>
-        <p:nvSpPr>
           <p:cNvPr id="9" name="TextBox 8"/>
           <p:cNvSpPr txBox="1"/>
           <p:nvPr/>
         </p:nvSpPr>
         <p:spPr>
           <a:xfrm>
-            <a:off x="1828800" y="1984248"/>
-            <a:ext cx="3840480" cy="457200"/>
+            <a:off x="868680" y="2514600"/>
+            <a:ext cx="3840480" cy="640080"/>
           </a:xfrm>
           <a:prstGeom prst="rect">
             <a:avLst/>
@@ -15240,27 +18365,95 @@
               </a:spcAft>
             </a:pPr>
             <a:r>
-              <a:rPr sz="1800" b="1">
+              <a:rPr sz="1300" b="1">
                 <a:solidFill>
                   <a:srgbClr val="0F3460"/>
                 </a:solidFill>
                 <a:latin typeface="Segoe UI"/>
               </a:rPr>
-              <a:t>Knowing ≠ Acting</a:t>
-            </a:r>
-          </a:p>
-        </p:txBody>
-      </p:sp>
-      <p:sp>
-        <p:nvSpPr>
-          <p:cNvPr id="10" name="TextBox 9"/>
-          <p:cNvSpPr txBox="1"/>
-          <p:nvPr/>
-        </p:nvSpPr>
-        <p:spPr>
-          <a:xfrm>
-            <a:off x="1828800" y="2532888"/>
-            <a:ext cx="3886200" cy="914400"/>
+              <a:t>B2C — UAE university students</a:t>
+            </a:r>
+          </a:p>
+          <a:p>
+            <a:pPr algn="l">
+              <a:lnSpc>
+                <a:spcPct val="100000"/>
+              </a:lnSpc>
+              <a:spcBef>
+                <a:spcPts val="0"/>
+              </a:spcBef>
+              <a:spcAft>
+                <a:spcPts val="400"/>
+              </a:spcAft>
+            </a:pPr>
+            <a:r>
+              <a:rPr sz="1150" b="0">
+                <a:solidFill>
+                  <a:srgbClr val="6B7F99"/>
+                </a:solidFill>
+                <a:latin typeface="Segoe UI"/>
+              </a:rPr>
+              <a:t>Freemium app; premium upgrade for power users</a:t>
+            </a:r>
+          </a:p>
+        </p:txBody>
+      </p:sp>
+      <p:sp>
+        <p:nvSpPr>
+          <p:cNvPr id="10" name="Rounded Rectangle 9"/>
+          <p:cNvSpPr/>
+          <p:nvPr/>
+        </p:nvSpPr>
+        <p:spPr>
+          <a:xfrm>
+            <a:off x="731520" y="3337560"/>
+            <a:ext cx="4114800" cy="777240"/>
+          </a:xfrm>
+          <a:prstGeom prst="roundRect">
+            <a:avLst/>
+          </a:prstGeom>
+          <a:solidFill>
+            <a:srgbClr val="F8FAFD"/>
+          </a:solidFill>
+          <a:ln w="12700">
+            <a:solidFill>
+              <a:srgbClr val="E2EAF4"/>
+            </a:solidFill>
+          </a:ln>
+          <a:effectLst/>
+        </p:spPr>
+        <p:style>
+          <a:lnRef idx="1">
+            <a:schemeClr val="accent1"/>
+          </a:lnRef>
+          <a:fillRef idx="3">
+            <a:schemeClr val="accent1"/>
+          </a:fillRef>
+          <a:effectRef idx="2">
+            <a:schemeClr val="accent1"/>
+          </a:effectRef>
+          <a:fontRef idx="minor">
+            <a:schemeClr val="lt1"/>
+          </a:fontRef>
+        </p:style>
+        <p:txBody>
+          <a:bodyPr rtlCol="0" anchor="ctr"/>
+          <a:lstStyle/>
+          <a:p>
+            <a:pPr algn="ctr"/>
+          </a:p>
+        </p:txBody>
+      </p:sp>
+      <p:sp>
+        <p:nvSpPr>
+          <p:cNvPr id="11" name="TextBox 10"/>
+          <p:cNvSpPr txBox="1"/>
+          <p:nvPr/>
+        </p:nvSpPr>
+        <p:spPr>
+          <a:xfrm>
+            <a:off x="868680" y="3429000"/>
+            <a:ext cx="3840480" cy="640080"/>
           </a:xfrm>
           <a:prstGeom prst="rect">
             <a:avLst/>
@@ -15275,37 +18468,238 @@
           <a:p>
             <a:pPr algn="l">
               <a:lnSpc>
-                <a:spcPct val="108000"/>
-              </a:lnSpc>
-              <a:spcBef>
-                <a:spcPts val="0"/>
-              </a:spcBef>
-              <a:spcAft>
-                <a:spcPts val="400"/>
-              </a:spcAft>
-            </a:pPr>
-            <a:r>
-              <a:rPr sz="1350" b="0">
+                <a:spcPct val="100000"/>
+              </a:lnSpc>
+              <a:spcBef>
+                <a:spcPts val="0"/>
+              </a:spcBef>
+              <a:spcAft>
+                <a:spcPts val="400"/>
+              </a:spcAft>
+            </a:pPr>
+            <a:r>
+              <a:rPr sz="1300" b="1">
+                <a:solidFill>
+                  <a:srgbClr val="0F3460"/>
+                </a:solidFill>
+                <a:latin typeface="Segoe UI"/>
+              </a:rPr>
+              <a:t>B2B — Universities</a:t>
+            </a:r>
+          </a:p>
+          <a:p>
+            <a:pPr algn="l">
+              <a:lnSpc>
+                <a:spcPct val="100000"/>
+              </a:lnSpc>
+              <a:spcBef>
+                <a:spcPts val="0"/>
+              </a:spcBef>
+              <a:spcAft>
+                <a:spcPts val="400"/>
+              </a:spcAft>
+            </a:pPr>
+            <a:r>
+              <a:rPr sz="1150" b="0">
                 <a:solidFill>
                   <a:srgbClr val="6B7F99"/>
                 </a:solidFill>
                 <a:latin typeface="Segoe UI"/>
               </a:rPr>
-              <a:t>Students know deadlines but have no system that converts them into a daily start-point.</a:t>
-            </a:r>
-          </a:p>
-        </p:txBody>
-      </p:sp>
-      <p:sp>
-        <p:nvSpPr>
-          <p:cNvPr id="11" name="Rounded Rectangle 10"/>
+              <a:t>Institutional licence per enrolled student</a:t>
+            </a:r>
+          </a:p>
+        </p:txBody>
+      </p:sp>
+      <p:sp>
+        <p:nvSpPr>
+          <p:cNvPr id="12" name="TextBox 11"/>
+          <p:cNvSpPr txBox="1"/>
+          <p:nvPr/>
+        </p:nvSpPr>
+        <p:spPr>
+          <a:xfrm>
+            <a:off x="731520" y="4434840"/>
+            <a:ext cx="4114800" cy="365760"/>
+          </a:xfrm>
+          <a:prstGeom prst="rect">
+            <a:avLst/>
+          </a:prstGeom>
+          <a:noFill/>
+        </p:spPr>
+        <p:txBody>
+          <a:bodyPr wrap="square" anchor="t" lIns="45720" rIns="45720" tIns="18288" bIns="18288">
+            <a:spAutoFit/>
+          </a:bodyPr>
+          <a:lstStyle/>
+          <a:p>
+            <a:pPr algn="l">
+              <a:lnSpc>
+                <a:spcPct val="100000"/>
+              </a:lnSpc>
+              <a:spcBef>
+                <a:spcPts val="0"/>
+              </a:spcBef>
+              <a:spcAft>
+                <a:spcPts val="400"/>
+              </a:spcAft>
+            </a:pPr>
+            <a:r>
+              <a:rPr sz="1500" b="1">
+                <a:solidFill>
+                  <a:srgbClr val="0F3460"/>
+                </a:solidFill>
+                <a:latin typeface="Segoe UI"/>
+              </a:rPr>
+              <a:t>How we reach them</a:t>
+            </a:r>
+          </a:p>
+        </p:txBody>
+      </p:sp>
+      <p:sp>
+        <p:nvSpPr>
+          <p:cNvPr id="13" name="TextBox 12"/>
+          <p:cNvSpPr txBox="1"/>
+          <p:nvPr/>
+        </p:nvSpPr>
+        <p:spPr>
+          <a:xfrm>
+            <a:off x="731520" y="4800600"/>
+            <a:ext cx="4206240" cy="1097280"/>
+          </a:xfrm>
+          <a:prstGeom prst="rect">
+            <a:avLst/>
+          </a:prstGeom>
+          <a:noFill/>
+        </p:spPr>
+        <p:txBody>
+          <a:bodyPr wrap="square" anchor="t" lIns="45720" rIns="45720" tIns="18288" bIns="18288">
+            <a:spAutoFit/>
+          </a:bodyPr>
+          <a:lstStyle/>
+          <a:p>
+            <a:pPr algn="l">
+              <a:lnSpc>
+                <a:spcPct val="115000"/>
+              </a:lnSpc>
+              <a:spcBef>
+                <a:spcPts val="0"/>
+              </a:spcBef>
+              <a:spcAft>
+                <a:spcPts val="400"/>
+              </a:spcAft>
+            </a:pPr>
+            <a:r>
+              <a:rPr sz="1250" b="0">
+                <a:solidFill>
+                  <a:srgbClr val="1A2540"/>
+                </a:solidFill>
+                <a:latin typeface="Segoe UI"/>
+              </a:rPr>
+              <a:t>•  University partnerships &amp; pilots</a:t>
+            </a:r>
+          </a:p>
+          <a:p>
+            <a:pPr algn="l">
+              <a:lnSpc>
+                <a:spcPct val="115000"/>
+              </a:lnSpc>
+              <a:spcBef>
+                <a:spcPts val="0"/>
+              </a:spcBef>
+              <a:spcAft>
+                <a:spcPts val="400"/>
+              </a:spcAft>
+            </a:pPr>
+            <a:r>
+              <a:rPr sz="1250" b="0">
+                <a:solidFill>
+                  <a:srgbClr val="1A2540"/>
+                </a:solidFill>
+                <a:latin typeface="Segoe UI"/>
+              </a:rPr>
+              <a:t>•  Web platform (self-serve sign-up)</a:t>
+            </a:r>
+          </a:p>
+          <a:p>
+            <a:pPr algn="l">
+              <a:lnSpc>
+                <a:spcPct val="115000"/>
+              </a:lnSpc>
+              <a:spcBef>
+                <a:spcPts val="0"/>
+              </a:spcBef>
+              <a:spcAft>
+                <a:spcPts val="400"/>
+              </a:spcAft>
+            </a:pPr>
+            <a:r>
+              <a:rPr sz="1250" b="0">
+                <a:solidFill>
+                  <a:srgbClr val="1A2540"/>
+                </a:solidFill>
+                <a:latin typeface="Segoe UI"/>
+              </a:rPr>
+              <a:t>•  Social — TikTok / Instagram student communities</a:t>
+            </a:r>
+          </a:p>
+        </p:txBody>
+      </p:sp>
+      <p:sp>
+        <p:nvSpPr>
+          <p:cNvPr id="14" name="TextBox 13"/>
+          <p:cNvSpPr txBox="1"/>
+          <p:nvPr/>
+        </p:nvSpPr>
+        <p:spPr>
+          <a:xfrm>
+            <a:off x="5349240" y="1783080"/>
+            <a:ext cx="6400800" cy="365760"/>
+          </a:xfrm>
+          <a:prstGeom prst="rect">
+            <a:avLst/>
+          </a:prstGeom>
+          <a:noFill/>
+        </p:spPr>
+        <p:txBody>
+          <a:bodyPr wrap="square" anchor="t" lIns="45720" rIns="45720" tIns="18288" bIns="18288">
+            <a:spAutoFit/>
+          </a:bodyPr>
+          <a:lstStyle/>
+          <a:p>
+            <a:pPr algn="l">
+              <a:lnSpc>
+                <a:spcPct val="100000"/>
+              </a:lnSpc>
+              <a:spcBef>
+                <a:spcPts val="0"/>
+              </a:spcBef>
+              <a:spcAft>
+                <a:spcPts val="400"/>
+              </a:spcAft>
+            </a:pPr>
+            <a:r>
+              <a:rPr sz="1500" b="1">
+                <a:solidFill>
+                  <a:srgbClr val="0F3460"/>
+                </a:solidFill>
+                <a:latin typeface="Segoe UI"/>
+              </a:rPr>
+              <a:t>Revenue streams</a:t>
+            </a:r>
+          </a:p>
+        </p:txBody>
+      </p:sp>
+      <p:sp>
+        <p:nvSpPr>
+          <p:cNvPr id="15" name="Rounded Rectangle 14"/>
           <p:cNvSpPr/>
           <p:nvPr/>
         </p:nvSpPr>
         <p:spPr>
           <a:xfrm>
-            <a:off x="6126480" y="1691640"/>
-            <a:ext cx="5394960" cy="1874519"/>
+            <a:off x="5349240" y="2194560"/>
+            <a:ext cx="6400800" cy="841248"/>
           </a:xfrm>
           <a:prstGeom prst="roundRect">
             <a:avLst/>
@@ -15344,20 +18738,20 @@
       </p:sp>
       <p:sp>
         <p:nvSpPr>
-          <p:cNvPr id="12" name="Rectangle 11"/>
+          <p:cNvPr id="16" name="Rectangle 15"/>
           <p:cNvSpPr/>
           <p:nvPr/>
         </p:nvSpPr>
         <p:spPr>
           <a:xfrm>
-            <a:off x="6126480" y="1691640"/>
-            <a:ext cx="1097280" cy="1874519"/>
+            <a:off x="5349240" y="2194560"/>
+            <a:ext cx="109728" cy="841248"/>
           </a:xfrm>
           <a:prstGeom prst="rect">
             <a:avLst/>
           </a:prstGeom>
           <a:solidFill>
-            <a:srgbClr val="EEF4FD"/>
+            <a:srgbClr val="6B7F99"/>
           </a:solidFill>
           <a:ln>
             <a:noFill/>
@@ -15388,14 +18782,81 @@
       </p:sp>
       <p:sp>
         <p:nvSpPr>
-          <p:cNvPr id="13" name="TextBox 12"/>
-          <p:cNvSpPr txBox="1"/>
-          <p:nvPr/>
-        </p:nvSpPr>
-        <p:spPr>
-          <a:xfrm>
-            <a:off x="6126480" y="1691640"/>
-            <a:ext cx="1097280" cy="1874519"/>
+          <p:cNvPr id="17" name="TextBox 16"/>
+          <p:cNvSpPr txBox="1"/>
+          <p:nvPr/>
+        </p:nvSpPr>
+        <p:spPr>
+          <a:xfrm>
+            <a:off x="5623560" y="2304288"/>
+            <a:ext cx="2743200" cy="640080"/>
+          </a:xfrm>
+          <a:prstGeom prst="rect">
+            <a:avLst/>
+          </a:prstGeom>
+          <a:noFill/>
+        </p:spPr>
+        <p:txBody>
+          <a:bodyPr wrap="square" anchor="t" lIns="45720" rIns="45720" tIns="18288" bIns="18288">
+            <a:spAutoFit/>
+          </a:bodyPr>
+          <a:lstStyle/>
+          <a:p>
+            <a:pPr algn="l">
+              <a:lnSpc>
+                <a:spcPct val="100000"/>
+              </a:lnSpc>
+              <a:spcBef>
+                <a:spcPts val="0"/>
+              </a:spcBef>
+              <a:spcAft>
+                <a:spcPts val="400"/>
+              </a:spcAft>
+            </a:pPr>
+            <a:r>
+              <a:rPr sz="1500" b="1">
+                <a:solidFill>
+                  <a:srgbClr val="0F3460"/>
+                </a:solidFill>
+                <a:latin typeface="Segoe UI"/>
+              </a:rPr>
+              <a:t>Free</a:t>
+            </a:r>
+          </a:p>
+          <a:p>
+            <a:pPr algn="l">
+              <a:lnSpc>
+                <a:spcPct val="100000"/>
+              </a:lnSpc>
+              <a:spcBef>
+                <a:spcPts val="0"/>
+              </a:spcBef>
+              <a:spcAft>
+                <a:spcPts val="400"/>
+              </a:spcAft>
+            </a:pPr>
+            <a:r>
+              <a:rPr sz="1150" b="0">
+                <a:solidFill>
+                  <a:srgbClr val="6B7F99"/>
+                </a:solidFill>
+                <a:latin typeface="Segoe UI"/>
+              </a:rPr>
+              <a:t>Core tasks + streaks</a:t>
+            </a:r>
+          </a:p>
+        </p:txBody>
+      </p:sp>
+      <p:sp>
+        <p:nvSpPr>
+          <p:cNvPr id="18" name="TextBox 17"/>
+          <p:cNvSpPr txBox="1"/>
+          <p:nvPr/>
+        </p:nvSpPr>
+        <p:spPr>
+          <a:xfrm>
+            <a:off x="8412480" y="2194560"/>
+            <a:ext cx="3200400" cy="841248"/>
           </a:xfrm>
           <a:prstGeom prst="rect">
             <a:avLst/>
@@ -15408,129 +18869,39 @@
           </a:bodyPr>
           <a:lstStyle/>
           <a:p>
-            <a:pPr algn="ctr">
-              <a:lnSpc>
-                <a:spcPct val="100000"/>
-              </a:lnSpc>
-              <a:spcBef>
-                <a:spcPts val="0"/>
-              </a:spcBef>
-              <a:spcAft>
-                <a:spcPts val="400"/>
-              </a:spcAft>
-            </a:pPr>
-            <a:r>
-              <a:rPr sz="4000" b="1">
-                <a:solidFill>
-                  <a:srgbClr val="1A5490"/>
-                </a:solidFill>
-                <a:latin typeface="Segoe UI"/>
-              </a:rPr>
-              <a:t>02</a:t>
-            </a:r>
-          </a:p>
-        </p:txBody>
-      </p:sp>
-      <p:sp>
-        <p:nvSpPr>
-          <p:cNvPr id="14" name="TextBox 13"/>
-          <p:cNvSpPr txBox="1"/>
-          <p:nvPr/>
-        </p:nvSpPr>
-        <p:spPr>
-          <a:xfrm>
-            <a:off x="7452360" y="1984248"/>
-            <a:ext cx="3840480" cy="457200"/>
-          </a:xfrm>
-          <a:prstGeom prst="rect">
-            <a:avLst/>
-          </a:prstGeom>
-          <a:noFill/>
-        </p:spPr>
-        <p:txBody>
-          <a:bodyPr wrap="square" anchor="t" lIns="45720" rIns="45720" tIns="18288" bIns="18288">
-            <a:spAutoFit/>
-          </a:bodyPr>
-          <a:lstStyle/>
-          <a:p>
-            <a:pPr algn="l">
-              <a:lnSpc>
-                <a:spcPct val="100000"/>
-              </a:lnSpc>
-              <a:spcBef>
-                <a:spcPts val="0"/>
-              </a:spcBef>
-              <a:spcAft>
-                <a:spcPts val="400"/>
-              </a:spcAft>
-            </a:pPr>
-            <a:r>
-              <a:rPr sz="1800" b="1">
-                <a:solidFill>
-                  <a:srgbClr val="0F3460"/>
-                </a:solidFill>
-                <a:latin typeface="Segoe UI"/>
-              </a:rPr>
-              <a:t>It's emotional</a:t>
-            </a:r>
-          </a:p>
-        </p:txBody>
-      </p:sp>
-      <p:sp>
-        <p:nvSpPr>
-          <p:cNvPr id="15" name="TextBox 14"/>
-          <p:cNvSpPr txBox="1"/>
-          <p:nvPr/>
-        </p:nvSpPr>
-        <p:spPr>
-          <a:xfrm>
-            <a:off x="7452360" y="2532888"/>
-            <a:ext cx="3886200" cy="914400"/>
-          </a:xfrm>
-          <a:prstGeom prst="rect">
-            <a:avLst/>
-          </a:prstGeom>
-          <a:noFill/>
-        </p:spPr>
-        <p:txBody>
-          <a:bodyPr wrap="square" anchor="t" lIns="45720" rIns="45720" tIns="18288" bIns="18288">
-            <a:spAutoFit/>
-          </a:bodyPr>
-          <a:lstStyle/>
-          <a:p>
-            <a:pPr algn="l">
-              <a:lnSpc>
-                <a:spcPct val="108000"/>
-              </a:lnSpc>
-              <a:spcBef>
-                <a:spcPts val="0"/>
-              </a:spcBef>
-              <a:spcAft>
-                <a:spcPts val="400"/>
-              </a:spcAft>
-            </a:pPr>
-            <a:r>
-              <a:rPr sz="1350" b="0">
+            <a:pPr algn="r">
+              <a:lnSpc>
+                <a:spcPct val="100000"/>
+              </a:lnSpc>
+              <a:spcBef>
+                <a:spcPts val="0"/>
+              </a:spcBef>
+              <a:spcAft>
+                <a:spcPts val="400"/>
+              </a:spcAft>
+            </a:pPr>
+            <a:r>
+              <a:rPr sz="1700" b="1">
                 <a:solidFill>
                   <a:srgbClr val="6B7F99"/>
                 </a:solidFill>
                 <a:latin typeface="Segoe UI"/>
               </a:rPr>
-              <a:t>Procrastination is an emotion-regulation problem — tasks must be made to feel manageable.</a:t>
-            </a:r>
-          </a:p>
-        </p:txBody>
-      </p:sp>
-      <p:sp>
-        <p:nvSpPr>
-          <p:cNvPr id="16" name="Rounded Rectangle 15"/>
+              <a:t>AED 0</a:t>
+            </a:r>
+          </a:p>
+        </p:txBody>
+      </p:sp>
+      <p:sp>
+        <p:nvSpPr>
+          <p:cNvPr id="19" name="Rounded Rectangle 18"/>
           <p:cNvSpPr/>
           <p:nvPr/>
         </p:nvSpPr>
         <p:spPr>
           <a:xfrm>
-            <a:off x="502920" y="3840480"/>
-            <a:ext cx="5394960" cy="1874519"/>
+            <a:off x="5349240" y="3154680"/>
+            <a:ext cx="6400800" cy="841248"/>
           </a:xfrm>
           <a:prstGeom prst="roundRect">
             <a:avLst/>
@@ -15569,20 +18940,20 @@
       </p:sp>
       <p:sp>
         <p:nvSpPr>
-          <p:cNvPr id="17" name="Rectangle 16"/>
+          <p:cNvPr id="20" name="Rectangle 19"/>
           <p:cNvSpPr/>
           <p:nvPr/>
         </p:nvSpPr>
         <p:spPr>
           <a:xfrm>
-            <a:off x="502920" y="3840480"/>
-            <a:ext cx="1097280" cy="1874519"/>
+            <a:off x="5349240" y="3154680"/>
+            <a:ext cx="109728" cy="841248"/>
           </a:xfrm>
           <a:prstGeom prst="rect">
             <a:avLst/>
           </a:prstGeom>
           <a:solidFill>
-            <a:srgbClr val="EEF4FD"/>
+            <a:srgbClr val="0D7377"/>
           </a:solidFill>
           <a:ln>
             <a:noFill/>
@@ -15613,14 +18984,81 @@
       </p:sp>
       <p:sp>
         <p:nvSpPr>
-          <p:cNvPr id="18" name="TextBox 17"/>
-          <p:cNvSpPr txBox="1"/>
-          <p:nvPr/>
-        </p:nvSpPr>
-        <p:spPr>
-          <a:xfrm>
-            <a:off x="502920" y="3840480"/>
-            <a:ext cx="1097280" cy="1874519"/>
+          <p:cNvPr id="21" name="TextBox 20"/>
+          <p:cNvSpPr txBox="1"/>
+          <p:nvPr/>
+        </p:nvSpPr>
+        <p:spPr>
+          <a:xfrm>
+            <a:off x="5623560" y="3264408"/>
+            <a:ext cx="2743200" cy="640080"/>
+          </a:xfrm>
+          <a:prstGeom prst="rect">
+            <a:avLst/>
+          </a:prstGeom>
+          <a:noFill/>
+        </p:spPr>
+        <p:txBody>
+          <a:bodyPr wrap="square" anchor="t" lIns="45720" rIns="45720" tIns="18288" bIns="18288">
+            <a:spAutoFit/>
+          </a:bodyPr>
+          <a:lstStyle/>
+          <a:p>
+            <a:pPr algn="l">
+              <a:lnSpc>
+                <a:spcPct val="100000"/>
+              </a:lnSpc>
+              <a:spcBef>
+                <a:spcPts val="0"/>
+              </a:spcBef>
+              <a:spcAft>
+                <a:spcPts val="400"/>
+              </a:spcAft>
+            </a:pPr>
+            <a:r>
+              <a:rPr sz="1500" b="1">
+                <a:solidFill>
+                  <a:srgbClr val="0F3460"/>
+                </a:solidFill>
+                <a:latin typeface="Segoe UI"/>
+              </a:rPr>
+              <a:t>Premium</a:t>
+            </a:r>
+          </a:p>
+          <a:p>
+            <a:pPr algn="l">
+              <a:lnSpc>
+                <a:spcPct val="100000"/>
+              </a:lnSpc>
+              <a:spcBef>
+                <a:spcPts val="0"/>
+              </a:spcBef>
+              <a:spcAft>
+                <a:spcPts val="400"/>
+              </a:spcAft>
+            </a:pPr>
+            <a:r>
+              <a:rPr sz="1150" b="0">
+                <a:solidFill>
+                  <a:srgbClr val="6B7F99"/>
+                </a:solidFill>
+                <a:latin typeface="Segoe UI"/>
+              </a:rPr>
+              <a:t>Predictions, focus mode, sync</a:t>
+            </a:r>
+          </a:p>
+        </p:txBody>
+      </p:sp>
+      <p:sp>
+        <p:nvSpPr>
+          <p:cNvPr id="22" name="TextBox 21"/>
+          <p:cNvSpPr txBox="1"/>
+          <p:nvPr/>
+        </p:nvSpPr>
+        <p:spPr>
+          <a:xfrm>
+            <a:off x="8412480" y="3154680"/>
+            <a:ext cx="3200400" cy="841248"/>
           </a:xfrm>
           <a:prstGeom prst="rect">
             <a:avLst/>
@@ -15633,129 +19071,39 @@
           </a:bodyPr>
           <a:lstStyle/>
           <a:p>
-            <a:pPr algn="ctr">
-              <a:lnSpc>
-                <a:spcPct val="100000"/>
-              </a:lnSpc>
-              <a:spcBef>
-                <a:spcPts val="0"/>
-              </a:spcBef>
-              <a:spcAft>
-                <a:spcPts val="400"/>
-              </a:spcAft>
-            </a:pPr>
-            <a:r>
-              <a:rPr sz="4000" b="1">
-                <a:solidFill>
-                  <a:srgbClr val="1A5490"/>
-                </a:solidFill>
-                <a:latin typeface="Segoe UI"/>
-              </a:rPr>
-              <a:t>03</a:t>
-            </a:r>
-          </a:p>
-        </p:txBody>
-      </p:sp>
-      <p:sp>
-        <p:nvSpPr>
-          <p:cNvPr id="19" name="TextBox 18"/>
-          <p:cNvSpPr txBox="1"/>
-          <p:nvPr/>
-        </p:nvSpPr>
-        <p:spPr>
-          <a:xfrm>
-            <a:off x="1828800" y="4133088"/>
-            <a:ext cx="3840480" cy="457200"/>
-          </a:xfrm>
-          <a:prstGeom prst="rect">
-            <a:avLst/>
-          </a:prstGeom>
-          <a:noFill/>
-        </p:spPr>
-        <p:txBody>
-          <a:bodyPr wrap="square" anchor="t" lIns="45720" rIns="45720" tIns="18288" bIns="18288">
-            <a:spAutoFit/>
-          </a:bodyPr>
-          <a:lstStyle/>
-          <a:p>
-            <a:pPr algn="l">
-              <a:lnSpc>
-                <a:spcPct val="100000"/>
-              </a:lnSpc>
-              <a:spcBef>
-                <a:spcPts val="0"/>
-              </a:spcBef>
-              <a:spcAft>
-                <a:spcPts val="400"/>
-              </a:spcAft>
-            </a:pPr>
-            <a:r>
-              <a:rPr sz="1800" b="1">
-                <a:solidFill>
-                  <a:srgbClr val="0F3460"/>
-                </a:solidFill>
-                <a:latin typeface="Segoe UI"/>
-              </a:rPr>
-              <a:t>Maintenance overload</a:t>
-            </a:r>
-          </a:p>
-        </p:txBody>
-      </p:sp>
-      <p:sp>
-        <p:nvSpPr>
-          <p:cNvPr id="20" name="TextBox 19"/>
-          <p:cNvSpPr txBox="1"/>
-          <p:nvPr/>
-        </p:nvSpPr>
-        <p:spPr>
-          <a:xfrm>
-            <a:off x="1828800" y="4681728"/>
-            <a:ext cx="3886200" cy="914400"/>
-          </a:xfrm>
-          <a:prstGeom prst="rect">
-            <a:avLst/>
-          </a:prstGeom>
-          <a:noFill/>
-        </p:spPr>
-        <p:txBody>
-          <a:bodyPr wrap="square" anchor="t" lIns="45720" rIns="45720" tIns="18288" bIns="18288">
-            <a:spAutoFit/>
-          </a:bodyPr>
-          <a:lstStyle/>
-          <a:p>
-            <a:pPr algn="l">
-              <a:lnSpc>
-                <a:spcPct val="108000"/>
-              </a:lnSpc>
-              <a:spcBef>
-                <a:spcPts val="0"/>
-              </a:spcBef>
-              <a:spcAft>
-                <a:spcPts val="400"/>
-              </a:spcAft>
-            </a:pPr>
-            <a:r>
-              <a:rPr sz="1350" b="0">
-                <a:solidFill>
-                  <a:srgbClr val="6B7F99"/>
-                </a:solidFill>
-                <a:latin typeface="Segoe UI"/>
-              </a:rPr>
-              <a:t>Manual planners pile admin onto academic load. Auto-sync isn't a nice-to-have — it's essential.</a:t>
-            </a:r>
-          </a:p>
-        </p:txBody>
-      </p:sp>
-      <p:sp>
-        <p:nvSpPr>
-          <p:cNvPr id="21" name="Rounded Rectangle 20"/>
+            <a:pPr algn="r">
+              <a:lnSpc>
+                <a:spcPct val="100000"/>
+              </a:lnSpc>
+              <a:spcBef>
+                <a:spcPts val="0"/>
+              </a:spcBef>
+              <a:spcAft>
+                <a:spcPts val="400"/>
+              </a:spcAft>
+            </a:pPr>
+            <a:r>
+              <a:rPr sz="1700" b="1">
+                <a:solidFill>
+                  <a:srgbClr val="0D7377"/>
+                </a:solidFill>
+                <a:latin typeface="Segoe UI"/>
+              </a:rPr>
+              <a:t>AED 29 / mo</a:t>
+            </a:r>
+          </a:p>
+        </p:txBody>
+      </p:sp>
+      <p:sp>
+        <p:nvSpPr>
+          <p:cNvPr id="23" name="Rounded Rectangle 22"/>
           <p:cNvSpPr/>
           <p:nvPr/>
         </p:nvSpPr>
         <p:spPr>
           <a:xfrm>
-            <a:off x="6126480" y="3840480"/>
-            <a:ext cx="5394960" cy="1874519"/>
+            <a:off x="5349240" y="4114800"/>
+            <a:ext cx="6400800" cy="841248"/>
           </a:xfrm>
           <a:prstGeom prst="roundRect">
             <a:avLst/>
@@ -15794,20 +19142,20 @@
       </p:sp>
       <p:sp>
         <p:nvSpPr>
-          <p:cNvPr id="22" name="Rectangle 21"/>
+          <p:cNvPr id="24" name="Rectangle 23"/>
           <p:cNvSpPr/>
           <p:nvPr/>
         </p:nvSpPr>
         <p:spPr>
           <a:xfrm>
-            <a:off x="6126480" y="3840480"/>
-            <a:ext cx="1097280" cy="1874519"/>
+            <a:off x="5349240" y="4114800"/>
+            <a:ext cx="109728" cy="841248"/>
           </a:xfrm>
           <a:prstGeom prst="rect">
             <a:avLst/>
           </a:prstGeom>
           <a:solidFill>
-            <a:srgbClr val="EEF4FD"/>
+            <a:srgbClr val="1A5490"/>
           </a:solidFill>
           <a:ln>
             <a:noFill/>
@@ -15838,14 +19186,81 @@
       </p:sp>
       <p:sp>
         <p:nvSpPr>
-          <p:cNvPr id="23" name="TextBox 22"/>
-          <p:cNvSpPr txBox="1"/>
-          <p:nvPr/>
-        </p:nvSpPr>
-        <p:spPr>
-          <a:xfrm>
-            <a:off x="6126480" y="3840480"/>
-            <a:ext cx="1097280" cy="1874519"/>
+          <p:cNvPr id="25" name="TextBox 24"/>
+          <p:cNvSpPr txBox="1"/>
+          <p:nvPr/>
+        </p:nvSpPr>
+        <p:spPr>
+          <a:xfrm>
+            <a:off x="5623560" y="4224528"/>
+            <a:ext cx="2743200" cy="640080"/>
+          </a:xfrm>
+          <a:prstGeom prst="rect">
+            <a:avLst/>
+          </a:prstGeom>
+          <a:noFill/>
+        </p:spPr>
+        <p:txBody>
+          <a:bodyPr wrap="square" anchor="t" lIns="45720" rIns="45720" tIns="18288" bIns="18288">
+            <a:spAutoFit/>
+          </a:bodyPr>
+          <a:lstStyle/>
+          <a:p>
+            <a:pPr algn="l">
+              <a:lnSpc>
+                <a:spcPct val="100000"/>
+              </a:lnSpc>
+              <a:spcBef>
+                <a:spcPts val="0"/>
+              </a:spcBef>
+              <a:spcAft>
+                <a:spcPts val="400"/>
+              </a:spcAft>
+            </a:pPr>
+            <a:r>
+              <a:rPr sz="1500" b="1">
+                <a:solidFill>
+                  <a:srgbClr val="0F3460"/>
+                </a:solidFill>
+                <a:latin typeface="Segoe UI"/>
+              </a:rPr>
+              <a:t>Institutional</a:t>
+            </a:r>
+          </a:p>
+          <a:p>
+            <a:pPr algn="l">
+              <a:lnSpc>
+                <a:spcPct val="100000"/>
+              </a:lnSpc>
+              <a:spcBef>
+                <a:spcPts val="0"/>
+              </a:spcBef>
+              <a:spcAft>
+                <a:spcPts val="400"/>
+              </a:spcAft>
+            </a:pPr>
+            <a:r>
+              <a:rPr sz="1150" b="0">
+                <a:solidFill>
+                  <a:srgbClr val="6B7F99"/>
+                </a:solidFill>
+                <a:latin typeface="Segoe UI"/>
+              </a:rPr>
+              <a:t>Full platform per university</a:t>
+            </a:r>
+          </a:p>
+        </p:txBody>
+      </p:sp>
+      <p:sp>
+        <p:nvSpPr>
+          <p:cNvPr id="26" name="TextBox 25"/>
+          <p:cNvSpPr txBox="1"/>
+          <p:nvPr/>
+        </p:nvSpPr>
+        <p:spPr>
+          <a:xfrm>
+            <a:off x="8412480" y="4114800"/>
+            <a:ext cx="3200400" cy="841248"/>
           </a:xfrm>
           <a:prstGeom prst="rect">
             <a:avLst/>
@@ -15858,26 +19273,1308 @@
           </a:bodyPr>
           <a:lstStyle/>
           <a:p>
-            <a:pPr algn="ctr">
-              <a:lnSpc>
-                <a:spcPct val="100000"/>
-              </a:lnSpc>
-              <a:spcBef>
-                <a:spcPts val="0"/>
-              </a:spcBef>
-              <a:spcAft>
-                <a:spcPts val="400"/>
-              </a:spcAft>
-            </a:pPr>
-            <a:r>
-              <a:rPr sz="4000" b="1">
+            <a:pPr algn="r">
+              <a:lnSpc>
+                <a:spcPct val="100000"/>
+              </a:lnSpc>
+              <a:spcBef>
+                <a:spcPts val="0"/>
+              </a:spcBef>
+              <a:spcAft>
+                <a:spcPts val="400"/>
+              </a:spcAft>
+            </a:pPr>
+            <a:r>
+              <a:rPr sz="1700" b="1">
                 <a:solidFill>
                   <a:srgbClr val="1A5490"/>
                 </a:solidFill>
                 <a:latin typeface="Segoe UI"/>
               </a:rPr>
-              <a:t>04</a:t>
-            </a:r>
+              <a:t>AED 15 / student / yr</a:t>
+            </a:r>
+          </a:p>
+        </p:txBody>
+      </p:sp>
+      <p:sp>
+        <p:nvSpPr>
+          <p:cNvPr id="27" name="Rounded Rectangle 26"/>
+          <p:cNvSpPr/>
+          <p:nvPr/>
+        </p:nvSpPr>
+        <p:spPr>
+          <a:xfrm>
+            <a:off x="5349240" y="5166360"/>
+            <a:ext cx="6400800" cy="777240"/>
+          </a:xfrm>
+          <a:prstGeom prst="roundRect">
+            <a:avLst/>
+          </a:prstGeom>
+          <a:solidFill>
+            <a:srgbClr val="E7F7F2"/>
+          </a:solidFill>
+          <a:ln w="12700">
+            <a:solidFill>
+              <a:srgbClr val="E2EAF4"/>
+            </a:solidFill>
+          </a:ln>
+          <a:effectLst/>
+        </p:spPr>
+        <p:style>
+          <a:lnRef idx="1">
+            <a:schemeClr val="accent1"/>
+          </a:lnRef>
+          <a:fillRef idx="3">
+            <a:schemeClr val="accent1"/>
+          </a:fillRef>
+          <a:effectRef idx="2">
+            <a:schemeClr val="accent1"/>
+          </a:effectRef>
+          <a:fontRef idx="minor">
+            <a:schemeClr val="lt1"/>
+          </a:fontRef>
+        </p:style>
+        <p:txBody>
+          <a:bodyPr rtlCol="0" anchor="ctr"/>
+          <a:lstStyle/>
+          <a:p>
+            <a:pPr algn="ctr"/>
+          </a:p>
+        </p:txBody>
+      </p:sp>
+      <p:sp>
+        <p:nvSpPr>
+          <p:cNvPr id="28" name="TextBox 27"/>
+          <p:cNvSpPr txBox="1"/>
+          <p:nvPr/>
+        </p:nvSpPr>
+        <p:spPr>
+          <a:xfrm>
+            <a:off x="5532120" y="5166360"/>
+            <a:ext cx="6126480" cy="777240"/>
+          </a:xfrm>
+          <a:prstGeom prst="rect">
+            <a:avLst/>
+          </a:prstGeom>
+          <a:noFill/>
+        </p:spPr>
+        <p:txBody>
+          <a:bodyPr wrap="square" anchor="ctr" lIns="45720" rIns="45720" tIns="18288" bIns="18288">
+            <a:spAutoFit/>
+          </a:bodyPr>
+          <a:lstStyle/>
+          <a:p>
+            <a:pPr algn="l">
+              <a:lnSpc>
+                <a:spcPct val="100000"/>
+              </a:lnSpc>
+              <a:spcBef>
+                <a:spcPts val="0"/>
+              </a:spcBef>
+              <a:spcAft>
+                <a:spcPts val="400"/>
+              </a:spcAft>
+            </a:pPr>
+            <a:r>
+              <a:rPr sz="1250" b="1">
+                <a:solidFill>
+                  <a:srgbClr val="1A2540"/>
+                </a:solidFill>
+                <a:latin typeface="Segoe UI"/>
+              </a:rPr>
+              <a:t>Unit economics: </a:t>
+            </a:r>
+            <a:r>
+              <a:rPr sz="1250" b="0">
+                <a:solidFill>
+                  <a:srgbClr val="6B7F99"/>
+                </a:solidFill>
+                <a:latin typeface="Segoe UI"/>
+              </a:rPr>
+              <a:t>low marginal cost per user (cloud-hosted SaaS) → freemium funnel converts to premium &amp; institutional revenue.</a:t>
+            </a:r>
+          </a:p>
+        </p:txBody>
+      </p:sp>
+    </p:spTree>
+  </p:cSld>
+  <p:clrMapOvr>
+    <a:masterClrMapping/>
+  </p:clrMapOvr>
+</p:sld>
+</file>
+
+<file path=ppt/slides/slide21.xml><?xml version="1.0" encoding="utf-8"?>
+<p:sld xmlns:a="http://schemas.openxmlformats.org/drawingml/2006/main" xmlns:p="http://schemas.openxmlformats.org/presentationml/2006/main" xmlns:r="http://schemas.openxmlformats.org/officeDocument/2006/relationships">
+  <p:cSld>
+    <p:spTree>
+      <p:nvGrpSpPr>
+        <p:cNvPr id="1" name=""/>
+        <p:cNvGrpSpPr/>
+        <p:nvPr/>
+      </p:nvGrpSpPr>
+      <p:grpSpPr/>
+      <p:sp>
+        <p:nvSpPr>
+          <p:cNvPr id="2" name="Rectangle 1"/>
+          <p:cNvSpPr/>
+          <p:nvPr/>
+        </p:nvSpPr>
+        <p:spPr>
+          <a:xfrm>
+            <a:off x="0" y="0"/>
+            <a:ext cx="12191695" cy="6858000"/>
+          </a:xfrm>
+          <a:prstGeom prst="rect">
+            <a:avLst/>
+          </a:prstGeom>
+          <a:solidFill>
+            <a:srgbClr val="F8FAFD"/>
+          </a:solidFill>
+          <a:ln>
+            <a:noFill/>
+          </a:ln>
+          <a:effectLst/>
+        </p:spPr>
+        <p:style>
+          <a:lnRef idx="1">
+            <a:schemeClr val="accent1"/>
+          </a:lnRef>
+          <a:fillRef idx="3">
+            <a:schemeClr val="accent1"/>
+          </a:fillRef>
+          <a:effectRef idx="2">
+            <a:schemeClr val="accent1"/>
+          </a:effectRef>
+          <a:fontRef idx="minor">
+            <a:schemeClr val="lt1"/>
+          </a:fontRef>
+        </p:style>
+        <p:txBody>
+          <a:bodyPr rtlCol="0" anchor="ctr"/>
+          <a:lstStyle/>
+          <a:p>
+            <a:pPr algn="ctr"/>
+          </a:p>
+        </p:txBody>
+      </p:sp>
+      <p:sp>
+        <p:nvSpPr>
+          <p:cNvPr id="3" name="Rectangle 2"/>
+          <p:cNvSpPr/>
+          <p:nvPr/>
+        </p:nvSpPr>
+        <p:spPr>
+          <a:xfrm>
+            <a:off x="0" y="0"/>
+            <a:ext cx="12191695" cy="146304"/>
+          </a:xfrm>
+          <a:prstGeom prst="rect">
+            <a:avLst/>
+          </a:prstGeom>
+          <a:solidFill>
+            <a:srgbClr val="F5A623"/>
+          </a:solidFill>
+          <a:ln>
+            <a:noFill/>
+          </a:ln>
+          <a:effectLst/>
+        </p:spPr>
+        <p:style>
+          <a:lnRef idx="1">
+            <a:schemeClr val="accent1"/>
+          </a:lnRef>
+          <a:fillRef idx="3">
+            <a:schemeClr val="accent1"/>
+          </a:fillRef>
+          <a:effectRef idx="2">
+            <a:schemeClr val="accent1"/>
+          </a:effectRef>
+          <a:fontRef idx="minor">
+            <a:schemeClr val="lt1"/>
+          </a:fontRef>
+        </p:style>
+        <p:txBody>
+          <a:bodyPr rtlCol="0" anchor="ctr"/>
+          <a:lstStyle/>
+          <a:p>
+            <a:pPr algn="ctr"/>
+          </a:p>
+        </p:txBody>
+      </p:sp>
+      <p:sp>
+        <p:nvSpPr>
+          <p:cNvPr id="4" name="TextBox 3"/>
+          <p:cNvSpPr txBox="1"/>
+          <p:nvPr/>
+        </p:nvSpPr>
+        <p:spPr>
+          <a:xfrm>
+            <a:off x="502920" y="310896"/>
+            <a:ext cx="11155680" cy="365760"/>
+          </a:xfrm>
+          <a:prstGeom prst="rect">
+            <a:avLst/>
+          </a:prstGeom>
+          <a:noFill/>
+        </p:spPr>
+        <p:txBody>
+          <a:bodyPr wrap="square" anchor="t" lIns="45720" rIns="45720" tIns="18288" bIns="18288">
+            <a:spAutoFit/>
+          </a:bodyPr>
+          <a:lstStyle/>
+          <a:p>
+            <a:pPr algn="l">
+              <a:lnSpc>
+                <a:spcPct val="100000"/>
+              </a:lnSpc>
+              <a:spcBef>
+                <a:spcPts val="0"/>
+              </a:spcBef>
+              <a:spcAft>
+                <a:spcPts val="400"/>
+              </a:spcAft>
+            </a:pPr>
+            <a:r>
+              <a:rPr sz="1300" b="1">
+                <a:solidFill>
+                  <a:srgbClr val="0D7377"/>
+                </a:solidFill>
+                <a:latin typeface="Segoe UI"/>
+              </a:rPr>
+              <a:t>BUSINESS MODEL CANVAS</a:t>
+            </a:r>
+          </a:p>
+        </p:txBody>
+      </p:sp>
+      <p:sp>
+        <p:nvSpPr>
+          <p:cNvPr id="5" name="TextBox 4"/>
+          <p:cNvSpPr txBox="1"/>
+          <p:nvPr/>
+        </p:nvSpPr>
+        <p:spPr>
+          <a:xfrm>
+            <a:off x="502920" y="566928"/>
+            <a:ext cx="11155680" cy="914400"/>
+          </a:xfrm>
+          <a:prstGeom prst="rect">
+            <a:avLst/>
+          </a:prstGeom>
+          <a:noFill/>
+        </p:spPr>
+        <p:txBody>
+          <a:bodyPr wrap="square" anchor="t" lIns="45720" rIns="45720" tIns="18288" bIns="18288">
+            <a:spAutoFit/>
+          </a:bodyPr>
+          <a:lstStyle/>
+          <a:p>
+            <a:pPr algn="l">
+              <a:lnSpc>
+                <a:spcPct val="100000"/>
+              </a:lnSpc>
+              <a:spcBef>
+                <a:spcPts val="0"/>
+              </a:spcBef>
+              <a:spcAft>
+                <a:spcPts val="400"/>
+              </a:spcAft>
+            </a:pPr>
+            <a:r>
+              <a:rPr sz="3000" b="1">
+                <a:solidFill>
+                  <a:srgbClr val="0F3460"/>
+                </a:solidFill>
+                <a:latin typeface="Segoe UI"/>
+              </a:rPr>
+              <a:t>The full picture on one page</a:t>
+            </a:r>
+          </a:p>
+        </p:txBody>
+      </p:sp>
+      <p:sp>
+        <p:nvSpPr>
+          <p:cNvPr id="6" name="Rectangle 5"/>
+          <p:cNvSpPr/>
+          <p:nvPr/>
+        </p:nvSpPr>
+        <p:spPr>
+          <a:xfrm>
+            <a:off x="502920" y="1554480"/>
+            <a:ext cx="2176272" cy="3154680"/>
+          </a:xfrm>
+          <a:prstGeom prst="rect">
+            <a:avLst/>
+          </a:prstGeom>
+          <a:solidFill>
+            <a:srgbClr val="FFFFFF"/>
+          </a:solidFill>
+          <a:ln w="12700">
+            <a:solidFill>
+              <a:srgbClr val="E2EAF4"/>
+            </a:solidFill>
+          </a:ln>
+          <a:effectLst/>
+        </p:spPr>
+        <p:style>
+          <a:lnRef idx="1">
+            <a:schemeClr val="accent1"/>
+          </a:lnRef>
+          <a:fillRef idx="3">
+            <a:schemeClr val="accent1"/>
+          </a:fillRef>
+          <a:effectRef idx="2">
+            <a:schemeClr val="accent1"/>
+          </a:effectRef>
+          <a:fontRef idx="minor">
+            <a:schemeClr val="lt1"/>
+          </a:fontRef>
+        </p:style>
+        <p:txBody>
+          <a:bodyPr rtlCol="0" anchor="ctr"/>
+          <a:lstStyle/>
+          <a:p>
+            <a:pPr algn="ctr"/>
+          </a:p>
+        </p:txBody>
+      </p:sp>
+      <p:sp>
+        <p:nvSpPr>
+          <p:cNvPr id="7" name="Rectangle 6"/>
+          <p:cNvSpPr/>
+          <p:nvPr/>
+        </p:nvSpPr>
+        <p:spPr>
+          <a:xfrm>
+            <a:off x="502920" y="1554480"/>
+            <a:ext cx="64008" cy="3154680"/>
+          </a:xfrm>
+          <a:prstGeom prst="rect">
+            <a:avLst/>
+          </a:prstGeom>
+          <a:solidFill>
+            <a:srgbClr val="1A5490"/>
+          </a:solidFill>
+          <a:ln>
+            <a:noFill/>
+          </a:ln>
+          <a:effectLst/>
+        </p:spPr>
+        <p:style>
+          <a:lnRef idx="1">
+            <a:schemeClr val="accent1"/>
+          </a:lnRef>
+          <a:fillRef idx="3">
+            <a:schemeClr val="accent1"/>
+          </a:fillRef>
+          <a:effectRef idx="2">
+            <a:schemeClr val="accent1"/>
+          </a:effectRef>
+          <a:fontRef idx="minor">
+            <a:schemeClr val="lt1"/>
+          </a:fontRef>
+        </p:style>
+        <p:txBody>
+          <a:bodyPr rtlCol="0" anchor="ctr"/>
+          <a:lstStyle/>
+          <a:p>
+            <a:pPr algn="ctr"/>
+          </a:p>
+        </p:txBody>
+      </p:sp>
+      <p:sp>
+        <p:nvSpPr>
+          <p:cNvPr id="8" name="TextBox 7"/>
+          <p:cNvSpPr txBox="1"/>
+          <p:nvPr/>
+        </p:nvSpPr>
+        <p:spPr>
+          <a:xfrm>
+            <a:off x="649224" y="1627632"/>
+            <a:ext cx="1975103" cy="292608"/>
+          </a:xfrm>
+          <a:prstGeom prst="rect">
+            <a:avLst/>
+          </a:prstGeom>
+          <a:noFill/>
+        </p:spPr>
+        <p:txBody>
+          <a:bodyPr wrap="square" anchor="t" lIns="45720" rIns="45720" tIns="18288" bIns="18288">
+            <a:spAutoFit/>
+          </a:bodyPr>
+          <a:lstStyle/>
+          <a:p>
+            <a:pPr algn="l">
+              <a:lnSpc>
+                <a:spcPct val="100000"/>
+              </a:lnSpc>
+              <a:spcBef>
+                <a:spcPts val="0"/>
+              </a:spcBef>
+              <a:spcAft>
+                <a:spcPts val="400"/>
+              </a:spcAft>
+            </a:pPr>
+            <a:r>
+              <a:rPr sz="1050" b="1">
+                <a:solidFill>
+                  <a:srgbClr val="0F3460"/>
+                </a:solidFill>
+                <a:latin typeface="Segoe UI"/>
+              </a:rPr>
+              <a:t>KEY PARTNERS</a:t>
+            </a:r>
+          </a:p>
+        </p:txBody>
+      </p:sp>
+      <p:sp>
+        <p:nvSpPr>
+          <p:cNvPr id="9" name="TextBox 8"/>
+          <p:cNvSpPr txBox="1"/>
+          <p:nvPr/>
+        </p:nvSpPr>
+        <p:spPr>
+          <a:xfrm>
+            <a:off x="649224" y="1938528"/>
+            <a:ext cx="1938528" cy="2734056"/>
+          </a:xfrm>
+          <a:prstGeom prst="rect">
+            <a:avLst/>
+          </a:prstGeom>
+          <a:noFill/>
+        </p:spPr>
+        <p:txBody>
+          <a:bodyPr wrap="square" anchor="t" lIns="45720" rIns="45720" tIns="18288" bIns="18288">
+            <a:spAutoFit/>
+          </a:bodyPr>
+          <a:lstStyle/>
+          <a:p>
+            <a:pPr algn="l">
+              <a:lnSpc>
+                <a:spcPct val="100000"/>
+              </a:lnSpc>
+              <a:spcBef>
+                <a:spcPts val="0"/>
+              </a:spcBef>
+              <a:spcAft>
+                <a:spcPts val="200"/>
+              </a:spcAft>
+            </a:pPr>
+            <a:r>
+              <a:rPr sz="930" b="0">
+                <a:solidFill>
+                  <a:srgbClr val="1A2540"/>
+                </a:solidFill>
+                <a:latin typeface="Segoe UI"/>
+              </a:rPr>
+              <a:t>•  Universities (ADU etc.)</a:t>
+            </a:r>
+          </a:p>
+          <a:p>
+            <a:pPr algn="l">
+              <a:lnSpc>
+                <a:spcPct val="100000"/>
+              </a:lnSpc>
+              <a:spcBef>
+                <a:spcPts val="0"/>
+              </a:spcBef>
+              <a:spcAft>
+                <a:spcPts val="200"/>
+              </a:spcAft>
+            </a:pPr>
+            <a:r>
+              <a:rPr sz="930" b="0">
+                <a:solidFill>
+                  <a:srgbClr val="1A2540"/>
+                </a:solidFill>
+                <a:latin typeface="Segoe UI"/>
+              </a:rPr>
+              <a:t>•  LMS providers (Blackboard)</a:t>
+            </a:r>
+          </a:p>
+          <a:p>
+            <a:pPr algn="l">
+              <a:lnSpc>
+                <a:spcPct val="100000"/>
+              </a:lnSpc>
+              <a:spcBef>
+                <a:spcPts val="0"/>
+              </a:spcBef>
+              <a:spcAft>
+                <a:spcPts val="200"/>
+              </a:spcAft>
+            </a:pPr>
+            <a:r>
+              <a:rPr sz="930" b="0">
+                <a:solidFill>
+                  <a:srgbClr val="1A2540"/>
+                </a:solidFill>
+                <a:latin typeface="Segoe UI"/>
+              </a:rPr>
+              <a:t>•  Cloud / IT infrastructure</a:t>
+            </a:r>
+          </a:p>
+        </p:txBody>
+      </p:sp>
+      <p:sp>
+        <p:nvSpPr>
+          <p:cNvPr id="10" name="Rectangle 9"/>
+          <p:cNvSpPr/>
+          <p:nvPr/>
+        </p:nvSpPr>
+        <p:spPr>
+          <a:xfrm>
+            <a:off x="2743200" y="1554480"/>
+            <a:ext cx="2176272" cy="1531620"/>
+          </a:xfrm>
+          <a:prstGeom prst="rect">
+            <a:avLst/>
+          </a:prstGeom>
+          <a:solidFill>
+            <a:srgbClr val="FFFFFF"/>
+          </a:solidFill>
+          <a:ln w="12700">
+            <a:solidFill>
+              <a:srgbClr val="E2EAF4"/>
+            </a:solidFill>
+          </a:ln>
+          <a:effectLst/>
+        </p:spPr>
+        <p:style>
+          <a:lnRef idx="1">
+            <a:schemeClr val="accent1"/>
+          </a:lnRef>
+          <a:fillRef idx="3">
+            <a:schemeClr val="accent1"/>
+          </a:fillRef>
+          <a:effectRef idx="2">
+            <a:schemeClr val="accent1"/>
+          </a:effectRef>
+          <a:fontRef idx="minor">
+            <a:schemeClr val="lt1"/>
+          </a:fontRef>
+        </p:style>
+        <p:txBody>
+          <a:bodyPr rtlCol="0" anchor="ctr"/>
+          <a:lstStyle/>
+          <a:p>
+            <a:pPr algn="ctr"/>
+          </a:p>
+        </p:txBody>
+      </p:sp>
+      <p:sp>
+        <p:nvSpPr>
+          <p:cNvPr id="11" name="Rectangle 10"/>
+          <p:cNvSpPr/>
+          <p:nvPr/>
+        </p:nvSpPr>
+        <p:spPr>
+          <a:xfrm>
+            <a:off x="2743200" y="1554480"/>
+            <a:ext cx="64008" cy="1531620"/>
+          </a:xfrm>
+          <a:prstGeom prst="rect">
+            <a:avLst/>
+          </a:prstGeom>
+          <a:solidFill>
+            <a:srgbClr val="0D7377"/>
+          </a:solidFill>
+          <a:ln>
+            <a:noFill/>
+          </a:ln>
+          <a:effectLst/>
+        </p:spPr>
+        <p:style>
+          <a:lnRef idx="1">
+            <a:schemeClr val="accent1"/>
+          </a:lnRef>
+          <a:fillRef idx="3">
+            <a:schemeClr val="accent1"/>
+          </a:fillRef>
+          <a:effectRef idx="2">
+            <a:schemeClr val="accent1"/>
+          </a:effectRef>
+          <a:fontRef idx="minor">
+            <a:schemeClr val="lt1"/>
+          </a:fontRef>
+        </p:style>
+        <p:txBody>
+          <a:bodyPr rtlCol="0" anchor="ctr"/>
+          <a:lstStyle/>
+          <a:p>
+            <a:pPr algn="ctr"/>
+          </a:p>
+        </p:txBody>
+      </p:sp>
+      <p:sp>
+        <p:nvSpPr>
+          <p:cNvPr id="12" name="TextBox 11"/>
+          <p:cNvSpPr txBox="1"/>
+          <p:nvPr/>
+        </p:nvSpPr>
+        <p:spPr>
+          <a:xfrm>
+            <a:off x="2889504" y="1627632"/>
+            <a:ext cx="1975103" cy="292608"/>
+          </a:xfrm>
+          <a:prstGeom prst="rect">
+            <a:avLst/>
+          </a:prstGeom>
+          <a:noFill/>
+        </p:spPr>
+        <p:txBody>
+          <a:bodyPr wrap="square" anchor="t" lIns="45720" rIns="45720" tIns="18288" bIns="18288">
+            <a:spAutoFit/>
+          </a:bodyPr>
+          <a:lstStyle/>
+          <a:p>
+            <a:pPr algn="l">
+              <a:lnSpc>
+                <a:spcPct val="100000"/>
+              </a:lnSpc>
+              <a:spcBef>
+                <a:spcPts val="0"/>
+              </a:spcBef>
+              <a:spcAft>
+                <a:spcPts val="400"/>
+              </a:spcAft>
+            </a:pPr>
+            <a:r>
+              <a:rPr sz="1050" b="1">
+                <a:solidFill>
+                  <a:srgbClr val="0F3460"/>
+                </a:solidFill>
+                <a:latin typeface="Segoe UI"/>
+              </a:rPr>
+              <a:t>KEY ACTIVITIES</a:t>
+            </a:r>
+          </a:p>
+        </p:txBody>
+      </p:sp>
+      <p:sp>
+        <p:nvSpPr>
+          <p:cNvPr id="13" name="TextBox 12"/>
+          <p:cNvSpPr txBox="1"/>
+          <p:nvPr/>
+        </p:nvSpPr>
+        <p:spPr>
+          <a:xfrm>
+            <a:off x="2889504" y="1938528"/>
+            <a:ext cx="1938528" cy="1110996"/>
+          </a:xfrm>
+          <a:prstGeom prst="rect">
+            <a:avLst/>
+          </a:prstGeom>
+          <a:noFill/>
+        </p:spPr>
+        <p:txBody>
+          <a:bodyPr wrap="square" anchor="t" lIns="45720" rIns="45720" tIns="18288" bIns="18288">
+            <a:spAutoFit/>
+          </a:bodyPr>
+          <a:lstStyle/>
+          <a:p>
+            <a:pPr algn="l">
+              <a:lnSpc>
+                <a:spcPct val="100000"/>
+              </a:lnSpc>
+              <a:spcBef>
+                <a:spcPts val="0"/>
+              </a:spcBef>
+              <a:spcAft>
+                <a:spcPts val="200"/>
+              </a:spcAft>
+            </a:pPr>
+            <a:r>
+              <a:rPr sz="930" b="0">
+                <a:solidFill>
+                  <a:srgbClr val="1A2540"/>
+                </a:solidFill>
+                <a:latin typeface="Segoe UI"/>
+              </a:rPr>
+              <a:t>•  Platform dev &amp; maintenance</a:t>
+            </a:r>
+          </a:p>
+          <a:p>
+            <a:pPr algn="l">
+              <a:lnSpc>
+                <a:spcPct val="100000"/>
+              </a:lnSpc>
+              <a:spcBef>
+                <a:spcPts val="0"/>
+              </a:spcBef>
+              <a:spcAft>
+                <a:spcPts val="200"/>
+              </a:spcAft>
+            </a:pPr>
+            <a:r>
+              <a:rPr sz="930" b="0">
+                <a:solidFill>
+                  <a:srgbClr val="1A2540"/>
+                </a:solidFill>
+                <a:latin typeface="Segoe UI"/>
+              </a:rPr>
+              <a:t>•  LMS integration</a:t>
+            </a:r>
+          </a:p>
+          <a:p>
+            <a:pPr algn="l">
+              <a:lnSpc>
+                <a:spcPct val="100000"/>
+              </a:lnSpc>
+              <a:spcBef>
+                <a:spcPts val="0"/>
+              </a:spcBef>
+              <a:spcAft>
+                <a:spcPts val="200"/>
+              </a:spcAft>
+            </a:pPr>
+            <a:r>
+              <a:rPr sz="930" b="0">
+                <a:solidFill>
+                  <a:srgbClr val="1A2540"/>
+                </a:solidFill>
+                <a:latin typeface="Segoe UI"/>
+              </a:rPr>
+              <a:t>•  Student onboarding</a:t>
+            </a:r>
+          </a:p>
+        </p:txBody>
+      </p:sp>
+      <p:sp>
+        <p:nvSpPr>
+          <p:cNvPr id="14" name="Rectangle 13"/>
+          <p:cNvSpPr/>
+          <p:nvPr/>
+        </p:nvSpPr>
+        <p:spPr>
+          <a:xfrm>
+            <a:off x="2743200" y="3177539"/>
+            <a:ext cx="2176272" cy="1531620"/>
+          </a:xfrm>
+          <a:prstGeom prst="rect">
+            <a:avLst/>
+          </a:prstGeom>
+          <a:solidFill>
+            <a:srgbClr val="FFFFFF"/>
+          </a:solidFill>
+          <a:ln w="12700">
+            <a:solidFill>
+              <a:srgbClr val="E2EAF4"/>
+            </a:solidFill>
+          </a:ln>
+          <a:effectLst/>
+        </p:spPr>
+        <p:style>
+          <a:lnRef idx="1">
+            <a:schemeClr val="accent1"/>
+          </a:lnRef>
+          <a:fillRef idx="3">
+            <a:schemeClr val="accent1"/>
+          </a:fillRef>
+          <a:effectRef idx="2">
+            <a:schemeClr val="accent1"/>
+          </a:effectRef>
+          <a:fontRef idx="minor">
+            <a:schemeClr val="lt1"/>
+          </a:fontRef>
+        </p:style>
+        <p:txBody>
+          <a:bodyPr rtlCol="0" anchor="ctr"/>
+          <a:lstStyle/>
+          <a:p>
+            <a:pPr algn="ctr"/>
+          </a:p>
+        </p:txBody>
+      </p:sp>
+      <p:sp>
+        <p:nvSpPr>
+          <p:cNvPr id="15" name="Rectangle 14"/>
+          <p:cNvSpPr/>
+          <p:nvPr/>
+        </p:nvSpPr>
+        <p:spPr>
+          <a:xfrm>
+            <a:off x="2743200" y="3177539"/>
+            <a:ext cx="64008" cy="1531620"/>
+          </a:xfrm>
+          <a:prstGeom prst="rect">
+            <a:avLst/>
+          </a:prstGeom>
+          <a:solidFill>
+            <a:srgbClr val="0D7377"/>
+          </a:solidFill>
+          <a:ln>
+            <a:noFill/>
+          </a:ln>
+          <a:effectLst/>
+        </p:spPr>
+        <p:style>
+          <a:lnRef idx="1">
+            <a:schemeClr val="accent1"/>
+          </a:lnRef>
+          <a:fillRef idx="3">
+            <a:schemeClr val="accent1"/>
+          </a:fillRef>
+          <a:effectRef idx="2">
+            <a:schemeClr val="accent1"/>
+          </a:effectRef>
+          <a:fontRef idx="minor">
+            <a:schemeClr val="lt1"/>
+          </a:fontRef>
+        </p:style>
+        <p:txBody>
+          <a:bodyPr rtlCol="0" anchor="ctr"/>
+          <a:lstStyle/>
+          <a:p>
+            <a:pPr algn="ctr"/>
+          </a:p>
+        </p:txBody>
+      </p:sp>
+      <p:sp>
+        <p:nvSpPr>
+          <p:cNvPr id="16" name="TextBox 15"/>
+          <p:cNvSpPr txBox="1"/>
+          <p:nvPr/>
+        </p:nvSpPr>
+        <p:spPr>
+          <a:xfrm>
+            <a:off x="2889504" y="3250691"/>
+            <a:ext cx="1975103" cy="292608"/>
+          </a:xfrm>
+          <a:prstGeom prst="rect">
+            <a:avLst/>
+          </a:prstGeom>
+          <a:noFill/>
+        </p:spPr>
+        <p:txBody>
+          <a:bodyPr wrap="square" anchor="t" lIns="45720" rIns="45720" tIns="18288" bIns="18288">
+            <a:spAutoFit/>
+          </a:bodyPr>
+          <a:lstStyle/>
+          <a:p>
+            <a:pPr algn="l">
+              <a:lnSpc>
+                <a:spcPct val="100000"/>
+              </a:lnSpc>
+              <a:spcBef>
+                <a:spcPts val="0"/>
+              </a:spcBef>
+              <a:spcAft>
+                <a:spcPts val="400"/>
+              </a:spcAft>
+            </a:pPr>
+            <a:r>
+              <a:rPr sz="1050" b="1">
+                <a:solidFill>
+                  <a:srgbClr val="0F3460"/>
+                </a:solidFill>
+                <a:latin typeface="Segoe UI"/>
+              </a:rPr>
+              <a:t>KEY RESOURCES</a:t>
+            </a:r>
+          </a:p>
+        </p:txBody>
+      </p:sp>
+      <p:sp>
+        <p:nvSpPr>
+          <p:cNvPr id="17" name="TextBox 16"/>
+          <p:cNvSpPr txBox="1"/>
+          <p:nvPr/>
+        </p:nvSpPr>
+        <p:spPr>
+          <a:xfrm>
+            <a:off x="2889504" y="3561587"/>
+            <a:ext cx="1938528" cy="1110996"/>
+          </a:xfrm>
+          <a:prstGeom prst="rect">
+            <a:avLst/>
+          </a:prstGeom>
+          <a:noFill/>
+        </p:spPr>
+        <p:txBody>
+          <a:bodyPr wrap="square" anchor="t" lIns="45720" rIns="45720" tIns="18288" bIns="18288">
+            <a:spAutoFit/>
+          </a:bodyPr>
+          <a:lstStyle/>
+          <a:p>
+            <a:pPr algn="l">
+              <a:lnSpc>
+                <a:spcPct val="100000"/>
+              </a:lnSpc>
+              <a:spcBef>
+                <a:spcPts val="0"/>
+              </a:spcBef>
+              <a:spcAft>
+                <a:spcPts val="200"/>
+              </a:spcAft>
+            </a:pPr>
+            <a:r>
+              <a:rPr sz="930" b="0">
+                <a:solidFill>
+                  <a:srgbClr val="1A2540"/>
+                </a:solidFill>
+                <a:latin typeface="Segoe UI"/>
+              </a:rPr>
+              <a:t>•  Engineering team</a:t>
+            </a:r>
+          </a:p>
+          <a:p>
+            <a:pPr algn="l">
+              <a:lnSpc>
+                <a:spcPct val="100000"/>
+              </a:lnSpc>
+              <a:spcBef>
+                <a:spcPts val="0"/>
+              </a:spcBef>
+              <a:spcAft>
+                <a:spcPts val="200"/>
+              </a:spcAft>
+            </a:pPr>
+            <a:r>
+              <a:rPr sz="930" b="0">
+                <a:solidFill>
+                  <a:srgbClr val="1A2540"/>
+                </a:solidFill>
+                <a:latin typeface="Segoe UI"/>
+              </a:rPr>
+              <a:t>•  Verified-focus technology</a:t>
+            </a:r>
+          </a:p>
+          <a:p>
+            <a:pPr algn="l">
+              <a:lnSpc>
+                <a:spcPct val="100000"/>
+              </a:lnSpc>
+              <a:spcBef>
+                <a:spcPts val="0"/>
+              </a:spcBef>
+              <a:spcAft>
+                <a:spcPts val="200"/>
+              </a:spcAft>
+            </a:pPr>
+            <a:r>
+              <a:rPr sz="930" b="0">
+                <a:solidFill>
+                  <a:srgbClr val="1A2540"/>
+                </a:solidFill>
+                <a:latin typeface="Segoe UI"/>
+              </a:rPr>
+              <a:t>•  Student community &amp; data</a:t>
+            </a:r>
+          </a:p>
+        </p:txBody>
+      </p:sp>
+      <p:sp>
+        <p:nvSpPr>
+          <p:cNvPr id="18" name="Rectangle 17"/>
+          <p:cNvSpPr/>
+          <p:nvPr/>
+        </p:nvSpPr>
+        <p:spPr>
+          <a:xfrm>
+            <a:off x="4983480" y="1554480"/>
+            <a:ext cx="2176272" cy="3154680"/>
+          </a:xfrm>
+          <a:prstGeom prst="rect">
+            <a:avLst/>
+          </a:prstGeom>
+          <a:solidFill>
+            <a:srgbClr val="FFFFFF"/>
+          </a:solidFill>
+          <a:ln w="12700">
+            <a:solidFill>
+              <a:srgbClr val="E2EAF4"/>
+            </a:solidFill>
+          </a:ln>
+          <a:effectLst/>
+        </p:spPr>
+        <p:style>
+          <a:lnRef idx="1">
+            <a:schemeClr val="accent1"/>
+          </a:lnRef>
+          <a:fillRef idx="3">
+            <a:schemeClr val="accent1"/>
+          </a:fillRef>
+          <a:effectRef idx="2">
+            <a:schemeClr val="accent1"/>
+          </a:effectRef>
+          <a:fontRef idx="minor">
+            <a:schemeClr val="lt1"/>
+          </a:fontRef>
+        </p:style>
+        <p:txBody>
+          <a:bodyPr rtlCol="0" anchor="ctr"/>
+          <a:lstStyle/>
+          <a:p>
+            <a:pPr algn="ctr"/>
+          </a:p>
+        </p:txBody>
+      </p:sp>
+      <p:sp>
+        <p:nvSpPr>
+          <p:cNvPr id="19" name="Rectangle 18"/>
+          <p:cNvSpPr/>
+          <p:nvPr/>
+        </p:nvSpPr>
+        <p:spPr>
+          <a:xfrm>
+            <a:off x="4983480" y="1554480"/>
+            <a:ext cx="64008" cy="3154680"/>
+          </a:xfrm>
+          <a:prstGeom prst="rect">
+            <a:avLst/>
+          </a:prstGeom>
+          <a:solidFill>
+            <a:srgbClr val="F5A623"/>
+          </a:solidFill>
+          <a:ln>
+            <a:noFill/>
+          </a:ln>
+          <a:effectLst/>
+        </p:spPr>
+        <p:style>
+          <a:lnRef idx="1">
+            <a:schemeClr val="accent1"/>
+          </a:lnRef>
+          <a:fillRef idx="3">
+            <a:schemeClr val="accent1"/>
+          </a:fillRef>
+          <a:effectRef idx="2">
+            <a:schemeClr val="accent1"/>
+          </a:effectRef>
+          <a:fontRef idx="minor">
+            <a:schemeClr val="lt1"/>
+          </a:fontRef>
+        </p:style>
+        <p:txBody>
+          <a:bodyPr rtlCol="0" anchor="ctr"/>
+          <a:lstStyle/>
+          <a:p>
+            <a:pPr algn="ctr"/>
+          </a:p>
+        </p:txBody>
+      </p:sp>
+      <p:sp>
+        <p:nvSpPr>
+          <p:cNvPr id="20" name="TextBox 19"/>
+          <p:cNvSpPr txBox="1"/>
+          <p:nvPr/>
+        </p:nvSpPr>
+        <p:spPr>
+          <a:xfrm>
+            <a:off x="5129784" y="1627632"/>
+            <a:ext cx="1975103" cy="292608"/>
+          </a:xfrm>
+          <a:prstGeom prst="rect">
+            <a:avLst/>
+          </a:prstGeom>
+          <a:noFill/>
+        </p:spPr>
+        <p:txBody>
+          <a:bodyPr wrap="square" anchor="t" lIns="45720" rIns="45720" tIns="18288" bIns="18288">
+            <a:spAutoFit/>
+          </a:bodyPr>
+          <a:lstStyle/>
+          <a:p>
+            <a:pPr algn="l">
+              <a:lnSpc>
+                <a:spcPct val="100000"/>
+              </a:lnSpc>
+              <a:spcBef>
+                <a:spcPts val="0"/>
+              </a:spcBef>
+              <a:spcAft>
+                <a:spcPts val="400"/>
+              </a:spcAft>
+            </a:pPr>
+            <a:r>
+              <a:rPr sz="1050" b="1">
+                <a:solidFill>
+                  <a:srgbClr val="0F3460"/>
+                </a:solidFill>
+                <a:latin typeface="Segoe UI"/>
+              </a:rPr>
+              <a:t>VALUE PROPOSITIONS</a:t>
+            </a:r>
+          </a:p>
+        </p:txBody>
+      </p:sp>
+      <p:sp>
+        <p:nvSpPr>
+          <p:cNvPr id="21" name="TextBox 20"/>
+          <p:cNvSpPr txBox="1"/>
+          <p:nvPr/>
+        </p:nvSpPr>
+        <p:spPr>
+          <a:xfrm>
+            <a:off x="5129784" y="1938528"/>
+            <a:ext cx="1938528" cy="2734056"/>
+          </a:xfrm>
+          <a:prstGeom prst="rect">
+            <a:avLst/>
+          </a:prstGeom>
+          <a:noFill/>
+        </p:spPr>
+        <p:txBody>
+          <a:bodyPr wrap="square" anchor="t" lIns="45720" rIns="45720" tIns="18288" bIns="18288">
+            <a:spAutoFit/>
+          </a:bodyPr>
+          <a:lstStyle/>
+          <a:p>
+            <a:pPr algn="l">
+              <a:lnSpc>
+                <a:spcPct val="100000"/>
+              </a:lnSpc>
+              <a:spcBef>
+                <a:spcPts val="0"/>
+              </a:spcBef>
+              <a:spcAft>
+                <a:spcPts val="200"/>
+              </a:spcAft>
+            </a:pPr>
+            <a:r>
+              <a:rPr sz="930" b="0">
+                <a:solidFill>
+                  <a:srgbClr val="1A2540"/>
+                </a:solidFill>
+                <a:latin typeface="Segoe UI"/>
+              </a:rPr>
+              <a:t>•  Verified effort → real grade bonuses</a:t>
+            </a:r>
+          </a:p>
+          <a:p>
+            <a:pPr algn="l">
+              <a:lnSpc>
+                <a:spcPct val="100000"/>
+              </a:lnSpc>
+              <a:spcBef>
+                <a:spcPts val="0"/>
+              </a:spcBef>
+              <a:spcAft>
+                <a:spcPts val="200"/>
+              </a:spcAft>
+            </a:pPr>
+            <a:r>
+              <a:rPr sz="930" b="0">
+                <a:solidFill>
+                  <a:srgbClr val="1A2540"/>
+                </a:solidFill>
+                <a:latin typeface="Segoe UI"/>
+              </a:rPr>
+              <a:t>•  One zero-maintenance deadline view</a:t>
+            </a:r>
+          </a:p>
+          <a:p>
+            <a:pPr algn="l">
+              <a:lnSpc>
+                <a:spcPct val="100000"/>
+              </a:lnSpc>
+              <a:spcBef>
+                <a:spcPts val="0"/>
+              </a:spcBef>
+              <a:spcAft>
+                <a:spcPts val="200"/>
+              </a:spcAft>
+            </a:pPr>
+            <a:r>
+              <a:rPr sz="930" b="0">
+                <a:solidFill>
+                  <a:srgbClr val="1A2540"/>
+                </a:solidFill>
+                <a:latin typeface="Segoe UI"/>
+              </a:rPr>
+              <a:t>•  Competition that builds study habit</a:t>
+            </a:r>
+          </a:p>
+        </p:txBody>
+      </p:sp>
+      <p:sp>
+        <p:nvSpPr>
+          <p:cNvPr id="22" name="Rectangle 21"/>
+          <p:cNvSpPr/>
+          <p:nvPr/>
+        </p:nvSpPr>
+        <p:spPr>
+          <a:xfrm>
+            <a:off x="7223760" y="1554480"/>
+            <a:ext cx="2176272" cy="1531620"/>
+          </a:xfrm>
+          <a:prstGeom prst="rect">
+            <a:avLst/>
+          </a:prstGeom>
+          <a:solidFill>
+            <a:srgbClr val="FFFFFF"/>
+          </a:solidFill>
+          <a:ln w="12700">
+            <a:solidFill>
+              <a:srgbClr val="E2EAF4"/>
+            </a:solidFill>
+          </a:ln>
+          <a:effectLst/>
+        </p:spPr>
+        <p:style>
+          <a:lnRef idx="1">
+            <a:schemeClr val="accent1"/>
+          </a:lnRef>
+          <a:fillRef idx="3">
+            <a:schemeClr val="accent1"/>
+          </a:fillRef>
+          <a:effectRef idx="2">
+            <a:schemeClr val="accent1"/>
+          </a:effectRef>
+          <a:fontRef idx="minor">
+            <a:schemeClr val="lt1"/>
+          </a:fontRef>
+        </p:style>
+        <p:txBody>
+          <a:bodyPr rtlCol="0" anchor="ctr"/>
+          <a:lstStyle/>
+          <a:p>
+            <a:pPr algn="ctr"/>
+          </a:p>
+        </p:txBody>
+      </p:sp>
+      <p:sp>
+        <p:nvSpPr>
+          <p:cNvPr id="23" name="Rectangle 22"/>
+          <p:cNvSpPr/>
+          <p:nvPr/>
+        </p:nvSpPr>
+        <p:spPr>
+          <a:xfrm>
+            <a:off x="7223760" y="1554480"/>
+            <a:ext cx="64008" cy="1531620"/>
+          </a:xfrm>
+          <a:prstGeom prst="rect">
+            <a:avLst/>
+          </a:prstGeom>
+          <a:solidFill>
+            <a:srgbClr val="0D7377"/>
+          </a:solidFill>
+          <a:ln>
+            <a:noFill/>
+          </a:ln>
+          <a:effectLst/>
+        </p:spPr>
+        <p:style>
+          <a:lnRef idx="1">
+            <a:schemeClr val="accent1"/>
+          </a:lnRef>
+          <a:fillRef idx="3">
+            <a:schemeClr val="accent1"/>
+          </a:fillRef>
+          <a:effectRef idx="2">
+            <a:schemeClr val="accent1"/>
+          </a:effectRef>
+          <a:fontRef idx="minor">
+            <a:schemeClr val="lt1"/>
+          </a:fontRef>
+        </p:style>
+        <p:txBody>
+          <a:bodyPr rtlCol="0" anchor="ctr"/>
+          <a:lstStyle/>
+          <a:p>
+            <a:pPr algn="ctr"/>
           </a:p>
         </p:txBody>
       </p:sp>
@@ -15889,8 +20586,8 @@
         </p:nvSpPr>
         <p:spPr>
           <a:xfrm>
-            <a:off x="7452360" y="4133088"/>
-            <a:ext cx="3840480" cy="457200"/>
+            <a:off x="7370064" y="1627632"/>
+            <a:ext cx="1975103" cy="292608"/>
           </a:xfrm>
           <a:prstGeom prst="rect">
             <a:avLst/>
@@ -15915,13 +20612,13 @@
               </a:spcAft>
             </a:pPr>
             <a:r>
-              <a:rPr sz="1800" b="1">
+              <a:rPr sz="1050" b="1">
                 <a:solidFill>
                   <a:srgbClr val="0F3460"/>
                 </a:solidFill>
                 <a:latin typeface="Segoe UI"/>
               </a:rPr>
-              <a:t>No one-size solution</a:t>
+              <a:t>CUSTOMER RELATIONSHIPS</a:t>
             </a:r>
           </a:p>
         </p:txBody>
@@ -15934,8 +20631,8 @@
         </p:nvSpPr>
         <p:spPr>
           <a:xfrm>
-            <a:off x="7452360" y="4681728"/>
-            <a:ext cx="3886200" cy="914400"/>
+            <a:off x="7370064" y="1938528"/>
+            <a:ext cx="1938528" cy="1110996"/>
           </a:xfrm>
           <a:prstGeom prst="rect">
             <a:avLst/>
@@ -15950,37 +20647,171 @@
           <a:p>
             <a:pPr algn="l">
               <a:lnSpc>
-                <a:spcPct val="108000"/>
-              </a:lnSpc>
-              <a:spcBef>
-                <a:spcPts val="0"/>
-              </a:spcBef>
-              <a:spcAft>
-                <a:spcPts val="400"/>
-              </a:spcAft>
-            </a:pPr>
-            <a:r>
-              <a:rPr sz="1350" b="0">
-                <a:solidFill>
-                  <a:srgbClr val="6B7F99"/>
-                </a:solidFill>
-                <a:latin typeface="Segoe UI"/>
-              </a:rPr>
-              <a:t>Commuters, ESL learners and club leaders all need adaptive, context-aware scheduling.</a:t>
-            </a:r>
-          </a:p>
-        </p:txBody>
-      </p:sp>
-      <p:sp>
-        <p:nvSpPr>
-          <p:cNvPr id="26" name="TextBox 25"/>
-          <p:cNvSpPr txBox="1"/>
-          <p:nvPr/>
-        </p:nvSpPr>
-        <p:spPr>
-          <a:xfrm>
-            <a:off x="502920" y="5943600"/>
-            <a:ext cx="10972800" cy="457200"/>
+                <a:spcPct val="100000"/>
+              </a:lnSpc>
+              <a:spcBef>
+                <a:spcPts val="0"/>
+              </a:spcBef>
+              <a:spcAft>
+                <a:spcPts val="200"/>
+              </a:spcAft>
+            </a:pPr>
+            <a:r>
+              <a:rPr sz="930" b="0">
+                <a:solidFill>
+                  <a:srgbClr val="1A2540"/>
+                </a:solidFill>
+                <a:latin typeface="Segoe UI"/>
+              </a:rPr>
+              <a:t>•  Self-serve app</a:t>
+            </a:r>
+          </a:p>
+          <a:p>
+            <a:pPr algn="l">
+              <a:lnSpc>
+                <a:spcPct val="100000"/>
+              </a:lnSpc>
+              <a:spcBef>
+                <a:spcPts val="0"/>
+              </a:spcBef>
+              <a:spcAft>
+                <a:spcPts val="200"/>
+              </a:spcAft>
+            </a:pPr>
+            <a:r>
+              <a:rPr sz="930" b="0">
+                <a:solidFill>
+                  <a:srgbClr val="1A2540"/>
+                </a:solidFill>
+                <a:latin typeface="Segoe UI"/>
+              </a:rPr>
+              <a:t>•  In-app support</a:t>
+            </a:r>
+          </a:p>
+          <a:p>
+            <a:pPr algn="l">
+              <a:lnSpc>
+                <a:spcPct val="100000"/>
+              </a:lnSpc>
+              <a:spcBef>
+                <a:spcPts val="0"/>
+              </a:spcBef>
+              <a:spcAft>
+                <a:spcPts val="200"/>
+              </a:spcAft>
+            </a:pPr>
+            <a:r>
+              <a:rPr sz="930" b="0">
+                <a:solidFill>
+                  <a:srgbClr val="1A2540"/>
+                </a:solidFill>
+                <a:latin typeface="Segoe UI"/>
+              </a:rPr>
+              <a:t>•  Community leaderboards</a:t>
+            </a:r>
+          </a:p>
+        </p:txBody>
+      </p:sp>
+      <p:sp>
+        <p:nvSpPr>
+          <p:cNvPr id="26" name="Rectangle 25"/>
+          <p:cNvSpPr/>
+          <p:nvPr/>
+        </p:nvSpPr>
+        <p:spPr>
+          <a:xfrm>
+            <a:off x="7223760" y="3177539"/>
+            <a:ext cx="2176272" cy="1531620"/>
+          </a:xfrm>
+          <a:prstGeom prst="rect">
+            <a:avLst/>
+          </a:prstGeom>
+          <a:solidFill>
+            <a:srgbClr val="FFFFFF"/>
+          </a:solidFill>
+          <a:ln w="12700">
+            <a:solidFill>
+              <a:srgbClr val="E2EAF4"/>
+            </a:solidFill>
+          </a:ln>
+          <a:effectLst/>
+        </p:spPr>
+        <p:style>
+          <a:lnRef idx="1">
+            <a:schemeClr val="accent1"/>
+          </a:lnRef>
+          <a:fillRef idx="3">
+            <a:schemeClr val="accent1"/>
+          </a:fillRef>
+          <a:effectRef idx="2">
+            <a:schemeClr val="accent1"/>
+          </a:effectRef>
+          <a:fontRef idx="minor">
+            <a:schemeClr val="lt1"/>
+          </a:fontRef>
+        </p:style>
+        <p:txBody>
+          <a:bodyPr rtlCol="0" anchor="ctr"/>
+          <a:lstStyle/>
+          <a:p>
+            <a:pPr algn="ctr"/>
+          </a:p>
+        </p:txBody>
+      </p:sp>
+      <p:sp>
+        <p:nvSpPr>
+          <p:cNvPr id="27" name="Rectangle 26"/>
+          <p:cNvSpPr/>
+          <p:nvPr/>
+        </p:nvSpPr>
+        <p:spPr>
+          <a:xfrm>
+            <a:off x="7223760" y="3177539"/>
+            <a:ext cx="64008" cy="1531620"/>
+          </a:xfrm>
+          <a:prstGeom prst="rect">
+            <a:avLst/>
+          </a:prstGeom>
+          <a:solidFill>
+            <a:srgbClr val="0D7377"/>
+          </a:solidFill>
+          <a:ln>
+            <a:noFill/>
+          </a:ln>
+          <a:effectLst/>
+        </p:spPr>
+        <p:style>
+          <a:lnRef idx="1">
+            <a:schemeClr val="accent1"/>
+          </a:lnRef>
+          <a:fillRef idx="3">
+            <a:schemeClr val="accent1"/>
+          </a:fillRef>
+          <a:effectRef idx="2">
+            <a:schemeClr val="accent1"/>
+          </a:effectRef>
+          <a:fontRef idx="minor">
+            <a:schemeClr val="lt1"/>
+          </a:fontRef>
+        </p:style>
+        <p:txBody>
+          <a:bodyPr rtlCol="0" anchor="ctr"/>
+          <a:lstStyle/>
+          <a:p>
+            <a:pPr algn="ctr"/>
+          </a:p>
+        </p:txBody>
+      </p:sp>
+      <p:sp>
+        <p:nvSpPr>
+          <p:cNvPr id="28" name="TextBox 27"/>
+          <p:cNvSpPr txBox="1"/>
+          <p:nvPr/>
+        </p:nvSpPr>
+        <p:spPr>
+          <a:xfrm>
+            <a:off x="7370064" y="3250691"/>
+            <a:ext cx="1975103" cy="292608"/>
           </a:xfrm>
           <a:prstGeom prst="rect">
             <a:avLst/>
@@ -16005,22 +20836,774 @@
               </a:spcAft>
             </a:pPr>
             <a:r>
-              <a:rPr sz="1500" b="1">
-                <a:solidFill>
-                  <a:srgbClr val="0D7377"/>
-                </a:solidFill>
-                <a:latin typeface="Segoe UI"/>
-              </a:rPr>
-              <a:t>These four insights converge on a single conviction → </a:t>
-            </a:r>
-            <a:r>
-              <a:rPr sz="1500" b="1">
+              <a:rPr sz="1050" b="1">
                 <a:solidFill>
                   <a:srgbClr val="0F3460"/>
                 </a:solidFill>
                 <a:latin typeface="Segoe UI"/>
               </a:rPr>
-              <a:t>our Golden Circle.</a:t>
+              <a:t>CHANNELS</a:t>
+            </a:r>
+          </a:p>
+        </p:txBody>
+      </p:sp>
+      <p:sp>
+        <p:nvSpPr>
+          <p:cNvPr id="29" name="TextBox 28"/>
+          <p:cNvSpPr txBox="1"/>
+          <p:nvPr/>
+        </p:nvSpPr>
+        <p:spPr>
+          <a:xfrm>
+            <a:off x="7370064" y="3561587"/>
+            <a:ext cx="1938528" cy="1110996"/>
+          </a:xfrm>
+          <a:prstGeom prst="rect">
+            <a:avLst/>
+          </a:prstGeom>
+          <a:noFill/>
+        </p:spPr>
+        <p:txBody>
+          <a:bodyPr wrap="square" anchor="t" lIns="45720" rIns="45720" tIns="18288" bIns="18288">
+            <a:spAutoFit/>
+          </a:bodyPr>
+          <a:lstStyle/>
+          <a:p>
+            <a:pPr algn="l">
+              <a:lnSpc>
+                <a:spcPct val="100000"/>
+              </a:lnSpc>
+              <a:spcBef>
+                <a:spcPts val="0"/>
+              </a:spcBef>
+              <a:spcAft>
+                <a:spcPts val="200"/>
+              </a:spcAft>
+            </a:pPr>
+            <a:r>
+              <a:rPr sz="930" b="0">
+                <a:solidFill>
+                  <a:srgbClr val="1A2540"/>
+                </a:solidFill>
+                <a:latin typeface="Segoe UI"/>
+              </a:rPr>
+              <a:t>•  University partnerships</a:t>
+            </a:r>
+          </a:p>
+          <a:p>
+            <a:pPr algn="l">
+              <a:lnSpc>
+                <a:spcPct val="100000"/>
+              </a:lnSpc>
+              <a:spcBef>
+                <a:spcPts val="0"/>
+              </a:spcBef>
+              <a:spcAft>
+                <a:spcPts val="200"/>
+              </a:spcAft>
+            </a:pPr>
+            <a:r>
+              <a:rPr sz="930" b="0">
+                <a:solidFill>
+                  <a:srgbClr val="1A2540"/>
+                </a:solidFill>
+                <a:latin typeface="Segoe UI"/>
+              </a:rPr>
+              <a:t>•  Web platform</a:t>
+            </a:r>
+          </a:p>
+          <a:p>
+            <a:pPr algn="l">
+              <a:lnSpc>
+                <a:spcPct val="100000"/>
+              </a:lnSpc>
+              <a:spcBef>
+                <a:spcPts val="0"/>
+              </a:spcBef>
+              <a:spcAft>
+                <a:spcPts val="200"/>
+              </a:spcAft>
+            </a:pPr>
+            <a:r>
+              <a:rPr sz="930" b="0">
+                <a:solidFill>
+                  <a:srgbClr val="1A2540"/>
+                </a:solidFill>
+                <a:latin typeface="Segoe UI"/>
+              </a:rPr>
+              <a:t>•  Social (TikTok / IG)</a:t>
+            </a:r>
+          </a:p>
+        </p:txBody>
+      </p:sp>
+      <p:sp>
+        <p:nvSpPr>
+          <p:cNvPr id="30" name="Rectangle 29"/>
+          <p:cNvSpPr/>
+          <p:nvPr/>
+        </p:nvSpPr>
+        <p:spPr>
+          <a:xfrm>
+            <a:off x="9464040" y="1554480"/>
+            <a:ext cx="2176272" cy="3154680"/>
+          </a:xfrm>
+          <a:prstGeom prst="rect">
+            <a:avLst/>
+          </a:prstGeom>
+          <a:solidFill>
+            <a:srgbClr val="FFFFFF"/>
+          </a:solidFill>
+          <a:ln w="12700">
+            <a:solidFill>
+              <a:srgbClr val="E2EAF4"/>
+            </a:solidFill>
+          </a:ln>
+          <a:effectLst/>
+        </p:spPr>
+        <p:style>
+          <a:lnRef idx="1">
+            <a:schemeClr val="accent1"/>
+          </a:lnRef>
+          <a:fillRef idx="3">
+            <a:schemeClr val="accent1"/>
+          </a:fillRef>
+          <a:effectRef idx="2">
+            <a:schemeClr val="accent1"/>
+          </a:effectRef>
+          <a:fontRef idx="minor">
+            <a:schemeClr val="lt1"/>
+          </a:fontRef>
+        </p:style>
+        <p:txBody>
+          <a:bodyPr rtlCol="0" anchor="ctr"/>
+          <a:lstStyle/>
+          <a:p>
+            <a:pPr algn="ctr"/>
+          </a:p>
+        </p:txBody>
+      </p:sp>
+      <p:sp>
+        <p:nvSpPr>
+          <p:cNvPr id="31" name="Rectangle 30"/>
+          <p:cNvSpPr/>
+          <p:nvPr/>
+        </p:nvSpPr>
+        <p:spPr>
+          <a:xfrm>
+            <a:off x="9464040" y="1554480"/>
+            <a:ext cx="64008" cy="3154680"/>
+          </a:xfrm>
+          <a:prstGeom prst="rect">
+            <a:avLst/>
+          </a:prstGeom>
+          <a:solidFill>
+            <a:srgbClr val="1A5490"/>
+          </a:solidFill>
+          <a:ln>
+            <a:noFill/>
+          </a:ln>
+          <a:effectLst/>
+        </p:spPr>
+        <p:style>
+          <a:lnRef idx="1">
+            <a:schemeClr val="accent1"/>
+          </a:lnRef>
+          <a:fillRef idx="3">
+            <a:schemeClr val="accent1"/>
+          </a:fillRef>
+          <a:effectRef idx="2">
+            <a:schemeClr val="accent1"/>
+          </a:effectRef>
+          <a:fontRef idx="minor">
+            <a:schemeClr val="lt1"/>
+          </a:fontRef>
+        </p:style>
+        <p:txBody>
+          <a:bodyPr rtlCol="0" anchor="ctr"/>
+          <a:lstStyle/>
+          <a:p>
+            <a:pPr algn="ctr"/>
+          </a:p>
+        </p:txBody>
+      </p:sp>
+      <p:sp>
+        <p:nvSpPr>
+          <p:cNvPr id="32" name="TextBox 31"/>
+          <p:cNvSpPr txBox="1"/>
+          <p:nvPr/>
+        </p:nvSpPr>
+        <p:spPr>
+          <a:xfrm>
+            <a:off x="9610344" y="1627632"/>
+            <a:ext cx="1975103" cy="292608"/>
+          </a:xfrm>
+          <a:prstGeom prst="rect">
+            <a:avLst/>
+          </a:prstGeom>
+          <a:noFill/>
+        </p:spPr>
+        <p:txBody>
+          <a:bodyPr wrap="square" anchor="t" lIns="45720" rIns="45720" tIns="18288" bIns="18288">
+            <a:spAutoFit/>
+          </a:bodyPr>
+          <a:lstStyle/>
+          <a:p>
+            <a:pPr algn="l">
+              <a:lnSpc>
+                <a:spcPct val="100000"/>
+              </a:lnSpc>
+              <a:spcBef>
+                <a:spcPts val="0"/>
+              </a:spcBef>
+              <a:spcAft>
+                <a:spcPts val="400"/>
+              </a:spcAft>
+            </a:pPr>
+            <a:r>
+              <a:rPr sz="1050" b="1">
+                <a:solidFill>
+                  <a:srgbClr val="0F3460"/>
+                </a:solidFill>
+                <a:latin typeface="Segoe UI"/>
+              </a:rPr>
+              <a:t>CUSTOMER SEGMENTS</a:t>
+            </a:r>
+          </a:p>
+        </p:txBody>
+      </p:sp>
+      <p:sp>
+        <p:nvSpPr>
+          <p:cNvPr id="33" name="TextBox 32"/>
+          <p:cNvSpPr txBox="1"/>
+          <p:nvPr/>
+        </p:nvSpPr>
+        <p:spPr>
+          <a:xfrm>
+            <a:off x="9610344" y="1938528"/>
+            <a:ext cx="1938528" cy="2734056"/>
+          </a:xfrm>
+          <a:prstGeom prst="rect">
+            <a:avLst/>
+          </a:prstGeom>
+          <a:noFill/>
+        </p:spPr>
+        <p:txBody>
+          <a:bodyPr wrap="square" anchor="t" lIns="45720" rIns="45720" tIns="18288" bIns="18288">
+            <a:spAutoFit/>
+          </a:bodyPr>
+          <a:lstStyle/>
+          <a:p>
+            <a:pPr algn="l">
+              <a:lnSpc>
+                <a:spcPct val="100000"/>
+              </a:lnSpc>
+              <a:spcBef>
+                <a:spcPts val="0"/>
+              </a:spcBef>
+              <a:spcAft>
+                <a:spcPts val="200"/>
+              </a:spcAft>
+            </a:pPr>
+            <a:r>
+              <a:rPr sz="930" b="0">
+                <a:solidFill>
+                  <a:srgbClr val="1A2540"/>
+                </a:solidFill>
+                <a:latin typeface="Segoe UI"/>
+              </a:rPr>
+              <a:t>•  UAE university students (B2C)</a:t>
+            </a:r>
+          </a:p>
+          <a:p>
+            <a:pPr algn="l">
+              <a:lnSpc>
+                <a:spcPct val="100000"/>
+              </a:lnSpc>
+              <a:spcBef>
+                <a:spcPts val="0"/>
+              </a:spcBef>
+              <a:spcAft>
+                <a:spcPts val="200"/>
+              </a:spcAft>
+            </a:pPr>
+            <a:r>
+              <a:rPr sz="930" b="0">
+                <a:solidFill>
+                  <a:srgbClr val="1A2540"/>
+                </a:solidFill>
+                <a:latin typeface="Segoe UI"/>
+              </a:rPr>
+              <a:t>•  Universities (B2B licensing)</a:t>
+            </a:r>
+          </a:p>
+          <a:p>
+            <a:pPr algn="l">
+              <a:lnSpc>
+                <a:spcPct val="100000"/>
+              </a:lnSpc>
+              <a:spcBef>
+                <a:spcPts val="0"/>
+              </a:spcBef>
+              <a:spcAft>
+                <a:spcPts val="200"/>
+              </a:spcAft>
+            </a:pPr>
+            <a:r>
+              <a:rPr sz="930" b="0">
+                <a:solidFill>
+                  <a:srgbClr val="1A2540"/>
+                </a:solidFill>
+                <a:latin typeface="Segoe UI"/>
+              </a:rPr>
+              <a:t>•  Procrastination-prone learners</a:t>
+            </a:r>
+          </a:p>
+        </p:txBody>
+      </p:sp>
+      <p:sp>
+        <p:nvSpPr>
+          <p:cNvPr id="34" name="Rectangle 33"/>
+          <p:cNvSpPr/>
+          <p:nvPr/>
+        </p:nvSpPr>
+        <p:spPr>
+          <a:xfrm>
+            <a:off x="502920" y="4800600"/>
+            <a:ext cx="5486400" cy="1371600"/>
+          </a:xfrm>
+          <a:prstGeom prst="rect">
+            <a:avLst/>
+          </a:prstGeom>
+          <a:solidFill>
+            <a:srgbClr val="FFFFFF"/>
+          </a:solidFill>
+          <a:ln w="12700">
+            <a:solidFill>
+              <a:srgbClr val="E2EAF4"/>
+            </a:solidFill>
+          </a:ln>
+          <a:effectLst/>
+        </p:spPr>
+        <p:style>
+          <a:lnRef idx="1">
+            <a:schemeClr val="accent1"/>
+          </a:lnRef>
+          <a:fillRef idx="3">
+            <a:schemeClr val="accent1"/>
+          </a:fillRef>
+          <a:effectRef idx="2">
+            <a:schemeClr val="accent1"/>
+          </a:effectRef>
+          <a:fontRef idx="minor">
+            <a:schemeClr val="lt1"/>
+          </a:fontRef>
+        </p:style>
+        <p:txBody>
+          <a:bodyPr rtlCol="0" anchor="ctr"/>
+          <a:lstStyle/>
+          <a:p>
+            <a:pPr algn="ctr"/>
+          </a:p>
+        </p:txBody>
+      </p:sp>
+      <p:sp>
+        <p:nvSpPr>
+          <p:cNvPr id="35" name="Rectangle 34"/>
+          <p:cNvSpPr/>
+          <p:nvPr/>
+        </p:nvSpPr>
+        <p:spPr>
+          <a:xfrm>
+            <a:off x="502920" y="4800600"/>
+            <a:ext cx="64008" cy="1371600"/>
+          </a:xfrm>
+          <a:prstGeom prst="rect">
+            <a:avLst/>
+          </a:prstGeom>
+          <a:solidFill>
+            <a:srgbClr val="E84A5F"/>
+          </a:solidFill>
+          <a:ln>
+            <a:noFill/>
+          </a:ln>
+          <a:effectLst/>
+        </p:spPr>
+        <p:style>
+          <a:lnRef idx="1">
+            <a:schemeClr val="accent1"/>
+          </a:lnRef>
+          <a:fillRef idx="3">
+            <a:schemeClr val="accent1"/>
+          </a:fillRef>
+          <a:effectRef idx="2">
+            <a:schemeClr val="accent1"/>
+          </a:effectRef>
+          <a:fontRef idx="minor">
+            <a:schemeClr val="lt1"/>
+          </a:fontRef>
+        </p:style>
+        <p:txBody>
+          <a:bodyPr rtlCol="0" anchor="ctr"/>
+          <a:lstStyle/>
+          <a:p>
+            <a:pPr algn="ctr"/>
+          </a:p>
+        </p:txBody>
+      </p:sp>
+      <p:sp>
+        <p:nvSpPr>
+          <p:cNvPr id="36" name="TextBox 35"/>
+          <p:cNvSpPr txBox="1"/>
+          <p:nvPr/>
+        </p:nvSpPr>
+        <p:spPr>
+          <a:xfrm>
+            <a:off x="649224" y="4873752"/>
+            <a:ext cx="5285232" cy="292608"/>
+          </a:xfrm>
+          <a:prstGeom prst="rect">
+            <a:avLst/>
+          </a:prstGeom>
+          <a:noFill/>
+        </p:spPr>
+        <p:txBody>
+          <a:bodyPr wrap="square" anchor="t" lIns="45720" rIns="45720" tIns="18288" bIns="18288">
+            <a:spAutoFit/>
+          </a:bodyPr>
+          <a:lstStyle/>
+          <a:p>
+            <a:pPr algn="l">
+              <a:lnSpc>
+                <a:spcPct val="100000"/>
+              </a:lnSpc>
+              <a:spcBef>
+                <a:spcPts val="0"/>
+              </a:spcBef>
+              <a:spcAft>
+                <a:spcPts val="400"/>
+              </a:spcAft>
+            </a:pPr>
+            <a:r>
+              <a:rPr sz="1050" b="1">
+                <a:solidFill>
+                  <a:srgbClr val="0F3460"/>
+                </a:solidFill>
+                <a:latin typeface="Segoe UI"/>
+              </a:rPr>
+              <a:t>COST STRUCTURE</a:t>
+            </a:r>
+          </a:p>
+        </p:txBody>
+      </p:sp>
+      <p:sp>
+        <p:nvSpPr>
+          <p:cNvPr id="37" name="TextBox 36"/>
+          <p:cNvSpPr txBox="1"/>
+          <p:nvPr/>
+        </p:nvSpPr>
+        <p:spPr>
+          <a:xfrm>
+            <a:off x="649224" y="5184648"/>
+            <a:ext cx="5248656" cy="950976"/>
+          </a:xfrm>
+          <a:prstGeom prst="rect">
+            <a:avLst/>
+          </a:prstGeom>
+          <a:noFill/>
+        </p:spPr>
+        <p:txBody>
+          <a:bodyPr wrap="square" anchor="t" lIns="45720" rIns="45720" tIns="18288" bIns="18288">
+            <a:spAutoFit/>
+          </a:bodyPr>
+          <a:lstStyle/>
+          <a:p>
+            <a:pPr algn="l">
+              <a:lnSpc>
+                <a:spcPct val="100000"/>
+              </a:lnSpc>
+              <a:spcBef>
+                <a:spcPts val="0"/>
+              </a:spcBef>
+              <a:spcAft>
+                <a:spcPts val="200"/>
+              </a:spcAft>
+            </a:pPr>
+            <a:r>
+              <a:rPr sz="930" b="0">
+                <a:solidFill>
+                  <a:srgbClr val="1A2540"/>
+                </a:solidFill>
+                <a:latin typeface="Segoe UI"/>
+              </a:rPr>
+              <a:t>•  Development &amp; hosting</a:t>
+            </a:r>
+          </a:p>
+          <a:p>
+            <a:pPr algn="l">
+              <a:lnSpc>
+                <a:spcPct val="100000"/>
+              </a:lnSpc>
+              <a:spcBef>
+                <a:spcPts val="0"/>
+              </a:spcBef>
+              <a:spcAft>
+                <a:spcPts val="200"/>
+              </a:spcAft>
+            </a:pPr>
+            <a:r>
+              <a:rPr sz="930" b="0">
+                <a:solidFill>
+                  <a:srgbClr val="1A2540"/>
+                </a:solidFill>
+                <a:latin typeface="Segoe UI"/>
+              </a:rPr>
+              <a:t>•  Marketing &amp; user acquisition</a:t>
+            </a:r>
+          </a:p>
+          <a:p>
+            <a:pPr algn="l">
+              <a:lnSpc>
+                <a:spcPct val="100000"/>
+              </a:lnSpc>
+              <a:spcBef>
+                <a:spcPts val="0"/>
+              </a:spcBef>
+              <a:spcAft>
+                <a:spcPts val="200"/>
+              </a:spcAft>
+            </a:pPr>
+            <a:r>
+              <a:rPr sz="930" b="0">
+                <a:solidFill>
+                  <a:srgbClr val="1A2540"/>
+                </a:solidFill>
+                <a:latin typeface="Segoe UI"/>
+              </a:rPr>
+              <a:t>•  Customer support</a:t>
+            </a:r>
+          </a:p>
+        </p:txBody>
+      </p:sp>
+      <p:sp>
+        <p:nvSpPr>
+          <p:cNvPr id="38" name="Rectangle 37"/>
+          <p:cNvSpPr/>
+          <p:nvPr/>
+        </p:nvSpPr>
+        <p:spPr>
+          <a:xfrm>
+            <a:off x="6153912" y="4800600"/>
+            <a:ext cx="5532120" cy="1371600"/>
+          </a:xfrm>
+          <a:prstGeom prst="rect">
+            <a:avLst/>
+          </a:prstGeom>
+          <a:solidFill>
+            <a:srgbClr val="FFFFFF"/>
+          </a:solidFill>
+          <a:ln w="12700">
+            <a:solidFill>
+              <a:srgbClr val="E2EAF4"/>
+            </a:solidFill>
+          </a:ln>
+          <a:effectLst/>
+        </p:spPr>
+        <p:style>
+          <a:lnRef idx="1">
+            <a:schemeClr val="accent1"/>
+          </a:lnRef>
+          <a:fillRef idx="3">
+            <a:schemeClr val="accent1"/>
+          </a:fillRef>
+          <a:effectRef idx="2">
+            <a:schemeClr val="accent1"/>
+          </a:effectRef>
+          <a:fontRef idx="minor">
+            <a:schemeClr val="lt1"/>
+          </a:fontRef>
+        </p:style>
+        <p:txBody>
+          <a:bodyPr rtlCol="0" anchor="ctr"/>
+          <a:lstStyle/>
+          <a:p>
+            <a:pPr algn="ctr"/>
+          </a:p>
+        </p:txBody>
+      </p:sp>
+      <p:sp>
+        <p:nvSpPr>
+          <p:cNvPr id="39" name="Rectangle 38"/>
+          <p:cNvSpPr/>
+          <p:nvPr/>
+        </p:nvSpPr>
+        <p:spPr>
+          <a:xfrm>
+            <a:off x="6153912" y="4800600"/>
+            <a:ext cx="64008" cy="1371600"/>
+          </a:xfrm>
+          <a:prstGeom prst="rect">
+            <a:avLst/>
+          </a:prstGeom>
+          <a:solidFill>
+            <a:srgbClr val="F5A623"/>
+          </a:solidFill>
+          <a:ln>
+            <a:noFill/>
+          </a:ln>
+          <a:effectLst/>
+        </p:spPr>
+        <p:style>
+          <a:lnRef idx="1">
+            <a:schemeClr val="accent1"/>
+          </a:lnRef>
+          <a:fillRef idx="3">
+            <a:schemeClr val="accent1"/>
+          </a:fillRef>
+          <a:effectRef idx="2">
+            <a:schemeClr val="accent1"/>
+          </a:effectRef>
+          <a:fontRef idx="minor">
+            <a:schemeClr val="lt1"/>
+          </a:fontRef>
+        </p:style>
+        <p:txBody>
+          <a:bodyPr rtlCol="0" anchor="ctr"/>
+          <a:lstStyle/>
+          <a:p>
+            <a:pPr algn="ctr"/>
+          </a:p>
+        </p:txBody>
+      </p:sp>
+      <p:sp>
+        <p:nvSpPr>
+          <p:cNvPr id="40" name="TextBox 39"/>
+          <p:cNvSpPr txBox="1"/>
+          <p:nvPr/>
+        </p:nvSpPr>
+        <p:spPr>
+          <a:xfrm>
+            <a:off x="6300216" y="4873752"/>
+            <a:ext cx="5330952" cy="292608"/>
+          </a:xfrm>
+          <a:prstGeom prst="rect">
+            <a:avLst/>
+          </a:prstGeom>
+          <a:noFill/>
+        </p:spPr>
+        <p:txBody>
+          <a:bodyPr wrap="square" anchor="t" lIns="45720" rIns="45720" tIns="18288" bIns="18288">
+            <a:spAutoFit/>
+          </a:bodyPr>
+          <a:lstStyle/>
+          <a:p>
+            <a:pPr algn="l">
+              <a:lnSpc>
+                <a:spcPct val="100000"/>
+              </a:lnSpc>
+              <a:spcBef>
+                <a:spcPts val="0"/>
+              </a:spcBef>
+              <a:spcAft>
+                <a:spcPts val="400"/>
+              </a:spcAft>
+            </a:pPr>
+            <a:r>
+              <a:rPr sz="1050" b="1">
+                <a:solidFill>
+                  <a:srgbClr val="0F3460"/>
+                </a:solidFill>
+                <a:latin typeface="Segoe UI"/>
+              </a:rPr>
+              <a:t>REVENUE STREAMS</a:t>
+            </a:r>
+          </a:p>
+        </p:txBody>
+      </p:sp>
+      <p:sp>
+        <p:nvSpPr>
+          <p:cNvPr id="41" name="TextBox 40"/>
+          <p:cNvSpPr txBox="1"/>
+          <p:nvPr/>
+        </p:nvSpPr>
+        <p:spPr>
+          <a:xfrm>
+            <a:off x="6300216" y="5184648"/>
+            <a:ext cx="5294376" cy="950976"/>
+          </a:xfrm>
+          <a:prstGeom prst="rect">
+            <a:avLst/>
+          </a:prstGeom>
+          <a:noFill/>
+        </p:spPr>
+        <p:txBody>
+          <a:bodyPr wrap="square" anchor="t" lIns="45720" rIns="45720" tIns="18288" bIns="18288">
+            <a:spAutoFit/>
+          </a:bodyPr>
+          <a:lstStyle/>
+          <a:p>
+            <a:pPr algn="l">
+              <a:lnSpc>
+                <a:spcPct val="100000"/>
+              </a:lnSpc>
+              <a:spcBef>
+                <a:spcPts val="0"/>
+              </a:spcBef>
+              <a:spcAft>
+                <a:spcPts val="200"/>
+              </a:spcAft>
+            </a:pPr>
+            <a:r>
+              <a:rPr sz="930" b="0">
+                <a:solidFill>
+                  <a:srgbClr val="1A2540"/>
+                </a:solidFill>
+                <a:latin typeface="Segoe UI"/>
+              </a:rPr>
+              <a:t>•  Premium subscription — AED 29/mo</a:t>
+            </a:r>
+          </a:p>
+          <a:p>
+            <a:pPr algn="l">
+              <a:lnSpc>
+                <a:spcPct val="100000"/>
+              </a:lnSpc>
+              <a:spcBef>
+                <a:spcPts val="0"/>
+              </a:spcBef>
+              <a:spcAft>
+                <a:spcPts val="200"/>
+              </a:spcAft>
+            </a:pPr>
+            <a:r>
+              <a:rPr sz="930" b="0">
+                <a:solidFill>
+                  <a:srgbClr val="1A2540"/>
+                </a:solidFill>
+                <a:latin typeface="Segoe UI"/>
+              </a:rPr>
+              <a:t>•  Institutional licence — AED 15/student/yr</a:t>
+            </a:r>
+          </a:p>
+          <a:p>
+            <a:pPr algn="l">
+              <a:lnSpc>
+                <a:spcPct val="100000"/>
+              </a:lnSpc>
+              <a:spcBef>
+                <a:spcPts val="0"/>
+              </a:spcBef>
+              <a:spcAft>
+                <a:spcPts val="200"/>
+              </a:spcAft>
+            </a:pPr>
+            <a:r>
+              <a:rPr sz="930" b="0">
+                <a:solidFill>
+                  <a:srgbClr val="1A2540"/>
+                </a:solidFill>
+                <a:latin typeface="Segoe UI"/>
+              </a:rPr>
+              <a:t>•  Free tier (top of funnel)</a:t>
             </a:r>
           </a:p>
         </p:txBody>
@@ -16245,1050 +21828,6 @@
           </a:prstGeom>
         </p:spPr>
       </p:pic>
-    </p:spTree>
-  </p:cSld>
-  <p:clrMapOvr>
-    <a:masterClrMapping/>
-  </p:clrMapOvr>
-</p:sld>
-</file>
-
-<file path=ppt/slides/slide5.xml><?xml version="1.0" encoding="utf-8"?>
-<p:sld xmlns:a="http://schemas.openxmlformats.org/drawingml/2006/main" xmlns:p="http://schemas.openxmlformats.org/presentationml/2006/main" xmlns:r="http://schemas.openxmlformats.org/officeDocument/2006/relationships">
-  <p:cSld>
-    <p:spTree>
-      <p:nvGrpSpPr>
-        <p:cNvPr id="1" name=""/>
-        <p:cNvGrpSpPr/>
-        <p:nvPr/>
-      </p:nvGrpSpPr>
-      <p:grpSpPr/>
-      <p:sp>
-        <p:nvSpPr>
-          <p:cNvPr id="2" name="Rectangle 1"/>
-          <p:cNvSpPr/>
-          <p:nvPr/>
-        </p:nvSpPr>
-        <p:spPr>
-          <a:xfrm>
-            <a:off x="0" y="0"/>
-            <a:ext cx="12191695" cy="6858000"/>
-          </a:xfrm>
-          <a:prstGeom prst="rect">
-            <a:avLst/>
-          </a:prstGeom>
-          <a:solidFill>
-            <a:srgbClr val="F8FAFD"/>
-          </a:solidFill>
-          <a:ln>
-            <a:noFill/>
-          </a:ln>
-          <a:effectLst/>
-        </p:spPr>
-        <p:style>
-          <a:lnRef idx="1">
-            <a:schemeClr val="accent1"/>
-          </a:lnRef>
-          <a:fillRef idx="3">
-            <a:schemeClr val="accent1"/>
-          </a:fillRef>
-          <a:effectRef idx="2">
-            <a:schemeClr val="accent1"/>
-          </a:effectRef>
-          <a:fontRef idx="minor">
-            <a:schemeClr val="lt1"/>
-          </a:fontRef>
-        </p:style>
-        <p:txBody>
-          <a:bodyPr rtlCol="0" anchor="ctr"/>
-          <a:lstStyle/>
-          <a:p>
-            <a:pPr algn="ctr"/>
-          </a:p>
-        </p:txBody>
-      </p:sp>
-      <p:sp>
-        <p:nvSpPr>
-          <p:cNvPr id="3" name="Rectangle 2"/>
-          <p:cNvSpPr/>
-          <p:nvPr/>
-        </p:nvSpPr>
-        <p:spPr>
-          <a:xfrm>
-            <a:off x="0" y="0"/>
-            <a:ext cx="12191695" cy="146304"/>
-          </a:xfrm>
-          <a:prstGeom prst="rect">
-            <a:avLst/>
-          </a:prstGeom>
-          <a:solidFill>
-            <a:srgbClr val="F5A623"/>
-          </a:solidFill>
-          <a:ln>
-            <a:noFill/>
-          </a:ln>
-          <a:effectLst/>
-        </p:spPr>
-        <p:style>
-          <a:lnRef idx="1">
-            <a:schemeClr val="accent1"/>
-          </a:lnRef>
-          <a:fillRef idx="3">
-            <a:schemeClr val="accent1"/>
-          </a:fillRef>
-          <a:effectRef idx="2">
-            <a:schemeClr val="accent1"/>
-          </a:effectRef>
-          <a:fontRef idx="minor">
-            <a:schemeClr val="lt1"/>
-          </a:fontRef>
-        </p:style>
-        <p:txBody>
-          <a:bodyPr rtlCol="0" anchor="ctr"/>
-          <a:lstStyle/>
-          <a:p>
-            <a:pPr algn="ctr"/>
-          </a:p>
-        </p:txBody>
-      </p:sp>
-      <p:sp>
-        <p:nvSpPr>
-          <p:cNvPr id="4" name="TextBox 3"/>
-          <p:cNvSpPr txBox="1"/>
-          <p:nvPr/>
-        </p:nvSpPr>
-        <p:spPr>
-          <a:xfrm>
-            <a:off x="502920" y="310896"/>
-            <a:ext cx="11155680" cy="365760"/>
-          </a:xfrm>
-          <a:prstGeom prst="rect">
-            <a:avLst/>
-          </a:prstGeom>
-          <a:noFill/>
-        </p:spPr>
-        <p:txBody>
-          <a:bodyPr wrap="square" anchor="t" lIns="45720" rIns="45720" tIns="18288" bIns="18288">
-            <a:spAutoFit/>
-          </a:bodyPr>
-          <a:lstStyle/>
-          <a:p>
-            <a:pPr algn="l">
-              <a:lnSpc>
-                <a:spcPct val="100000"/>
-              </a:lnSpc>
-              <a:spcBef>
-                <a:spcPts val="0"/>
-              </a:spcBef>
-              <a:spcAft>
-                <a:spcPts val="400"/>
-              </a:spcAft>
-            </a:pPr>
-            <a:r>
-              <a:rPr sz="1300" b="1">
-                <a:solidFill>
-                  <a:srgbClr val="0D7377"/>
-                </a:solidFill>
-                <a:latin typeface="Segoe UI"/>
-              </a:rPr>
-              <a:t>THE SOLUTION</a:t>
-            </a:r>
-          </a:p>
-        </p:txBody>
-      </p:sp>
-      <p:sp>
-        <p:nvSpPr>
-          <p:cNvPr id="5" name="TextBox 4"/>
-          <p:cNvSpPr txBox="1"/>
-          <p:nvPr/>
-        </p:nvSpPr>
-        <p:spPr>
-          <a:xfrm>
-            <a:off x="502920" y="566928"/>
-            <a:ext cx="11155680" cy="914400"/>
-          </a:xfrm>
-          <a:prstGeom prst="rect">
-            <a:avLst/>
-          </a:prstGeom>
-          <a:noFill/>
-        </p:spPr>
-        <p:txBody>
-          <a:bodyPr wrap="square" anchor="t" lIns="45720" rIns="45720" tIns="18288" bIns="18288">
-            <a:spAutoFit/>
-          </a:bodyPr>
-          <a:lstStyle/>
-          <a:p>
-            <a:pPr algn="l">
-              <a:lnSpc>
-                <a:spcPct val="100000"/>
-              </a:lnSpc>
-              <a:spcBef>
-                <a:spcPts val="0"/>
-              </a:spcBef>
-              <a:spcAft>
-                <a:spcPts val="400"/>
-              </a:spcAft>
-            </a:pPr>
-            <a:r>
-              <a:rPr sz="3000" b="1">
-                <a:solidFill>
-                  <a:srgbClr val="0F3460"/>
-                </a:solidFill>
-                <a:latin typeface="Segoe UI"/>
-              </a:rPr>
-              <a:t>Introducing StudyStrike</a:t>
-            </a:r>
-          </a:p>
-        </p:txBody>
-      </p:sp>
-      <p:sp>
-        <p:nvSpPr>
-          <p:cNvPr id="6" name="Rounded Rectangle 5"/>
-          <p:cNvSpPr/>
-          <p:nvPr/>
-        </p:nvSpPr>
-        <p:spPr>
-          <a:xfrm>
-            <a:off x="502920" y="1737360"/>
-            <a:ext cx="5577840" cy="4206240"/>
-          </a:xfrm>
-          <a:prstGeom prst="roundRect">
-            <a:avLst/>
-          </a:prstGeom>
-          <a:solidFill>
-            <a:srgbClr val="0F3460"/>
-          </a:solidFill>
-          <a:ln>
-            <a:noFill/>
-          </a:ln>
-          <a:effectLst/>
-        </p:spPr>
-        <p:style>
-          <a:lnRef idx="1">
-            <a:schemeClr val="accent1"/>
-          </a:lnRef>
-          <a:fillRef idx="3">
-            <a:schemeClr val="accent1"/>
-          </a:fillRef>
-          <a:effectRef idx="2">
-            <a:schemeClr val="accent1"/>
-          </a:effectRef>
-          <a:fontRef idx="minor">
-            <a:schemeClr val="lt1"/>
-          </a:fontRef>
-        </p:style>
-        <p:txBody>
-          <a:bodyPr rtlCol="0" anchor="ctr"/>
-          <a:lstStyle/>
-          <a:p>
-            <a:pPr algn="ctr"/>
-          </a:p>
-        </p:txBody>
-      </p:sp>
-      <p:sp>
-        <p:nvSpPr>
-          <p:cNvPr id="7" name="TextBox 6"/>
-          <p:cNvSpPr txBox="1"/>
-          <p:nvPr/>
-        </p:nvSpPr>
-        <p:spPr>
-          <a:xfrm>
-            <a:off x="868680" y="2148840"/>
-            <a:ext cx="4937760" cy="3200400"/>
-          </a:xfrm>
-          <a:prstGeom prst="rect">
-            <a:avLst/>
-          </a:prstGeom>
-          <a:noFill/>
-        </p:spPr>
-        <p:txBody>
-          <a:bodyPr wrap="square" anchor="t" lIns="45720" rIns="45720" tIns="18288" bIns="18288">
-            <a:spAutoFit/>
-          </a:bodyPr>
-          <a:lstStyle/>
-          <a:p>
-            <a:pPr algn="l">
-              <a:lnSpc>
-                <a:spcPct val="110000"/>
-              </a:lnSpc>
-              <a:spcBef>
-                <a:spcPts val="0"/>
-              </a:spcBef>
-              <a:spcAft>
-                <a:spcPts val="400"/>
-              </a:spcAft>
-            </a:pPr>
-            <a:r>
-              <a:rPr sz="2200" b="1">
-                <a:solidFill>
-                  <a:srgbClr val="FFFFFF"/>
-                </a:solidFill>
-                <a:latin typeface="Segoe UI"/>
-              </a:rPr>
-              <a:t>A gamified academic platform that turns assignment management into a motivating, competitive game —</a:t>
-            </a:r>
-          </a:p>
-          <a:p>
-            <a:pPr algn="l">
-              <a:lnSpc>
-                <a:spcPct val="110000"/>
-              </a:lnSpc>
-              <a:spcBef>
-                <a:spcPts val="0"/>
-              </a:spcBef>
-              <a:spcAft>
-                <a:spcPts val="400"/>
-              </a:spcAft>
-            </a:pPr>
-            <a:r>
-              <a:rPr sz="800" b="0">
-                <a:solidFill>
-                  <a:srgbClr val="FFFFFF"/>
-                </a:solidFill>
-                <a:latin typeface="Segoe UI"/>
-              </a:rPr>
-              <a:t/>
-            </a:r>
-          </a:p>
-          <a:p>
-            <a:pPr algn="l">
-              <a:lnSpc>
-                <a:spcPct val="110000"/>
-              </a:lnSpc>
-              <a:spcBef>
-                <a:spcPts val="0"/>
-              </a:spcBef>
-              <a:spcAft>
-                <a:spcPts val="400"/>
-              </a:spcAft>
-            </a:pPr>
-            <a:r>
-              <a:rPr sz="2200" b="1">
-                <a:solidFill>
-                  <a:srgbClr val="FFD166"/>
-                </a:solidFill>
-                <a:latin typeface="Segoe UI"/>
-              </a:rPr>
-              <a:t>helping UAE students start earlier, stay focused, and hit every deadline.</a:t>
-            </a:r>
-          </a:p>
-        </p:txBody>
-      </p:sp>
-      <p:sp>
-        <p:nvSpPr>
-          <p:cNvPr id="8" name="TextBox 7"/>
-          <p:cNvSpPr txBox="1"/>
-          <p:nvPr/>
-        </p:nvSpPr>
-        <p:spPr>
-          <a:xfrm>
-            <a:off x="6400800" y="1783080"/>
-            <a:ext cx="5303520" cy="457200"/>
-          </a:xfrm>
-          <a:prstGeom prst="rect">
-            <a:avLst/>
-          </a:prstGeom>
-          <a:noFill/>
-        </p:spPr>
-        <p:txBody>
-          <a:bodyPr wrap="square" anchor="t" lIns="45720" rIns="45720" tIns="18288" bIns="18288">
-            <a:spAutoFit/>
-          </a:bodyPr>
-          <a:lstStyle/>
-          <a:p>
-            <a:pPr algn="l">
-              <a:lnSpc>
-                <a:spcPct val="100000"/>
-              </a:lnSpc>
-              <a:spcBef>
-                <a:spcPts val="0"/>
-              </a:spcBef>
-              <a:spcAft>
-                <a:spcPts val="400"/>
-              </a:spcAft>
-            </a:pPr>
-            <a:r>
-              <a:rPr sz="1500" b="1">
-                <a:solidFill>
-                  <a:srgbClr val="1A2540"/>
-                </a:solidFill>
-                <a:latin typeface="Segoe UI"/>
-              </a:rPr>
-              <a:t>The 'How Might We?' questions that shaped it</a:t>
-            </a:r>
-          </a:p>
-        </p:txBody>
-      </p:sp>
-      <p:sp>
-        <p:nvSpPr>
-          <p:cNvPr id="9" name="Rounded Rectangle 8"/>
-          <p:cNvSpPr/>
-          <p:nvPr/>
-        </p:nvSpPr>
-        <p:spPr>
-          <a:xfrm>
-            <a:off x="6400800" y="2286000"/>
-            <a:ext cx="548640" cy="548640"/>
-          </a:xfrm>
-          <a:prstGeom prst="roundRect">
-            <a:avLst/>
-          </a:prstGeom>
-          <a:solidFill>
-            <a:srgbClr val="14A085"/>
-          </a:solidFill>
-          <a:ln>
-            <a:noFill/>
-          </a:ln>
-          <a:effectLst/>
-        </p:spPr>
-        <p:style>
-          <a:lnRef idx="1">
-            <a:schemeClr val="accent1"/>
-          </a:lnRef>
-          <a:fillRef idx="3">
-            <a:schemeClr val="accent1"/>
-          </a:fillRef>
-          <a:effectRef idx="2">
-            <a:schemeClr val="accent1"/>
-          </a:effectRef>
-          <a:fontRef idx="minor">
-            <a:schemeClr val="lt1"/>
-          </a:fontRef>
-        </p:style>
-        <p:txBody>
-          <a:bodyPr rtlCol="0" anchor="ctr"/>
-          <a:lstStyle/>
-          <a:p>
-            <a:pPr algn="ctr"/>
-          </a:p>
-        </p:txBody>
-      </p:sp>
-      <p:sp>
-        <p:nvSpPr>
-          <p:cNvPr id="10" name="TextBox 9"/>
-          <p:cNvSpPr txBox="1"/>
-          <p:nvPr/>
-        </p:nvSpPr>
-        <p:spPr>
-          <a:xfrm>
-            <a:off x="6400800" y="2286000"/>
-            <a:ext cx="548640" cy="548640"/>
-          </a:xfrm>
-          <a:prstGeom prst="rect">
-            <a:avLst/>
-          </a:prstGeom>
-          <a:noFill/>
-        </p:spPr>
-        <p:txBody>
-          <a:bodyPr wrap="square" anchor="ctr" lIns="45720" rIns="45720" tIns="18288" bIns="18288">
-            <a:spAutoFit/>
-          </a:bodyPr>
-          <a:lstStyle/>
-          <a:p>
-            <a:pPr algn="ctr">
-              <a:lnSpc>
-                <a:spcPct val="100000"/>
-              </a:lnSpc>
-              <a:spcBef>
-                <a:spcPts val="0"/>
-              </a:spcBef>
-              <a:spcAft>
-                <a:spcPts val="400"/>
-              </a:spcAft>
-            </a:pPr>
-            <a:r>
-              <a:rPr sz="1800" b="1">
-                <a:solidFill>
-                  <a:srgbClr val="FFFFFF"/>
-                </a:solidFill>
-                <a:latin typeface="Segoe UI"/>
-              </a:rPr>
-              <a:t>1</a:t>
-            </a:r>
-          </a:p>
-        </p:txBody>
-      </p:sp>
-      <p:sp>
-        <p:nvSpPr>
-          <p:cNvPr id="11" name="TextBox 10"/>
-          <p:cNvSpPr txBox="1"/>
-          <p:nvPr/>
-        </p:nvSpPr>
-        <p:spPr>
-          <a:xfrm>
-            <a:off x="7086600" y="2286000"/>
-            <a:ext cx="4617720" cy="594360"/>
-          </a:xfrm>
-          <a:prstGeom prst="rect">
-            <a:avLst/>
-          </a:prstGeom>
-          <a:noFill/>
-        </p:spPr>
-        <p:txBody>
-          <a:bodyPr wrap="square" anchor="ctr" lIns="45720" rIns="45720" tIns="18288" bIns="18288">
-            <a:spAutoFit/>
-          </a:bodyPr>
-          <a:lstStyle/>
-          <a:p>
-            <a:pPr algn="l">
-              <a:lnSpc>
-                <a:spcPct val="100000"/>
-              </a:lnSpc>
-              <a:spcBef>
-                <a:spcPts val="0"/>
-              </a:spcBef>
-              <a:spcAft>
-                <a:spcPts val="400"/>
-              </a:spcAft>
-            </a:pPr>
-            <a:r>
-              <a:rPr sz="1350" b="0">
-                <a:solidFill>
-                  <a:srgbClr val="1A2540"/>
-                </a:solidFill>
-                <a:latin typeface="Segoe UI"/>
-              </a:rPr>
-              <a:t>Help students stay focused without social-media distractions?</a:t>
-            </a:r>
-          </a:p>
-        </p:txBody>
-      </p:sp>
-      <p:sp>
-        <p:nvSpPr>
-          <p:cNvPr id="12" name="Rounded Rectangle 11"/>
-          <p:cNvSpPr/>
-          <p:nvPr/>
-        </p:nvSpPr>
-        <p:spPr>
-          <a:xfrm>
-            <a:off x="6400800" y="3035808"/>
-            <a:ext cx="548640" cy="548640"/>
-          </a:xfrm>
-          <a:prstGeom prst="roundRect">
-            <a:avLst/>
-          </a:prstGeom>
-          <a:solidFill>
-            <a:srgbClr val="14A085"/>
-          </a:solidFill>
-          <a:ln>
-            <a:noFill/>
-          </a:ln>
-          <a:effectLst/>
-        </p:spPr>
-        <p:style>
-          <a:lnRef idx="1">
-            <a:schemeClr val="accent1"/>
-          </a:lnRef>
-          <a:fillRef idx="3">
-            <a:schemeClr val="accent1"/>
-          </a:fillRef>
-          <a:effectRef idx="2">
-            <a:schemeClr val="accent1"/>
-          </a:effectRef>
-          <a:fontRef idx="minor">
-            <a:schemeClr val="lt1"/>
-          </a:fontRef>
-        </p:style>
-        <p:txBody>
-          <a:bodyPr rtlCol="0" anchor="ctr"/>
-          <a:lstStyle/>
-          <a:p>
-            <a:pPr algn="ctr"/>
-          </a:p>
-        </p:txBody>
-      </p:sp>
-      <p:sp>
-        <p:nvSpPr>
-          <p:cNvPr id="13" name="TextBox 12"/>
-          <p:cNvSpPr txBox="1"/>
-          <p:nvPr/>
-        </p:nvSpPr>
-        <p:spPr>
-          <a:xfrm>
-            <a:off x="6400800" y="3035808"/>
-            <a:ext cx="548640" cy="548640"/>
-          </a:xfrm>
-          <a:prstGeom prst="rect">
-            <a:avLst/>
-          </a:prstGeom>
-          <a:noFill/>
-        </p:spPr>
-        <p:txBody>
-          <a:bodyPr wrap="square" anchor="ctr" lIns="45720" rIns="45720" tIns="18288" bIns="18288">
-            <a:spAutoFit/>
-          </a:bodyPr>
-          <a:lstStyle/>
-          <a:p>
-            <a:pPr algn="ctr">
-              <a:lnSpc>
-                <a:spcPct val="100000"/>
-              </a:lnSpc>
-              <a:spcBef>
-                <a:spcPts val="0"/>
-              </a:spcBef>
-              <a:spcAft>
-                <a:spcPts val="400"/>
-              </a:spcAft>
-            </a:pPr>
-            <a:r>
-              <a:rPr sz="1800" b="1">
-                <a:solidFill>
-                  <a:srgbClr val="FFFFFF"/>
-                </a:solidFill>
-                <a:latin typeface="Segoe UI"/>
-              </a:rPr>
-              <a:t>2</a:t>
-            </a:r>
-          </a:p>
-        </p:txBody>
-      </p:sp>
-      <p:sp>
-        <p:nvSpPr>
-          <p:cNvPr id="14" name="TextBox 13"/>
-          <p:cNvSpPr txBox="1"/>
-          <p:nvPr/>
-        </p:nvSpPr>
-        <p:spPr>
-          <a:xfrm>
-            <a:off x="7086600" y="3035808"/>
-            <a:ext cx="4617720" cy="594360"/>
-          </a:xfrm>
-          <a:prstGeom prst="rect">
-            <a:avLst/>
-          </a:prstGeom>
-          <a:noFill/>
-        </p:spPr>
-        <p:txBody>
-          <a:bodyPr wrap="square" anchor="ctr" lIns="45720" rIns="45720" tIns="18288" bIns="18288">
-            <a:spAutoFit/>
-          </a:bodyPr>
-          <a:lstStyle/>
-          <a:p>
-            <a:pPr algn="l">
-              <a:lnSpc>
-                <a:spcPct val="100000"/>
-              </a:lnSpc>
-              <a:spcBef>
-                <a:spcPts val="0"/>
-              </a:spcBef>
-              <a:spcAft>
-                <a:spcPts val="400"/>
-              </a:spcAft>
-            </a:pPr>
-            <a:r>
-              <a:rPr sz="1350" b="0">
-                <a:solidFill>
-                  <a:srgbClr val="1A2540"/>
-                </a:solidFill>
-                <a:latin typeface="Segoe UI"/>
-              </a:rPr>
-              <a:t>Motivate with streaks, rewards, and live leaderboards?</a:t>
-            </a:r>
-          </a:p>
-        </p:txBody>
-      </p:sp>
-      <p:sp>
-        <p:nvSpPr>
-          <p:cNvPr id="15" name="Rounded Rectangle 14"/>
-          <p:cNvSpPr/>
-          <p:nvPr/>
-        </p:nvSpPr>
-        <p:spPr>
-          <a:xfrm>
-            <a:off x="6400800" y="3785615"/>
-            <a:ext cx="548640" cy="548640"/>
-          </a:xfrm>
-          <a:prstGeom prst="roundRect">
-            <a:avLst/>
-          </a:prstGeom>
-          <a:solidFill>
-            <a:srgbClr val="14A085"/>
-          </a:solidFill>
-          <a:ln>
-            <a:noFill/>
-          </a:ln>
-          <a:effectLst/>
-        </p:spPr>
-        <p:style>
-          <a:lnRef idx="1">
-            <a:schemeClr val="accent1"/>
-          </a:lnRef>
-          <a:fillRef idx="3">
-            <a:schemeClr val="accent1"/>
-          </a:fillRef>
-          <a:effectRef idx="2">
-            <a:schemeClr val="accent1"/>
-          </a:effectRef>
-          <a:fontRef idx="minor">
-            <a:schemeClr val="lt1"/>
-          </a:fontRef>
-        </p:style>
-        <p:txBody>
-          <a:bodyPr rtlCol="0" anchor="ctr"/>
-          <a:lstStyle/>
-          <a:p>
-            <a:pPr algn="ctr"/>
-          </a:p>
-        </p:txBody>
-      </p:sp>
-      <p:sp>
-        <p:nvSpPr>
-          <p:cNvPr id="16" name="TextBox 15"/>
-          <p:cNvSpPr txBox="1"/>
-          <p:nvPr/>
-        </p:nvSpPr>
-        <p:spPr>
-          <a:xfrm>
-            <a:off x="6400800" y="3785615"/>
-            <a:ext cx="548640" cy="548640"/>
-          </a:xfrm>
-          <a:prstGeom prst="rect">
-            <a:avLst/>
-          </a:prstGeom>
-          <a:noFill/>
-        </p:spPr>
-        <p:txBody>
-          <a:bodyPr wrap="square" anchor="ctr" lIns="45720" rIns="45720" tIns="18288" bIns="18288">
-            <a:spAutoFit/>
-          </a:bodyPr>
-          <a:lstStyle/>
-          <a:p>
-            <a:pPr algn="ctr">
-              <a:lnSpc>
-                <a:spcPct val="100000"/>
-              </a:lnSpc>
-              <a:spcBef>
-                <a:spcPts val="0"/>
-              </a:spcBef>
-              <a:spcAft>
-                <a:spcPts val="400"/>
-              </a:spcAft>
-            </a:pPr>
-            <a:r>
-              <a:rPr sz="1800" b="1">
-                <a:solidFill>
-                  <a:srgbClr val="FFFFFF"/>
-                </a:solidFill>
-                <a:latin typeface="Segoe UI"/>
-              </a:rPr>
-              <a:t>3</a:t>
-            </a:r>
-          </a:p>
-        </p:txBody>
-      </p:sp>
-      <p:sp>
-        <p:nvSpPr>
-          <p:cNvPr id="17" name="TextBox 16"/>
-          <p:cNvSpPr txBox="1"/>
-          <p:nvPr/>
-        </p:nvSpPr>
-        <p:spPr>
-          <a:xfrm>
-            <a:off x="7086600" y="3785615"/>
-            <a:ext cx="4617720" cy="594360"/>
-          </a:xfrm>
-          <a:prstGeom prst="rect">
-            <a:avLst/>
-          </a:prstGeom>
-          <a:noFill/>
-        </p:spPr>
-        <p:txBody>
-          <a:bodyPr wrap="square" anchor="ctr" lIns="45720" rIns="45720" tIns="18288" bIns="18288">
-            <a:spAutoFit/>
-          </a:bodyPr>
-          <a:lstStyle/>
-          <a:p>
-            <a:pPr algn="l">
-              <a:lnSpc>
-                <a:spcPct val="100000"/>
-              </a:lnSpc>
-              <a:spcBef>
-                <a:spcPts val="0"/>
-              </a:spcBef>
-              <a:spcAft>
-                <a:spcPts val="400"/>
-              </a:spcAft>
-            </a:pPr>
-            <a:r>
-              <a:rPr sz="1350" b="0">
-                <a:solidFill>
-                  <a:srgbClr val="1A2540"/>
-                </a:solidFill>
-                <a:latin typeface="Segoe UI"/>
-              </a:rPr>
-              <a:t>Give one single view of every deadline and task?</a:t>
-            </a:r>
-          </a:p>
-        </p:txBody>
-      </p:sp>
-      <p:sp>
-        <p:nvSpPr>
-          <p:cNvPr id="18" name="Rounded Rectangle 17"/>
-          <p:cNvSpPr/>
-          <p:nvPr/>
-        </p:nvSpPr>
-        <p:spPr>
-          <a:xfrm>
-            <a:off x="6400800" y="4535424"/>
-            <a:ext cx="548640" cy="548640"/>
-          </a:xfrm>
-          <a:prstGeom prst="roundRect">
-            <a:avLst/>
-          </a:prstGeom>
-          <a:solidFill>
-            <a:srgbClr val="14A085"/>
-          </a:solidFill>
-          <a:ln>
-            <a:noFill/>
-          </a:ln>
-          <a:effectLst/>
-        </p:spPr>
-        <p:style>
-          <a:lnRef idx="1">
-            <a:schemeClr val="accent1"/>
-          </a:lnRef>
-          <a:fillRef idx="3">
-            <a:schemeClr val="accent1"/>
-          </a:fillRef>
-          <a:effectRef idx="2">
-            <a:schemeClr val="accent1"/>
-          </a:effectRef>
-          <a:fontRef idx="minor">
-            <a:schemeClr val="lt1"/>
-          </a:fontRef>
-        </p:style>
-        <p:txBody>
-          <a:bodyPr rtlCol="0" anchor="ctr"/>
-          <a:lstStyle/>
-          <a:p>
-            <a:pPr algn="ctr"/>
-          </a:p>
-        </p:txBody>
-      </p:sp>
-      <p:sp>
-        <p:nvSpPr>
-          <p:cNvPr id="19" name="TextBox 18"/>
-          <p:cNvSpPr txBox="1"/>
-          <p:nvPr/>
-        </p:nvSpPr>
-        <p:spPr>
-          <a:xfrm>
-            <a:off x="6400800" y="4535424"/>
-            <a:ext cx="548640" cy="548640"/>
-          </a:xfrm>
-          <a:prstGeom prst="rect">
-            <a:avLst/>
-          </a:prstGeom>
-          <a:noFill/>
-        </p:spPr>
-        <p:txBody>
-          <a:bodyPr wrap="square" anchor="ctr" lIns="45720" rIns="45720" tIns="18288" bIns="18288">
-            <a:spAutoFit/>
-          </a:bodyPr>
-          <a:lstStyle/>
-          <a:p>
-            <a:pPr algn="ctr">
-              <a:lnSpc>
-                <a:spcPct val="100000"/>
-              </a:lnSpc>
-              <a:spcBef>
-                <a:spcPts val="0"/>
-              </a:spcBef>
-              <a:spcAft>
-                <a:spcPts val="400"/>
-              </a:spcAft>
-            </a:pPr>
-            <a:r>
-              <a:rPr sz="1800" b="1">
-                <a:solidFill>
-                  <a:srgbClr val="FFFFFF"/>
-                </a:solidFill>
-                <a:latin typeface="Segoe UI"/>
-              </a:rPr>
-              <a:t>4</a:t>
-            </a:r>
-          </a:p>
-        </p:txBody>
-      </p:sp>
-      <p:sp>
-        <p:nvSpPr>
-          <p:cNvPr id="20" name="TextBox 19"/>
-          <p:cNvSpPr txBox="1"/>
-          <p:nvPr/>
-        </p:nvSpPr>
-        <p:spPr>
-          <a:xfrm>
-            <a:off x="7086600" y="4535424"/>
-            <a:ext cx="4617720" cy="594360"/>
-          </a:xfrm>
-          <a:prstGeom prst="rect">
-            <a:avLst/>
-          </a:prstGeom>
-          <a:noFill/>
-        </p:spPr>
-        <p:txBody>
-          <a:bodyPr wrap="square" anchor="ctr" lIns="45720" rIns="45720" tIns="18288" bIns="18288">
-            <a:spAutoFit/>
-          </a:bodyPr>
-          <a:lstStyle/>
-          <a:p>
-            <a:pPr algn="l">
-              <a:lnSpc>
-                <a:spcPct val="100000"/>
-              </a:lnSpc>
-              <a:spcBef>
-                <a:spcPts val="0"/>
-              </a:spcBef>
-              <a:spcAft>
-                <a:spcPts val="400"/>
-              </a:spcAft>
-            </a:pPr>
-            <a:r>
-              <a:rPr sz="1350" b="0">
-                <a:solidFill>
-                  <a:srgbClr val="1A2540"/>
-                </a:solidFill>
-                <a:latin typeface="Segoe UI"/>
-              </a:rPr>
-              <a:t>Push students to start early instead of last-minute?</a:t>
-            </a:r>
-          </a:p>
-        </p:txBody>
-      </p:sp>
-      <p:sp>
-        <p:nvSpPr>
-          <p:cNvPr id="21" name="Rounded Rectangle 20"/>
-          <p:cNvSpPr/>
-          <p:nvPr/>
-        </p:nvSpPr>
-        <p:spPr>
-          <a:xfrm>
-            <a:off x="6400800" y="5285231"/>
-            <a:ext cx="548640" cy="548640"/>
-          </a:xfrm>
-          <a:prstGeom prst="roundRect">
-            <a:avLst/>
-          </a:prstGeom>
-          <a:solidFill>
-            <a:srgbClr val="14A085"/>
-          </a:solidFill>
-          <a:ln>
-            <a:noFill/>
-          </a:ln>
-          <a:effectLst/>
-        </p:spPr>
-        <p:style>
-          <a:lnRef idx="1">
-            <a:schemeClr val="accent1"/>
-          </a:lnRef>
-          <a:fillRef idx="3">
-            <a:schemeClr val="accent1"/>
-          </a:fillRef>
-          <a:effectRef idx="2">
-            <a:schemeClr val="accent1"/>
-          </a:effectRef>
-          <a:fontRef idx="minor">
-            <a:schemeClr val="lt1"/>
-          </a:fontRef>
-        </p:style>
-        <p:txBody>
-          <a:bodyPr rtlCol="0" anchor="ctr"/>
-          <a:lstStyle/>
-          <a:p>
-            <a:pPr algn="ctr"/>
-          </a:p>
-        </p:txBody>
-      </p:sp>
-      <p:sp>
-        <p:nvSpPr>
-          <p:cNvPr id="22" name="TextBox 21"/>
-          <p:cNvSpPr txBox="1"/>
-          <p:nvPr/>
-        </p:nvSpPr>
-        <p:spPr>
-          <a:xfrm>
-            <a:off x="6400800" y="5285231"/>
-            <a:ext cx="548640" cy="548640"/>
-          </a:xfrm>
-          <a:prstGeom prst="rect">
-            <a:avLst/>
-          </a:prstGeom>
-          <a:noFill/>
-        </p:spPr>
-        <p:txBody>
-          <a:bodyPr wrap="square" anchor="ctr" lIns="45720" rIns="45720" tIns="18288" bIns="18288">
-            <a:spAutoFit/>
-          </a:bodyPr>
-          <a:lstStyle/>
-          <a:p>
-            <a:pPr algn="ctr">
-              <a:lnSpc>
-                <a:spcPct val="100000"/>
-              </a:lnSpc>
-              <a:spcBef>
-                <a:spcPts val="0"/>
-              </a:spcBef>
-              <a:spcAft>
-                <a:spcPts val="400"/>
-              </a:spcAft>
-            </a:pPr>
-            <a:r>
-              <a:rPr sz="1800" b="1">
-                <a:solidFill>
-                  <a:srgbClr val="FFFFFF"/>
-                </a:solidFill>
-                <a:latin typeface="Segoe UI"/>
-              </a:rPr>
-              <a:t>5</a:t>
-            </a:r>
-          </a:p>
-        </p:txBody>
-      </p:sp>
-      <p:sp>
-        <p:nvSpPr>
-          <p:cNvPr id="23" name="TextBox 22"/>
-          <p:cNvSpPr txBox="1"/>
-          <p:nvPr/>
-        </p:nvSpPr>
-        <p:spPr>
-          <a:xfrm>
-            <a:off x="7086600" y="5285231"/>
-            <a:ext cx="4617720" cy="594360"/>
-          </a:xfrm>
-          <a:prstGeom prst="rect">
-            <a:avLst/>
-          </a:prstGeom>
-          <a:noFill/>
-        </p:spPr>
-        <p:txBody>
-          <a:bodyPr wrap="square" anchor="ctr" lIns="45720" rIns="45720" tIns="18288" bIns="18288">
-            <a:spAutoFit/>
-          </a:bodyPr>
-          <a:lstStyle/>
-          <a:p>
-            <a:pPr algn="l">
-              <a:lnSpc>
-                <a:spcPct val="100000"/>
-              </a:lnSpc>
-              <a:spcBef>
-                <a:spcPts val="0"/>
-              </a:spcBef>
-              <a:spcAft>
-                <a:spcPts val="400"/>
-              </a:spcAft>
-            </a:pPr>
-            <a:r>
-              <a:rPr sz="1350" b="0">
-                <a:solidFill>
-                  <a:srgbClr val="1A2540"/>
-                </a:solidFill>
-                <a:latin typeface="Segoe UI"/>
-              </a:rPr>
-              <a:t>Adapt to each student's unique schedule and habits?</a:t>
-            </a:r>
-          </a:p>
-        </p:txBody>
-      </p:sp>
     </p:spTree>
   </p:cSld>
   <p:clrMapOvr>
